--- a/Material/Projecto de TLP/Apresentação/Robotica futurista.pptx
+++ b/Material/Projecto de TLP/Apresentação/Robotica futurista.pptx
@@ -19,6 +19,7 @@
     <p:sldId id="265" r:id="rId13"/>
     <p:sldId id="271" r:id="rId14"/>
     <p:sldId id="266" r:id="rId15"/>
+    <p:sldId id="272" r:id="rId16"/>
   </p:sldIdLst>
   <p:sldSz cx="12192000" cy="6858000"/>
   <p:notesSz cx="6858000" cy="9144000"/>
@@ -125,6 +126,3853 @@
 </p:presentation>
 </file>
 
+<file path=ppt/diagrams/colors1.xml><?xml version="1.0" encoding="utf-8"?>
+<dgm:colorsDef xmlns:dgm="http://schemas.openxmlformats.org/drawingml/2006/diagram" xmlns:a="http://schemas.openxmlformats.org/drawingml/2006/main" uniqueId="urn:microsoft.com/office/officeart/2005/8/colors/accent0_3">
+  <dgm:title val=""/>
+  <dgm:desc val=""/>
+  <dgm:catLst>
+    <dgm:cat type="mainScheme" pri="10300"/>
+  </dgm:catLst>
+  <dgm:styleLbl name="node0">
+    <dgm:fillClrLst meth="repeat">
+      <a:schemeClr val="dk2"/>
+    </dgm:fillClrLst>
+    <dgm:linClrLst meth="repeat">
+      <a:schemeClr val="lt2"/>
+    </dgm:linClrLst>
+    <dgm:effectClrLst/>
+    <dgm:txLinClrLst/>
+    <dgm:txFillClrLst/>
+    <dgm:txEffectClrLst/>
+  </dgm:styleLbl>
+  <dgm:styleLbl name="alignNode1">
+    <dgm:fillClrLst meth="repeat">
+      <a:schemeClr val="dk2"/>
+    </dgm:fillClrLst>
+    <dgm:linClrLst meth="repeat">
+      <a:schemeClr val="dk2"/>
+    </dgm:linClrLst>
+    <dgm:effectClrLst/>
+    <dgm:txLinClrLst/>
+    <dgm:txFillClrLst/>
+    <dgm:txEffectClrLst/>
+  </dgm:styleLbl>
+  <dgm:styleLbl name="node1">
+    <dgm:fillClrLst meth="repeat">
+      <a:schemeClr val="dk2"/>
+    </dgm:fillClrLst>
+    <dgm:linClrLst meth="repeat">
+      <a:schemeClr val="lt2"/>
+    </dgm:linClrLst>
+    <dgm:effectClrLst/>
+    <dgm:txLinClrLst/>
+    <dgm:txFillClrLst/>
+    <dgm:txEffectClrLst/>
+  </dgm:styleLbl>
+  <dgm:styleLbl name="lnNode1">
+    <dgm:fillClrLst meth="repeat">
+      <a:schemeClr val="dk2"/>
+    </dgm:fillClrLst>
+    <dgm:linClrLst meth="repeat">
+      <a:schemeClr val="lt2"/>
+    </dgm:linClrLst>
+    <dgm:effectClrLst/>
+    <dgm:txLinClrLst/>
+    <dgm:txFillClrLst/>
+    <dgm:txEffectClrLst/>
+  </dgm:styleLbl>
+  <dgm:styleLbl name="vennNode1">
+    <dgm:fillClrLst meth="repeat">
+      <a:schemeClr val="dk2">
+        <a:alpha val="50000"/>
+      </a:schemeClr>
+    </dgm:fillClrLst>
+    <dgm:linClrLst meth="repeat">
+      <a:schemeClr val="lt2"/>
+    </dgm:linClrLst>
+    <dgm:effectClrLst/>
+    <dgm:txLinClrLst/>
+    <dgm:txFillClrLst/>
+    <dgm:txEffectClrLst/>
+  </dgm:styleLbl>
+  <dgm:styleLbl name="node2">
+    <dgm:fillClrLst meth="repeat">
+      <a:schemeClr val="dk2"/>
+    </dgm:fillClrLst>
+    <dgm:linClrLst meth="repeat">
+      <a:schemeClr val="lt2"/>
+    </dgm:linClrLst>
+    <dgm:effectClrLst/>
+    <dgm:txLinClrLst/>
+    <dgm:txFillClrLst/>
+    <dgm:txEffectClrLst/>
+  </dgm:styleLbl>
+  <dgm:styleLbl name="node3">
+    <dgm:fillClrLst meth="repeat">
+      <a:schemeClr val="dk2"/>
+    </dgm:fillClrLst>
+    <dgm:linClrLst meth="repeat">
+      <a:schemeClr val="lt2"/>
+    </dgm:linClrLst>
+    <dgm:effectClrLst/>
+    <dgm:txLinClrLst/>
+    <dgm:txFillClrLst/>
+    <dgm:txEffectClrLst/>
+  </dgm:styleLbl>
+  <dgm:styleLbl name="node4">
+    <dgm:fillClrLst meth="repeat">
+      <a:schemeClr val="dk2"/>
+    </dgm:fillClrLst>
+    <dgm:linClrLst meth="repeat">
+      <a:schemeClr val="lt2"/>
+    </dgm:linClrLst>
+    <dgm:effectClrLst/>
+    <dgm:txLinClrLst/>
+    <dgm:txFillClrLst/>
+    <dgm:txEffectClrLst/>
+  </dgm:styleLbl>
+  <dgm:styleLbl name="fgImgPlace1">
+    <dgm:fillClrLst meth="repeat">
+      <a:schemeClr val="dk2">
+        <a:tint val="50000"/>
+      </a:schemeClr>
+    </dgm:fillClrLst>
+    <dgm:linClrLst meth="repeat">
+      <a:schemeClr val="lt2"/>
+    </dgm:linClrLst>
+    <dgm:effectClrLst/>
+    <dgm:txLinClrLst/>
+    <dgm:txFillClrLst meth="repeat">
+      <a:schemeClr val="lt2"/>
+    </dgm:txFillClrLst>
+    <dgm:txEffectClrLst/>
+  </dgm:styleLbl>
+  <dgm:styleLbl name="alignImgPlace1">
+    <dgm:fillClrLst meth="repeat">
+      <a:schemeClr val="dk2">
+        <a:tint val="50000"/>
+      </a:schemeClr>
+    </dgm:fillClrLst>
+    <dgm:linClrLst meth="repeat">
+      <a:schemeClr val="dk2">
+        <a:shade val="80000"/>
+      </a:schemeClr>
+    </dgm:linClrLst>
+    <dgm:effectClrLst/>
+    <dgm:txLinClrLst/>
+    <dgm:txFillClrLst meth="repeat">
+      <a:schemeClr val="lt2"/>
+    </dgm:txFillClrLst>
+    <dgm:txEffectClrLst/>
+  </dgm:styleLbl>
+  <dgm:styleLbl name="bgImgPlace1">
+    <dgm:fillClrLst meth="repeat">
+      <a:schemeClr val="dk2">
+        <a:tint val="50000"/>
+      </a:schemeClr>
+    </dgm:fillClrLst>
+    <dgm:linClrLst meth="repeat">
+      <a:schemeClr val="dk2">
+        <a:shade val="80000"/>
+      </a:schemeClr>
+    </dgm:linClrLst>
+    <dgm:effectClrLst/>
+    <dgm:txLinClrLst/>
+    <dgm:txFillClrLst meth="repeat">
+      <a:schemeClr val="lt2"/>
+    </dgm:txFillClrLst>
+    <dgm:txEffectClrLst/>
+  </dgm:styleLbl>
+  <dgm:styleLbl name="sibTrans2D1">
+    <dgm:fillClrLst meth="repeat">
+      <a:schemeClr val="dk2">
+        <a:tint val="60000"/>
+      </a:schemeClr>
+    </dgm:fillClrLst>
+    <dgm:linClrLst meth="repeat">
+      <a:schemeClr val="dk2">
+        <a:tint val="60000"/>
+      </a:schemeClr>
+    </dgm:linClrLst>
+    <dgm:effectClrLst/>
+    <dgm:txLinClrLst/>
+    <dgm:txFillClrLst/>
+    <dgm:txEffectClrLst/>
+  </dgm:styleLbl>
+  <dgm:styleLbl name="fgSibTrans2D1">
+    <dgm:fillClrLst meth="repeat">
+      <a:schemeClr val="dk2">
+        <a:tint val="60000"/>
+      </a:schemeClr>
+    </dgm:fillClrLst>
+    <dgm:linClrLst meth="repeat">
+      <a:schemeClr val="dk2">
+        <a:tint val="60000"/>
+      </a:schemeClr>
+    </dgm:linClrLst>
+    <dgm:effectClrLst/>
+    <dgm:txLinClrLst/>
+    <dgm:txFillClrLst/>
+    <dgm:txEffectClrLst/>
+  </dgm:styleLbl>
+  <dgm:styleLbl name="bgSibTrans2D1">
+    <dgm:fillClrLst meth="repeat">
+      <a:schemeClr val="dk2">
+        <a:tint val="60000"/>
+      </a:schemeClr>
+    </dgm:fillClrLst>
+    <dgm:linClrLst meth="repeat">
+      <a:schemeClr val="dk2">
+        <a:tint val="60000"/>
+      </a:schemeClr>
+    </dgm:linClrLst>
+    <dgm:effectClrLst/>
+    <dgm:txLinClrLst/>
+    <dgm:txFillClrLst/>
+    <dgm:txEffectClrLst/>
+  </dgm:styleLbl>
+  <dgm:styleLbl name="sibTrans1D1">
+    <dgm:fillClrLst meth="repeat">
+      <a:schemeClr val="dk2"/>
+    </dgm:fillClrLst>
+    <dgm:linClrLst meth="repeat">
+      <a:schemeClr val="dk2"/>
+    </dgm:linClrLst>
+    <dgm:effectClrLst/>
+    <dgm:txLinClrLst/>
+    <dgm:txFillClrLst meth="repeat">
+      <a:schemeClr val="lt2"/>
+    </dgm:txFillClrLst>
+    <dgm:txEffectClrLst/>
+  </dgm:styleLbl>
+  <dgm:styleLbl name="callout">
+    <dgm:fillClrLst meth="repeat">
+      <a:schemeClr val="dk2"/>
+    </dgm:fillClrLst>
+    <dgm:linClrLst meth="repeat">
+      <a:schemeClr val="dk2">
+        <a:tint val="50000"/>
+      </a:schemeClr>
+    </dgm:linClrLst>
+    <dgm:effectClrLst/>
+    <dgm:txLinClrLst/>
+    <dgm:txFillClrLst meth="repeat">
+      <a:schemeClr val="lt2"/>
+    </dgm:txFillClrLst>
+    <dgm:txEffectClrLst/>
+  </dgm:styleLbl>
+  <dgm:styleLbl name="asst0">
+    <dgm:fillClrLst meth="repeat">
+      <a:schemeClr val="dk2"/>
+    </dgm:fillClrLst>
+    <dgm:linClrLst meth="repeat">
+      <a:schemeClr val="lt2"/>
+    </dgm:linClrLst>
+    <dgm:effectClrLst/>
+    <dgm:txLinClrLst/>
+    <dgm:txFillClrLst/>
+    <dgm:txEffectClrLst/>
+  </dgm:styleLbl>
+  <dgm:styleLbl name="asst1">
+    <dgm:fillClrLst meth="repeat">
+      <a:schemeClr val="dk2"/>
+    </dgm:fillClrLst>
+    <dgm:linClrLst meth="repeat">
+      <a:schemeClr val="lt2"/>
+    </dgm:linClrLst>
+    <dgm:effectClrLst/>
+    <dgm:txLinClrLst/>
+    <dgm:txFillClrLst/>
+    <dgm:txEffectClrLst/>
+  </dgm:styleLbl>
+  <dgm:styleLbl name="asst2">
+    <dgm:fillClrLst meth="repeat">
+      <a:schemeClr val="dk2"/>
+    </dgm:fillClrLst>
+    <dgm:linClrLst meth="repeat">
+      <a:schemeClr val="lt2"/>
+    </dgm:linClrLst>
+    <dgm:effectClrLst/>
+    <dgm:txLinClrLst/>
+    <dgm:txFillClrLst/>
+    <dgm:txEffectClrLst/>
+  </dgm:styleLbl>
+  <dgm:styleLbl name="asst3">
+    <dgm:fillClrLst meth="repeat">
+      <a:schemeClr val="dk2"/>
+    </dgm:fillClrLst>
+    <dgm:linClrLst meth="repeat">
+      <a:schemeClr val="lt2"/>
+    </dgm:linClrLst>
+    <dgm:effectClrLst/>
+    <dgm:txLinClrLst/>
+    <dgm:txFillClrLst/>
+    <dgm:txEffectClrLst/>
+  </dgm:styleLbl>
+  <dgm:styleLbl name="asst4">
+    <dgm:fillClrLst meth="repeat">
+      <a:schemeClr val="dk2"/>
+    </dgm:fillClrLst>
+    <dgm:linClrLst meth="repeat">
+      <a:schemeClr val="lt2"/>
+    </dgm:linClrLst>
+    <dgm:effectClrLst/>
+    <dgm:txLinClrLst/>
+    <dgm:txFillClrLst/>
+    <dgm:txEffectClrLst/>
+  </dgm:styleLbl>
+  <dgm:styleLbl name="parChTrans2D1">
+    <dgm:fillClrLst meth="repeat">
+      <a:schemeClr val="dk2">
+        <a:tint val="60000"/>
+      </a:schemeClr>
+    </dgm:fillClrLst>
+    <dgm:linClrLst meth="repeat">
+      <a:schemeClr val="dk2">
+        <a:tint val="60000"/>
+      </a:schemeClr>
+    </dgm:linClrLst>
+    <dgm:effectClrLst/>
+    <dgm:txLinClrLst/>
+    <dgm:txFillClrLst meth="repeat">
+      <a:schemeClr val="lt2"/>
+    </dgm:txFillClrLst>
+    <dgm:txEffectClrLst/>
+  </dgm:styleLbl>
+  <dgm:styleLbl name="parChTrans2D2">
+    <dgm:fillClrLst meth="repeat">
+      <a:schemeClr val="dk2"/>
+    </dgm:fillClrLst>
+    <dgm:linClrLst meth="repeat">
+      <a:schemeClr val="dk2"/>
+    </dgm:linClrLst>
+    <dgm:effectClrLst/>
+    <dgm:txLinClrLst/>
+    <dgm:txFillClrLst meth="repeat">
+      <a:schemeClr val="lt2"/>
+    </dgm:txFillClrLst>
+    <dgm:txEffectClrLst/>
+  </dgm:styleLbl>
+  <dgm:styleLbl name="parChTrans2D3">
+    <dgm:fillClrLst meth="repeat">
+      <a:schemeClr val="dk2"/>
+    </dgm:fillClrLst>
+    <dgm:linClrLst meth="repeat">
+      <a:schemeClr val="dk2"/>
+    </dgm:linClrLst>
+    <dgm:effectClrLst/>
+    <dgm:txLinClrLst/>
+    <dgm:txFillClrLst meth="repeat">
+      <a:schemeClr val="lt2"/>
+    </dgm:txFillClrLst>
+    <dgm:txEffectClrLst/>
+  </dgm:styleLbl>
+  <dgm:styleLbl name="parChTrans2D4">
+    <dgm:fillClrLst meth="repeat">
+      <a:schemeClr val="dk2"/>
+    </dgm:fillClrLst>
+    <dgm:linClrLst meth="repeat">
+      <a:schemeClr val="dk2"/>
+    </dgm:linClrLst>
+    <dgm:effectClrLst/>
+    <dgm:txLinClrLst/>
+    <dgm:txFillClrLst meth="repeat">
+      <a:schemeClr val="lt2"/>
+    </dgm:txFillClrLst>
+    <dgm:txEffectClrLst/>
+  </dgm:styleLbl>
+  <dgm:styleLbl name="parChTrans1D1">
+    <dgm:fillClrLst meth="repeat">
+      <a:schemeClr val="dk2"/>
+    </dgm:fillClrLst>
+    <dgm:linClrLst meth="repeat">
+      <a:schemeClr val="dk2">
+        <a:shade val="60000"/>
+      </a:schemeClr>
+    </dgm:linClrLst>
+    <dgm:effectClrLst/>
+    <dgm:txLinClrLst/>
+    <dgm:txFillClrLst meth="repeat">
+      <a:schemeClr val="tx1"/>
+    </dgm:txFillClrLst>
+    <dgm:txEffectClrLst/>
+  </dgm:styleLbl>
+  <dgm:styleLbl name="parChTrans1D2">
+    <dgm:fillClrLst meth="repeat">
+      <a:schemeClr val="dk2"/>
+    </dgm:fillClrLst>
+    <dgm:linClrLst meth="repeat">
+      <a:schemeClr val="dk2">
+        <a:shade val="60000"/>
+      </a:schemeClr>
+    </dgm:linClrLst>
+    <dgm:effectClrLst/>
+    <dgm:txLinClrLst/>
+    <dgm:txFillClrLst meth="repeat">
+      <a:schemeClr val="tx1"/>
+    </dgm:txFillClrLst>
+    <dgm:txEffectClrLst/>
+  </dgm:styleLbl>
+  <dgm:styleLbl name="parChTrans1D3">
+    <dgm:fillClrLst meth="repeat">
+      <a:schemeClr val="dk2"/>
+    </dgm:fillClrLst>
+    <dgm:linClrLst meth="repeat">
+      <a:schemeClr val="dk2">
+        <a:shade val="80000"/>
+      </a:schemeClr>
+    </dgm:linClrLst>
+    <dgm:effectClrLst/>
+    <dgm:txLinClrLst/>
+    <dgm:txFillClrLst meth="repeat">
+      <a:schemeClr val="tx1"/>
+    </dgm:txFillClrLst>
+    <dgm:txEffectClrLst/>
+  </dgm:styleLbl>
+  <dgm:styleLbl name="parChTrans1D4">
+    <dgm:fillClrLst meth="repeat">
+      <a:schemeClr val="dk2"/>
+    </dgm:fillClrLst>
+    <dgm:linClrLst meth="repeat">
+      <a:schemeClr val="dk2">
+        <a:shade val="80000"/>
+      </a:schemeClr>
+    </dgm:linClrLst>
+    <dgm:effectClrLst/>
+    <dgm:txLinClrLst/>
+    <dgm:txFillClrLst meth="repeat">
+      <a:schemeClr val="tx1"/>
+    </dgm:txFillClrLst>
+    <dgm:txEffectClrLst/>
+  </dgm:styleLbl>
+  <dgm:styleLbl name="fgAcc1">
+    <dgm:fillClrLst meth="repeat">
+      <a:schemeClr val="lt2">
+        <a:alpha val="90000"/>
+      </a:schemeClr>
+    </dgm:fillClrLst>
+    <dgm:linClrLst meth="repeat">
+      <a:schemeClr val="dk2"/>
+    </dgm:linClrLst>
+    <dgm:effectClrLst/>
+    <dgm:txLinClrLst/>
+    <dgm:txFillClrLst meth="repeat">
+      <a:schemeClr val="dk1"/>
+    </dgm:txFillClrLst>
+    <dgm:txEffectClrLst/>
+  </dgm:styleLbl>
+  <dgm:styleLbl name="conFgAcc1">
+    <dgm:fillClrLst meth="repeat">
+      <a:schemeClr val="lt2">
+        <a:alpha val="90000"/>
+      </a:schemeClr>
+    </dgm:fillClrLst>
+    <dgm:linClrLst meth="repeat">
+      <a:schemeClr val="dk2"/>
+    </dgm:linClrLst>
+    <dgm:effectClrLst/>
+    <dgm:txLinClrLst/>
+    <dgm:txFillClrLst meth="repeat">
+      <a:schemeClr val="dk1"/>
+    </dgm:txFillClrLst>
+    <dgm:txEffectClrLst/>
+  </dgm:styleLbl>
+  <dgm:styleLbl name="alignAcc1">
+    <dgm:fillClrLst meth="repeat">
+      <a:schemeClr val="lt2">
+        <a:alpha val="90000"/>
+      </a:schemeClr>
+    </dgm:fillClrLst>
+    <dgm:linClrLst meth="repeat">
+      <a:schemeClr val="dk2"/>
+    </dgm:linClrLst>
+    <dgm:effectClrLst/>
+    <dgm:txLinClrLst/>
+    <dgm:txFillClrLst meth="repeat">
+      <a:schemeClr val="dk1"/>
+    </dgm:txFillClrLst>
+    <dgm:txEffectClrLst/>
+  </dgm:styleLbl>
+  <dgm:styleLbl name="trAlignAcc1">
+    <dgm:fillClrLst meth="repeat">
+      <a:schemeClr val="lt2">
+        <a:alpha val="40000"/>
+      </a:schemeClr>
+    </dgm:fillClrLst>
+    <dgm:linClrLst meth="repeat">
+      <a:schemeClr val="dk2"/>
+    </dgm:linClrLst>
+    <dgm:effectClrLst/>
+    <dgm:txLinClrLst/>
+    <dgm:txFillClrLst meth="repeat">
+      <a:schemeClr val="dk1"/>
+    </dgm:txFillClrLst>
+    <dgm:txEffectClrLst/>
+  </dgm:styleLbl>
+  <dgm:styleLbl name="bgAcc1">
+    <dgm:fillClrLst meth="repeat">
+      <a:schemeClr val="lt2">
+        <a:alpha val="90000"/>
+      </a:schemeClr>
+    </dgm:fillClrLst>
+    <dgm:linClrLst meth="repeat">
+      <a:schemeClr val="dk2"/>
+    </dgm:linClrLst>
+    <dgm:effectClrLst/>
+    <dgm:txLinClrLst/>
+    <dgm:txFillClrLst meth="repeat">
+      <a:schemeClr val="dk1"/>
+    </dgm:txFillClrLst>
+    <dgm:txEffectClrLst/>
+  </dgm:styleLbl>
+  <dgm:styleLbl name="solidFgAcc1">
+    <dgm:fillClrLst meth="repeat">
+      <a:schemeClr val="lt2"/>
+    </dgm:fillClrLst>
+    <dgm:linClrLst meth="repeat">
+      <a:schemeClr val="dk2"/>
+    </dgm:linClrLst>
+    <dgm:effectClrLst/>
+    <dgm:txLinClrLst/>
+    <dgm:txFillClrLst meth="repeat">
+      <a:schemeClr val="dk1"/>
+    </dgm:txFillClrLst>
+    <dgm:txEffectClrLst/>
+  </dgm:styleLbl>
+  <dgm:styleLbl name="solidAlignAcc1">
+    <dgm:fillClrLst meth="repeat">
+      <a:schemeClr val="lt2"/>
+    </dgm:fillClrLst>
+    <dgm:linClrLst meth="repeat">
+      <a:schemeClr val="dk2"/>
+    </dgm:linClrLst>
+    <dgm:effectClrLst/>
+    <dgm:txLinClrLst/>
+    <dgm:txFillClrLst meth="repeat">
+      <a:schemeClr val="dk1"/>
+    </dgm:txFillClrLst>
+    <dgm:txEffectClrLst/>
+  </dgm:styleLbl>
+  <dgm:styleLbl name="solidBgAcc1">
+    <dgm:fillClrLst meth="repeat">
+      <a:schemeClr val="lt2"/>
+    </dgm:fillClrLst>
+    <dgm:linClrLst meth="repeat">
+      <a:schemeClr val="dk2"/>
+    </dgm:linClrLst>
+    <dgm:effectClrLst/>
+    <dgm:txLinClrLst/>
+    <dgm:txFillClrLst meth="repeat">
+      <a:schemeClr val="dk1"/>
+    </dgm:txFillClrLst>
+    <dgm:txEffectClrLst/>
+  </dgm:styleLbl>
+  <dgm:styleLbl name="fgAccFollowNode1">
+    <dgm:fillClrLst meth="repeat">
+      <a:schemeClr val="dk2">
+        <a:alpha val="90000"/>
+        <a:tint val="40000"/>
+      </a:schemeClr>
+    </dgm:fillClrLst>
+    <dgm:linClrLst meth="repeat">
+      <a:schemeClr val="dk2">
+        <a:alpha val="90000"/>
+        <a:tint val="40000"/>
+      </a:schemeClr>
+    </dgm:linClrLst>
+    <dgm:effectClrLst/>
+    <dgm:txLinClrLst/>
+    <dgm:txFillClrLst meth="repeat">
+      <a:schemeClr val="dk1"/>
+    </dgm:txFillClrLst>
+    <dgm:txEffectClrLst/>
+  </dgm:styleLbl>
+  <dgm:styleLbl name="alignAccFollowNode1">
+    <dgm:fillClrLst meth="repeat">
+      <a:schemeClr val="dk2">
+        <a:alpha val="90000"/>
+        <a:tint val="40000"/>
+      </a:schemeClr>
+    </dgm:fillClrLst>
+    <dgm:linClrLst meth="repeat">
+      <a:schemeClr val="dk2">
+        <a:alpha val="90000"/>
+        <a:tint val="40000"/>
+      </a:schemeClr>
+    </dgm:linClrLst>
+    <dgm:effectClrLst/>
+    <dgm:txLinClrLst/>
+    <dgm:txFillClrLst meth="repeat">
+      <a:schemeClr val="dk1"/>
+    </dgm:txFillClrLst>
+    <dgm:txEffectClrLst/>
+  </dgm:styleLbl>
+  <dgm:styleLbl name="bgAccFollowNode1">
+    <dgm:fillClrLst meth="repeat">
+      <a:schemeClr val="dk2">
+        <a:alpha val="90000"/>
+        <a:tint val="40000"/>
+      </a:schemeClr>
+    </dgm:fillClrLst>
+    <dgm:linClrLst meth="repeat">
+      <a:schemeClr val="dk2">
+        <a:alpha val="90000"/>
+        <a:tint val="40000"/>
+      </a:schemeClr>
+    </dgm:linClrLst>
+    <dgm:effectClrLst/>
+    <dgm:txLinClrLst/>
+    <dgm:txFillClrLst meth="repeat">
+      <a:schemeClr val="dk1"/>
+    </dgm:txFillClrLst>
+    <dgm:txEffectClrLst/>
+  </dgm:styleLbl>
+  <dgm:styleLbl name="fgAcc0">
+    <dgm:fillClrLst meth="repeat">
+      <a:schemeClr val="lt2">
+        <a:alpha val="90000"/>
+      </a:schemeClr>
+    </dgm:fillClrLst>
+    <dgm:linClrLst meth="repeat">
+      <a:schemeClr val="dk2"/>
+    </dgm:linClrLst>
+    <dgm:effectClrLst/>
+    <dgm:txLinClrLst/>
+    <dgm:txFillClrLst meth="repeat">
+      <a:schemeClr val="dk1"/>
+    </dgm:txFillClrLst>
+    <dgm:txEffectClrLst/>
+  </dgm:styleLbl>
+  <dgm:styleLbl name="fgAcc2">
+    <dgm:fillClrLst meth="repeat">
+      <a:schemeClr val="lt2">
+        <a:alpha val="90000"/>
+      </a:schemeClr>
+    </dgm:fillClrLst>
+    <dgm:linClrLst meth="repeat">
+      <a:schemeClr val="dk2"/>
+    </dgm:linClrLst>
+    <dgm:effectClrLst/>
+    <dgm:txLinClrLst/>
+    <dgm:txFillClrLst meth="repeat">
+      <a:schemeClr val="dk1"/>
+    </dgm:txFillClrLst>
+    <dgm:txEffectClrLst/>
+  </dgm:styleLbl>
+  <dgm:styleLbl name="fgAcc3">
+    <dgm:fillClrLst meth="repeat">
+      <a:schemeClr val="lt2">
+        <a:alpha val="90000"/>
+      </a:schemeClr>
+    </dgm:fillClrLst>
+    <dgm:linClrLst meth="repeat">
+      <a:schemeClr val="dk2"/>
+    </dgm:linClrLst>
+    <dgm:effectClrLst/>
+    <dgm:txLinClrLst/>
+    <dgm:txFillClrLst meth="repeat">
+      <a:schemeClr val="dk1"/>
+    </dgm:txFillClrLst>
+    <dgm:txEffectClrLst/>
+  </dgm:styleLbl>
+  <dgm:styleLbl name="fgAcc4">
+    <dgm:fillClrLst meth="repeat">
+      <a:schemeClr val="lt2">
+        <a:alpha val="90000"/>
+      </a:schemeClr>
+    </dgm:fillClrLst>
+    <dgm:linClrLst meth="repeat">
+      <a:schemeClr val="dk2"/>
+    </dgm:linClrLst>
+    <dgm:effectClrLst/>
+    <dgm:txLinClrLst/>
+    <dgm:txFillClrLst meth="repeat">
+      <a:schemeClr val="dk1"/>
+    </dgm:txFillClrLst>
+    <dgm:txEffectClrLst/>
+  </dgm:styleLbl>
+  <dgm:styleLbl name="bgShp">
+    <dgm:fillClrLst meth="repeat">
+      <a:schemeClr val="dk2">
+        <a:tint val="40000"/>
+      </a:schemeClr>
+    </dgm:fillClrLst>
+    <dgm:linClrLst meth="repeat">
+      <a:schemeClr val="dk2"/>
+    </dgm:linClrLst>
+    <dgm:effectClrLst/>
+    <dgm:txLinClrLst/>
+    <dgm:txFillClrLst meth="repeat">
+      <a:schemeClr val="dk1"/>
+    </dgm:txFillClrLst>
+    <dgm:txEffectClrLst/>
+  </dgm:styleLbl>
+  <dgm:styleLbl name="dkBgShp">
+    <dgm:fillClrLst meth="repeat">
+      <a:schemeClr val="dk2">
+        <a:shade val="80000"/>
+      </a:schemeClr>
+    </dgm:fillClrLst>
+    <dgm:linClrLst meth="repeat">
+      <a:schemeClr val="dk2"/>
+    </dgm:linClrLst>
+    <dgm:effectClrLst/>
+    <dgm:txLinClrLst/>
+    <dgm:txFillClrLst meth="repeat">
+      <a:schemeClr val="lt1"/>
+    </dgm:txFillClrLst>
+    <dgm:txEffectClrLst/>
+  </dgm:styleLbl>
+  <dgm:styleLbl name="trBgShp">
+    <dgm:fillClrLst meth="repeat">
+      <a:schemeClr val="dk2">
+        <a:tint val="50000"/>
+        <a:alpha val="40000"/>
+      </a:schemeClr>
+    </dgm:fillClrLst>
+    <dgm:linClrLst meth="repeat">
+      <a:schemeClr val="dk2"/>
+    </dgm:linClrLst>
+    <dgm:effectClrLst/>
+    <dgm:txLinClrLst/>
+    <dgm:txFillClrLst meth="repeat">
+      <a:schemeClr val="lt1"/>
+    </dgm:txFillClrLst>
+    <dgm:txEffectClrLst/>
+  </dgm:styleLbl>
+  <dgm:styleLbl name="fgShp">
+    <dgm:fillClrLst meth="repeat">
+      <a:schemeClr val="dk2">
+        <a:tint val="60000"/>
+      </a:schemeClr>
+    </dgm:fillClrLst>
+    <dgm:linClrLst meth="repeat">
+      <a:schemeClr val="lt2"/>
+    </dgm:linClrLst>
+    <dgm:effectClrLst/>
+    <dgm:txLinClrLst/>
+    <dgm:txFillClrLst meth="repeat">
+      <a:schemeClr val="dk1"/>
+    </dgm:txFillClrLst>
+    <dgm:txEffectClrLst/>
+  </dgm:styleLbl>
+  <dgm:styleLbl name="revTx">
+    <dgm:fillClrLst meth="repeat">
+      <a:schemeClr val="lt2">
+        <a:alpha val="0"/>
+      </a:schemeClr>
+    </dgm:fillClrLst>
+    <dgm:linClrLst meth="repeat">
+      <a:schemeClr val="dk1">
+        <a:alpha val="0"/>
+      </a:schemeClr>
+    </dgm:linClrLst>
+    <dgm:effectClrLst/>
+    <dgm:txLinClrLst/>
+    <dgm:txFillClrLst meth="repeat">
+      <a:schemeClr val="tx1"/>
+    </dgm:txFillClrLst>
+    <dgm:txEffectClrLst/>
+  </dgm:styleLbl>
+</dgm:colorsDef>
+</file>
+
+<file path=ppt/diagrams/data1.xml><?xml version="1.0" encoding="utf-8"?>
+<dgm:dataModel xmlns:dgm="http://schemas.openxmlformats.org/drawingml/2006/diagram" xmlns:a="http://schemas.openxmlformats.org/drawingml/2006/main">
+  <dgm:ptLst>
+    <dgm:pt modelId="{6A0489BA-7FED-4DE0-BBED-20770B297CE8}" type="doc">
+      <dgm:prSet loTypeId="urn:microsoft.com/office/officeart/2009/layout/CirclePictureHierarchy" loCatId="picture" qsTypeId="urn:microsoft.com/office/officeart/2005/8/quickstyle/simple2" qsCatId="simple" csTypeId="urn:microsoft.com/office/officeart/2005/8/colors/accent0_3" csCatId="mainScheme" phldr="1"/>
+      <dgm:spPr/>
+      <dgm:t>
+        <a:bodyPr/>
+        <a:lstStyle/>
+        <a:p>
+          <a:endParaRPr lang="pt-PT"/>
+        </a:p>
+      </dgm:t>
+    </dgm:pt>
+    <dgm:pt modelId="{FD1E1C9F-E724-473A-892C-E75212E55377}">
+      <dgm:prSet phldrT="[Text]" phldr="0"/>
+      <dgm:spPr/>
+      <dgm:t>
+        <a:bodyPr/>
+        <a:lstStyle/>
+        <a:p>
+          <a:r>
+            <a:rPr lang="pt-PT" dirty="0"/>
+            <a:t>ARS</a:t>
+          </a:r>
+        </a:p>
+      </dgm:t>
+    </dgm:pt>
+    <dgm:pt modelId="{C24487CF-84F6-4BF9-A7BF-3EFE83686711}" type="parTrans" cxnId="{3216854C-1699-426A-B219-F49547931278}">
+      <dgm:prSet/>
+      <dgm:spPr/>
+      <dgm:t>
+        <a:bodyPr/>
+        <a:lstStyle/>
+        <a:p>
+          <a:endParaRPr lang="pt-PT"/>
+        </a:p>
+      </dgm:t>
+    </dgm:pt>
+    <dgm:pt modelId="{F363D294-78CD-4143-AC1C-CB5140BD4F06}" type="sibTrans" cxnId="{3216854C-1699-426A-B219-F49547931278}">
+      <dgm:prSet/>
+      <dgm:spPr/>
+      <dgm:t>
+        <a:bodyPr/>
+        <a:lstStyle/>
+        <a:p>
+          <a:endParaRPr lang="pt-PT"/>
+        </a:p>
+      </dgm:t>
+    </dgm:pt>
+    <dgm:pt modelId="{DD6372F8-BA69-4D6D-9B49-3C857A10765C}">
+      <dgm:prSet phldrT="[Text]" phldr="0"/>
+      <dgm:spPr/>
+      <dgm:t>
+        <a:bodyPr/>
+        <a:lstStyle/>
+        <a:p>
+          <a:r>
+            <a:rPr lang="pt-PT" dirty="0"/>
+            <a:t>ANA</a:t>
+          </a:r>
+        </a:p>
+      </dgm:t>
+    </dgm:pt>
+    <dgm:pt modelId="{543F278E-4323-4A43-99D9-A54BEB9A4185}" type="parTrans" cxnId="{2AB28756-D27B-4DD3-AFF6-FDF50264677C}">
+      <dgm:prSet/>
+      <dgm:spPr/>
+      <dgm:t>
+        <a:bodyPr/>
+        <a:lstStyle/>
+        <a:p>
+          <a:endParaRPr lang="pt-PT"/>
+        </a:p>
+      </dgm:t>
+    </dgm:pt>
+    <dgm:pt modelId="{248EE542-60EE-48FA-90ED-306C18CC7809}" type="sibTrans" cxnId="{2AB28756-D27B-4DD3-AFF6-FDF50264677C}">
+      <dgm:prSet/>
+      <dgm:spPr/>
+      <dgm:t>
+        <a:bodyPr/>
+        <a:lstStyle/>
+        <a:p>
+          <a:endParaRPr lang="pt-PT"/>
+        </a:p>
+      </dgm:t>
+    </dgm:pt>
+    <dgm:pt modelId="{FDF5224B-38B1-4F0B-88C5-FD3B6365F50A}">
+      <dgm:prSet phldrT="[Text]" phldr="0"/>
+      <dgm:spPr/>
+      <dgm:t>
+        <a:bodyPr/>
+        <a:lstStyle/>
+        <a:p>
+          <a:r>
+            <a:rPr lang="pt-PT" dirty="0"/>
+            <a:t>JOSEFINA</a:t>
+          </a:r>
+        </a:p>
+      </dgm:t>
+    </dgm:pt>
+    <dgm:pt modelId="{5B197613-5BBC-47FD-90F1-8E10CEA09766}" type="parTrans" cxnId="{82D8E1FB-02EA-4EDE-8109-F7A367AD6237}">
+      <dgm:prSet/>
+      <dgm:spPr/>
+      <dgm:t>
+        <a:bodyPr/>
+        <a:lstStyle/>
+        <a:p>
+          <a:endParaRPr lang="pt-PT"/>
+        </a:p>
+      </dgm:t>
+    </dgm:pt>
+    <dgm:pt modelId="{7100053A-535D-42A7-91CA-2DE2DD29CFFF}" type="sibTrans" cxnId="{82D8E1FB-02EA-4EDE-8109-F7A367AD6237}">
+      <dgm:prSet/>
+      <dgm:spPr/>
+      <dgm:t>
+        <a:bodyPr/>
+        <a:lstStyle/>
+        <a:p>
+          <a:endParaRPr lang="pt-PT"/>
+        </a:p>
+      </dgm:t>
+    </dgm:pt>
+    <dgm:pt modelId="{9445E54E-E420-42E3-9B4D-2722E2B621EA}">
+      <dgm:prSet phldrT="[Text]" phldr="0"/>
+      <dgm:spPr/>
+      <dgm:t>
+        <a:bodyPr/>
+        <a:lstStyle/>
+        <a:p>
+          <a:r>
+            <a:rPr lang="pt-PT" dirty="0"/>
+            <a:t>ISABEL</a:t>
+          </a:r>
+        </a:p>
+      </dgm:t>
+    </dgm:pt>
+    <dgm:pt modelId="{92B93E59-A917-456C-A910-B78DB21C8BB4}" type="parTrans" cxnId="{9C275CE0-B0A5-4AEE-955D-68C0831CE25B}">
+      <dgm:prSet/>
+      <dgm:spPr/>
+      <dgm:t>
+        <a:bodyPr/>
+        <a:lstStyle/>
+        <a:p>
+          <a:endParaRPr lang="pt-PT"/>
+        </a:p>
+      </dgm:t>
+    </dgm:pt>
+    <dgm:pt modelId="{519E5AD9-8BD5-449F-8336-046DCBE41E29}" type="sibTrans" cxnId="{9C275CE0-B0A5-4AEE-955D-68C0831CE25B}">
+      <dgm:prSet/>
+      <dgm:spPr/>
+      <dgm:t>
+        <a:bodyPr/>
+        <a:lstStyle/>
+        <a:p>
+          <a:endParaRPr lang="pt-PT"/>
+        </a:p>
+      </dgm:t>
+    </dgm:pt>
+    <dgm:pt modelId="{42168DDA-A005-48E8-9920-7DF6F994924A}">
+      <dgm:prSet phldrT="[Text]" phldr="0"/>
+      <dgm:spPr/>
+      <dgm:t>
+        <a:bodyPr/>
+        <a:lstStyle/>
+        <a:p>
+          <a:r>
+            <a:rPr lang="pt-PT" dirty="0"/>
+            <a:t>MIRANDA</a:t>
+          </a:r>
+        </a:p>
+      </dgm:t>
+    </dgm:pt>
+    <dgm:pt modelId="{306AC9BC-CEE9-4900-A02B-16104BFCACE3}" type="parTrans" cxnId="{B2E8599C-931F-4164-8D1D-0F01EF9F5022}">
+      <dgm:prSet/>
+      <dgm:spPr/>
+      <dgm:t>
+        <a:bodyPr/>
+        <a:lstStyle/>
+        <a:p>
+          <a:endParaRPr lang="pt-PT"/>
+        </a:p>
+      </dgm:t>
+    </dgm:pt>
+    <dgm:pt modelId="{ACAD7B25-A38A-492E-BC76-93F82428E471}" type="sibTrans" cxnId="{B2E8599C-931F-4164-8D1D-0F01EF9F5022}">
+      <dgm:prSet/>
+      <dgm:spPr/>
+      <dgm:t>
+        <a:bodyPr/>
+        <a:lstStyle/>
+        <a:p>
+          <a:endParaRPr lang="pt-PT"/>
+        </a:p>
+      </dgm:t>
+    </dgm:pt>
+    <dgm:pt modelId="{A6D44994-A6E3-41C2-843D-4C8FBC271B1E}">
+      <dgm:prSet phldrT="[Text]" phldr="0"/>
+      <dgm:spPr/>
+      <dgm:t>
+        <a:bodyPr/>
+        <a:lstStyle/>
+        <a:p>
+          <a:r>
+            <a:rPr lang="pt-PT" dirty="0"/>
+            <a:t>NELSON</a:t>
+          </a:r>
+        </a:p>
+      </dgm:t>
+    </dgm:pt>
+    <dgm:pt modelId="{8C467DA8-F721-477D-BD78-BBB18ACE8DA6}" type="parTrans" cxnId="{B9E3EE73-D3FC-4158-B89E-C89C87C096F2}">
+      <dgm:prSet/>
+      <dgm:spPr/>
+      <dgm:t>
+        <a:bodyPr/>
+        <a:lstStyle/>
+        <a:p>
+          <a:endParaRPr lang="pt-PT"/>
+        </a:p>
+      </dgm:t>
+    </dgm:pt>
+    <dgm:pt modelId="{DD466B8C-9651-4F8C-AF25-0EA5DDDD5B5D}" type="sibTrans" cxnId="{B9E3EE73-D3FC-4158-B89E-C89C87C096F2}">
+      <dgm:prSet/>
+      <dgm:spPr/>
+      <dgm:t>
+        <a:bodyPr/>
+        <a:lstStyle/>
+        <a:p>
+          <a:endParaRPr lang="pt-PT"/>
+        </a:p>
+      </dgm:t>
+    </dgm:pt>
+    <dgm:pt modelId="{0ECF63D5-FA24-4781-8BAE-CBC486CEC14E}" type="pres">
+      <dgm:prSet presAssocID="{6A0489BA-7FED-4DE0-BBED-20770B297CE8}" presName="hierChild1" presStyleCnt="0">
+        <dgm:presLayoutVars>
+          <dgm:chPref val="1"/>
+          <dgm:dir/>
+          <dgm:animOne val="branch"/>
+          <dgm:animLvl val="lvl"/>
+          <dgm:resizeHandles/>
+        </dgm:presLayoutVars>
+      </dgm:prSet>
+      <dgm:spPr/>
+    </dgm:pt>
+    <dgm:pt modelId="{782B1A61-B7D7-49AC-9DC3-2796B1E1407B}" type="pres">
+      <dgm:prSet presAssocID="{FD1E1C9F-E724-473A-892C-E75212E55377}" presName="hierRoot1" presStyleCnt="0"/>
+      <dgm:spPr/>
+    </dgm:pt>
+    <dgm:pt modelId="{21D220F1-EFBD-4ACF-8E87-08D49210A236}" type="pres">
+      <dgm:prSet presAssocID="{FD1E1C9F-E724-473A-892C-E75212E55377}" presName="composite" presStyleCnt="0"/>
+      <dgm:spPr/>
+    </dgm:pt>
+    <dgm:pt modelId="{38D7918C-F094-4B1E-B98E-13A7FAEEF6D1}" type="pres">
+      <dgm:prSet presAssocID="{FD1E1C9F-E724-473A-892C-E75212E55377}" presName="image" presStyleLbl="node0" presStyleIdx="0" presStyleCnt="1" custScaleX="195241" custScaleY="175799" custLinFactNeighborX="-24957" custLinFactNeighborY="-17587"/>
+      <dgm:spPr>
+        <a:blipFill dpi="0" rotWithShape="1">
+          <a:blip xmlns:r="http://schemas.openxmlformats.org/officeDocument/2006/relationships" r:embed="rId1"/>
+          <a:srcRect/>
+          <a:stretch>
+            <a:fillRect l="799" t="-13658" r="-799" b="-64342"/>
+          </a:stretch>
+        </a:blipFill>
+      </dgm:spPr>
+    </dgm:pt>
+    <dgm:pt modelId="{8F52F076-6E0B-41A4-AF55-90724D66D529}" type="pres">
+      <dgm:prSet presAssocID="{FD1E1C9F-E724-473A-892C-E75212E55377}" presName="text" presStyleLbl="revTx" presStyleIdx="0" presStyleCnt="6">
+        <dgm:presLayoutVars>
+          <dgm:chPref val="3"/>
+        </dgm:presLayoutVars>
+      </dgm:prSet>
+      <dgm:spPr/>
+    </dgm:pt>
+    <dgm:pt modelId="{FDB02C3E-7908-44EB-AE91-5EF8A973C5EF}" type="pres">
+      <dgm:prSet presAssocID="{FD1E1C9F-E724-473A-892C-E75212E55377}" presName="hierChild2" presStyleCnt="0"/>
+      <dgm:spPr/>
+    </dgm:pt>
+    <dgm:pt modelId="{E675617B-9188-46A3-83DE-449D94B0A843}" type="pres">
+      <dgm:prSet presAssocID="{543F278E-4323-4A43-99D9-A54BEB9A4185}" presName="Name10" presStyleLbl="parChTrans1D2" presStyleIdx="0" presStyleCnt="2"/>
+      <dgm:spPr/>
+    </dgm:pt>
+    <dgm:pt modelId="{9DBFE138-E0AB-41ED-88B0-32CF6D15D0C9}" type="pres">
+      <dgm:prSet presAssocID="{DD6372F8-BA69-4D6D-9B49-3C857A10765C}" presName="hierRoot2" presStyleCnt="0"/>
+      <dgm:spPr/>
+    </dgm:pt>
+    <dgm:pt modelId="{8E4FD3AA-46AB-4A06-AC99-8FD0AA41ABC1}" type="pres">
+      <dgm:prSet presAssocID="{DD6372F8-BA69-4D6D-9B49-3C857A10765C}" presName="composite2" presStyleCnt="0"/>
+      <dgm:spPr/>
+    </dgm:pt>
+    <dgm:pt modelId="{3368285B-2F3E-4B5D-A9F8-819FEE92BCDF}" type="pres">
+      <dgm:prSet presAssocID="{DD6372F8-BA69-4D6D-9B49-3C857A10765C}" presName="image2" presStyleLbl="node2" presStyleIdx="0" presStyleCnt="2" custScaleX="159925" custScaleY="141584" custLinFactNeighborX="-51044" custLinFactNeighborY="-14717"/>
+      <dgm:spPr>
+        <a:blipFill dpi="0" rotWithShape="1">
+          <a:blip xmlns:r="http://schemas.openxmlformats.org/officeDocument/2006/relationships" r:embed="rId2"/>
+          <a:srcRect/>
+          <a:stretch>
+            <a:fillRect l="-1343" t="-20194" r="1343" b="-57806"/>
+          </a:stretch>
+        </a:blipFill>
+      </dgm:spPr>
+    </dgm:pt>
+    <dgm:pt modelId="{471F6052-457A-42CA-80FB-497C822D2358}" type="pres">
+      <dgm:prSet presAssocID="{DD6372F8-BA69-4D6D-9B49-3C857A10765C}" presName="text2" presStyleLbl="revTx" presStyleIdx="1" presStyleCnt="6">
+        <dgm:presLayoutVars>
+          <dgm:chPref val="3"/>
+        </dgm:presLayoutVars>
+      </dgm:prSet>
+      <dgm:spPr/>
+    </dgm:pt>
+    <dgm:pt modelId="{355FB3C2-491D-4C85-B989-633B170FB5D1}" type="pres">
+      <dgm:prSet presAssocID="{DD6372F8-BA69-4D6D-9B49-3C857A10765C}" presName="hierChild3" presStyleCnt="0"/>
+      <dgm:spPr/>
+    </dgm:pt>
+    <dgm:pt modelId="{6FDF28CE-194F-406F-957E-06BA792CDA96}" type="pres">
+      <dgm:prSet presAssocID="{5B197613-5BBC-47FD-90F1-8E10CEA09766}" presName="Name17" presStyleLbl="parChTrans1D3" presStyleIdx="0" presStyleCnt="3"/>
+      <dgm:spPr/>
+    </dgm:pt>
+    <dgm:pt modelId="{46635CA2-1F00-4DC1-BA39-E58426FCD3B1}" type="pres">
+      <dgm:prSet presAssocID="{FDF5224B-38B1-4F0B-88C5-FD3B6365F50A}" presName="hierRoot3" presStyleCnt="0"/>
+      <dgm:spPr/>
+    </dgm:pt>
+    <dgm:pt modelId="{DE6935D8-FA81-4EE3-9544-C5514F3A6D66}" type="pres">
+      <dgm:prSet presAssocID="{FDF5224B-38B1-4F0B-88C5-FD3B6365F50A}" presName="composite3" presStyleCnt="0"/>
+      <dgm:spPr/>
+    </dgm:pt>
+    <dgm:pt modelId="{F0B04AB3-51CB-45FD-8050-86148BACD1AA}" type="pres">
+      <dgm:prSet presAssocID="{FDF5224B-38B1-4F0B-88C5-FD3B6365F50A}" presName="image3" presStyleLbl="node3" presStyleIdx="0" presStyleCnt="3" custScaleX="123978" custScaleY="113964"/>
+      <dgm:spPr>
+        <a:blipFill dpi="0" rotWithShape="1">
+          <a:blip xmlns:r="http://schemas.openxmlformats.org/officeDocument/2006/relationships" r:embed="rId3"/>
+          <a:srcRect/>
+          <a:stretch>
+            <a:fillRect l="5373" t="-14821" r="-5373" b="-63179"/>
+          </a:stretch>
+        </a:blipFill>
+      </dgm:spPr>
+    </dgm:pt>
+    <dgm:pt modelId="{DC850937-05DD-4773-86A3-ED182F1EED2A}" type="pres">
+      <dgm:prSet presAssocID="{FDF5224B-38B1-4F0B-88C5-FD3B6365F50A}" presName="text3" presStyleLbl="revTx" presStyleIdx="2" presStyleCnt="6">
+        <dgm:presLayoutVars>
+          <dgm:chPref val="3"/>
+        </dgm:presLayoutVars>
+      </dgm:prSet>
+      <dgm:spPr/>
+    </dgm:pt>
+    <dgm:pt modelId="{6055B95D-0500-4427-9AB0-08F15003B6E4}" type="pres">
+      <dgm:prSet presAssocID="{FDF5224B-38B1-4F0B-88C5-FD3B6365F50A}" presName="hierChild4" presStyleCnt="0"/>
+      <dgm:spPr/>
+    </dgm:pt>
+    <dgm:pt modelId="{8DBA8C56-1973-4A48-B279-76D0FF0237A9}" type="pres">
+      <dgm:prSet presAssocID="{92B93E59-A917-456C-A910-B78DB21C8BB4}" presName="Name17" presStyleLbl="parChTrans1D3" presStyleIdx="1" presStyleCnt="3"/>
+      <dgm:spPr/>
+    </dgm:pt>
+    <dgm:pt modelId="{CE56A935-98AE-4354-A027-3C9249244B5A}" type="pres">
+      <dgm:prSet presAssocID="{9445E54E-E420-42E3-9B4D-2722E2B621EA}" presName="hierRoot3" presStyleCnt="0"/>
+      <dgm:spPr/>
+    </dgm:pt>
+    <dgm:pt modelId="{1C647E88-42A9-49AE-9D38-4F77E2849C3A}" type="pres">
+      <dgm:prSet presAssocID="{9445E54E-E420-42E3-9B4D-2722E2B621EA}" presName="composite3" presStyleCnt="0"/>
+      <dgm:spPr/>
+    </dgm:pt>
+    <dgm:pt modelId="{1D49E93C-BF67-40D0-982D-38C8B72821EE}" type="pres">
+      <dgm:prSet presAssocID="{9445E54E-E420-42E3-9B4D-2722E2B621EA}" presName="image3" presStyleLbl="node3" presStyleIdx="1" presStyleCnt="3" custScaleX="131449" custScaleY="115297" custLinFactNeighborX="-21597" custLinFactNeighborY="-9738"/>
+      <dgm:spPr>
+        <a:blipFill dpi="0" rotWithShape="1">
+          <a:blip xmlns:r="http://schemas.openxmlformats.org/officeDocument/2006/relationships" r:embed="rId4"/>
+          <a:srcRect/>
+          <a:stretch>
+            <a:fillRect l="-1710" t="-42697" r="1710" b="-40349"/>
+          </a:stretch>
+        </a:blipFill>
+      </dgm:spPr>
+    </dgm:pt>
+    <dgm:pt modelId="{EC97655F-DAB6-4129-A7C0-018F6F84875C}" type="pres">
+      <dgm:prSet presAssocID="{9445E54E-E420-42E3-9B4D-2722E2B621EA}" presName="text3" presStyleLbl="revTx" presStyleIdx="3" presStyleCnt="6">
+        <dgm:presLayoutVars>
+          <dgm:chPref val="3"/>
+        </dgm:presLayoutVars>
+      </dgm:prSet>
+      <dgm:spPr/>
+    </dgm:pt>
+    <dgm:pt modelId="{CD2FA286-500F-4276-BA46-1F5BC02C95FE}" type="pres">
+      <dgm:prSet presAssocID="{9445E54E-E420-42E3-9B4D-2722E2B621EA}" presName="hierChild4" presStyleCnt="0"/>
+      <dgm:spPr/>
+    </dgm:pt>
+    <dgm:pt modelId="{4CAF798C-F011-4FD2-B086-29FBF9593A96}" type="pres">
+      <dgm:prSet presAssocID="{306AC9BC-CEE9-4900-A02B-16104BFCACE3}" presName="Name10" presStyleLbl="parChTrans1D2" presStyleIdx="1" presStyleCnt="2"/>
+      <dgm:spPr/>
+    </dgm:pt>
+    <dgm:pt modelId="{6303582E-5BC6-4F05-8F8D-293EAE208B20}" type="pres">
+      <dgm:prSet presAssocID="{42168DDA-A005-48E8-9920-7DF6F994924A}" presName="hierRoot2" presStyleCnt="0"/>
+      <dgm:spPr/>
+    </dgm:pt>
+    <dgm:pt modelId="{1534FFDF-B7F3-460E-94B5-689D910E4109}" type="pres">
+      <dgm:prSet presAssocID="{42168DDA-A005-48E8-9920-7DF6F994924A}" presName="composite2" presStyleCnt="0"/>
+      <dgm:spPr/>
+    </dgm:pt>
+    <dgm:pt modelId="{27A8BCFD-6416-49CC-BE0A-E3ADCDB30BD6}" type="pres">
+      <dgm:prSet presAssocID="{42168DDA-A005-48E8-9920-7DF6F994924A}" presName="image2" presStyleLbl="node2" presStyleIdx="1" presStyleCnt="2"/>
+      <dgm:spPr/>
+    </dgm:pt>
+    <dgm:pt modelId="{B388C2FB-54F6-4C00-95AA-D898D1242344}" type="pres">
+      <dgm:prSet presAssocID="{42168DDA-A005-48E8-9920-7DF6F994924A}" presName="text2" presStyleLbl="revTx" presStyleIdx="4" presStyleCnt="6">
+        <dgm:presLayoutVars>
+          <dgm:chPref val="3"/>
+        </dgm:presLayoutVars>
+      </dgm:prSet>
+      <dgm:spPr/>
+    </dgm:pt>
+    <dgm:pt modelId="{11266713-8FFC-487A-ABC8-92E41664F612}" type="pres">
+      <dgm:prSet presAssocID="{42168DDA-A005-48E8-9920-7DF6F994924A}" presName="hierChild3" presStyleCnt="0"/>
+      <dgm:spPr/>
+    </dgm:pt>
+    <dgm:pt modelId="{3244BFBA-1F82-4C0B-9D21-6AC716DDD94E}" type="pres">
+      <dgm:prSet presAssocID="{8C467DA8-F721-477D-BD78-BBB18ACE8DA6}" presName="Name17" presStyleLbl="parChTrans1D3" presStyleIdx="2" presStyleCnt="3"/>
+      <dgm:spPr/>
+    </dgm:pt>
+    <dgm:pt modelId="{088FFB0A-5710-4FA1-8601-E508D185C4F3}" type="pres">
+      <dgm:prSet presAssocID="{A6D44994-A6E3-41C2-843D-4C8FBC271B1E}" presName="hierRoot3" presStyleCnt="0"/>
+      <dgm:spPr/>
+    </dgm:pt>
+    <dgm:pt modelId="{581E9627-D277-4061-B39E-C3D8DED8D409}" type="pres">
+      <dgm:prSet presAssocID="{A6D44994-A6E3-41C2-843D-4C8FBC271B1E}" presName="composite3" presStyleCnt="0"/>
+      <dgm:spPr/>
+    </dgm:pt>
+    <dgm:pt modelId="{88EC96F8-89AC-4F40-8D3F-6ECA6F7251A7}" type="pres">
+      <dgm:prSet presAssocID="{A6D44994-A6E3-41C2-843D-4C8FBC271B1E}" presName="image3" presStyleLbl="node3" presStyleIdx="2" presStyleCnt="3"/>
+      <dgm:spPr/>
+    </dgm:pt>
+    <dgm:pt modelId="{F8791728-81B7-44BE-88E8-76678CE52FD2}" type="pres">
+      <dgm:prSet presAssocID="{A6D44994-A6E3-41C2-843D-4C8FBC271B1E}" presName="text3" presStyleLbl="revTx" presStyleIdx="5" presStyleCnt="6">
+        <dgm:presLayoutVars>
+          <dgm:chPref val="3"/>
+        </dgm:presLayoutVars>
+      </dgm:prSet>
+      <dgm:spPr/>
+    </dgm:pt>
+    <dgm:pt modelId="{AECE7286-CCB2-4C72-B8D9-BBCB30BE78AA}" type="pres">
+      <dgm:prSet presAssocID="{A6D44994-A6E3-41C2-843D-4C8FBC271B1E}" presName="hierChild4" presStyleCnt="0"/>
+      <dgm:spPr/>
+    </dgm:pt>
+  </dgm:ptLst>
+  <dgm:cxnLst>
+    <dgm:cxn modelId="{1F4B8503-9EB1-48E8-8A6D-49B528710E61}" type="presOf" srcId="{A6D44994-A6E3-41C2-843D-4C8FBC271B1E}" destId="{F8791728-81B7-44BE-88E8-76678CE52FD2}" srcOrd="0" destOrd="0" presId="urn:microsoft.com/office/officeart/2009/layout/CirclePictureHierarchy"/>
+    <dgm:cxn modelId="{F480990C-408C-4FB7-9927-C2F8853F1A8D}" type="presOf" srcId="{543F278E-4323-4A43-99D9-A54BEB9A4185}" destId="{E675617B-9188-46A3-83DE-449D94B0A843}" srcOrd="0" destOrd="0" presId="urn:microsoft.com/office/officeart/2009/layout/CirclePictureHierarchy"/>
+    <dgm:cxn modelId="{5FB9A91E-B33C-4C52-8AEE-71B499FDCAE8}" type="presOf" srcId="{6A0489BA-7FED-4DE0-BBED-20770B297CE8}" destId="{0ECF63D5-FA24-4781-8BAE-CBC486CEC14E}" srcOrd="0" destOrd="0" presId="urn:microsoft.com/office/officeart/2009/layout/CirclePictureHierarchy"/>
+    <dgm:cxn modelId="{0EED9135-C9F5-4622-A34C-CD662FED8C6E}" type="presOf" srcId="{42168DDA-A005-48E8-9920-7DF6F994924A}" destId="{B388C2FB-54F6-4C00-95AA-D898D1242344}" srcOrd="0" destOrd="0" presId="urn:microsoft.com/office/officeart/2009/layout/CirclePictureHierarchy"/>
+    <dgm:cxn modelId="{864F683F-4B17-44B6-8950-E5D286017CD1}" type="presOf" srcId="{8C467DA8-F721-477D-BD78-BBB18ACE8DA6}" destId="{3244BFBA-1F82-4C0B-9D21-6AC716DDD94E}" srcOrd="0" destOrd="0" presId="urn:microsoft.com/office/officeart/2009/layout/CirclePictureHierarchy"/>
+    <dgm:cxn modelId="{AE6A4E40-7A16-42E2-AD01-AD7444C5A300}" type="presOf" srcId="{DD6372F8-BA69-4D6D-9B49-3C857A10765C}" destId="{471F6052-457A-42CA-80FB-497C822D2358}" srcOrd="0" destOrd="0" presId="urn:microsoft.com/office/officeart/2009/layout/CirclePictureHierarchy"/>
+    <dgm:cxn modelId="{3216854C-1699-426A-B219-F49547931278}" srcId="{6A0489BA-7FED-4DE0-BBED-20770B297CE8}" destId="{FD1E1C9F-E724-473A-892C-E75212E55377}" srcOrd="0" destOrd="0" parTransId="{C24487CF-84F6-4BF9-A7BF-3EFE83686711}" sibTransId="{F363D294-78CD-4143-AC1C-CB5140BD4F06}"/>
+    <dgm:cxn modelId="{5E912772-F36D-483E-A722-6DA6BDA47AC2}" type="presOf" srcId="{9445E54E-E420-42E3-9B4D-2722E2B621EA}" destId="{EC97655F-DAB6-4129-A7C0-018F6F84875C}" srcOrd="0" destOrd="0" presId="urn:microsoft.com/office/officeart/2009/layout/CirclePictureHierarchy"/>
+    <dgm:cxn modelId="{B9E3EE73-D3FC-4158-B89E-C89C87C096F2}" srcId="{42168DDA-A005-48E8-9920-7DF6F994924A}" destId="{A6D44994-A6E3-41C2-843D-4C8FBC271B1E}" srcOrd="0" destOrd="0" parTransId="{8C467DA8-F721-477D-BD78-BBB18ACE8DA6}" sibTransId="{DD466B8C-9651-4F8C-AF25-0EA5DDDD5B5D}"/>
+    <dgm:cxn modelId="{2AB28756-D27B-4DD3-AFF6-FDF50264677C}" srcId="{FD1E1C9F-E724-473A-892C-E75212E55377}" destId="{DD6372F8-BA69-4D6D-9B49-3C857A10765C}" srcOrd="0" destOrd="0" parTransId="{543F278E-4323-4A43-99D9-A54BEB9A4185}" sibTransId="{248EE542-60EE-48FA-90ED-306C18CC7809}"/>
+    <dgm:cxn modelId="{EA239F59-509F-4ACB-A3F9-0BA494E63BCC}" type="presOf" srcId="{92B93E59-A917-456C-A910-B78DB21C8BB4}" destId="{8DBA8C56-1973-4A48-B279-76D0FF0237A9}" srcOrd="0" destOrd="0" presId="urn:microsoft.com/office/officeart/2009/layout/CirclePictureHierarchy"/>
+    <dgm:cxn modelId="{B2E8599C-931F-4164-8D1D-0F01EF9F5022}" srcId="{FD1E1C9F-E724-473A-892C-E75212E55377}" destId="{42168DDA-A005-48E8-9920-7DF6F994924A}" srcOrd="1" destOrd="0" parTransId="{306AC9BC-CEE9-4900-A02B-16104BFCACE3}" sibTransId="{ACAD7B25-A38A-492E-BC76-93F82428E471}"/>
+    <dgm:cxn modelId="{E5EEE2B5-1A03-4881-A5AA-14D16C02AE2B}" type="presOf" srcId="{306AC9BC-CEE9-4900-A02B-16104BFCACE3}" destId="{4CAF798C-F011-4FD2-B086-29FBF9593A96}" srcOrd="0" destOrd="0" presId="urn:microsoft.com/office/officeart/2009/layout/CirclePictureHierarchy"/>
+    <dgm:cxn modelId="{BBF72EB6-0FB9-417B-A83C-3D52604965C4}" type="presOf" srcId="{FDF5224B-38B1-4F0B-88C5-FD3B6365F50A}" destId="{DC850937-05DD-4773-86A3-ED182F1EED2A}" srcOrd="0" destOrd="0" presId="urn:microsoft.com/office/officeart/2009/layout/CirclePictureHierarchy"/>
+    <dgm:cxn modelId="{7843E8CC-6F25-41B0-9655-F264735A57AF}" type="presOf" srcId="{FD1E1C9F-E724-473A-892C-E75212E55377}" destId="{8F52F076-6E0B-41A4-AF55-90724D66D529}" srcOrd="0" destOrd="0" presId="urn:microsoft.com/office/officeart/2009/layout/CirclePictureHierarchy"/>
+    <dgm:cxn modelId="{EE324ED8-C5AF-4F4F-9F3D-061E5E3819F2}" type="presOf" srcId="{5B197613-5BBC-47FD-90F1-8E10CEA09766}" destId="{6FDF28CE-194F-406F-957E-06BA792CDA96}" srcOrd="0" destOrd="0" presId="urn:microsoft.com/office/officeart/2009/layout/CirclePictureHierarchy"/>
+    <dgm:cxn modelId="{9C275CE0-B0A5-4AEE-955D-68C0831CE25B}" srcId="{DD6372F8-BA69-4D6D-9B49-3C857A10765C}" destId="{9445E54E-E420-42E3-9B4D-2722E2B621EA}" srcOrd="1" destOrd="0" parTransId="{92B93E59-A917-456C-A910-B78DB21C8BB4}" sibTransId="{519E5AD9-8BD5-449F-8336-046DCBE41E29}"/>
+    <dgm:cxn modelId="{82D8E1FB-02EA-4EDE-8109-F7A367AD6237}" srcId="{DD6372F8-BA69-4D6D-9B49-3C857A10765C}" destId="{FDF5224B-38B1-4F0B-88C5-FD3B6365F50A}" srcOrd="0" destOrd="0" parTransId="{5B197613-5BBC-47FD-90F1-8E10CEA09766}" sibTransId="{7100053A-535D-42A7-91CA-2DE2DD29CFFF}"/>
+    <dgm:cxn modelId="{19FA2294-72CC-4FE6-888A-8DD9F1B75C81}" type="presParOf" srcId="{0ECF63D5-FA24-4781-8BAE-CBC486CEC14E}" destId="{782B1A61-B7D7-49AC-9DC3-2796B1E1407B}" srcOrd="0" destOrd="0" presId="urn:microsoft.com/office/officeart/2009/layout/CirclePictureHierarchy"/>
+    <dgm:cxn modelId="{294C36C4-2C8C-404A-98E8-45086FB90D0B}" type="presParOf" srcId="{782B1A61-B7D7-49AC-9DC3-2796B1E1407B}" destId="{21D220F1-EFBD-4ACF-8E87-08D49210A236}" srcOrd="0" destOrd="0" presId="urn:microsoft.com/office/officeart/2009/layout/CirclePictureHierarchy"/>
+    <dgm:cxn modelId="{73B99019-21E4-4317-8129-67C751EEB31C}" type="presParOf" srcId="{21D220F1-EFBD-4ACF-8E87-08D49210A236}" destId="{38D7918C-F094-4B1E-B98E-13A7FAEEF6D1}" srcOrd="0" destOrd="0" presId="urn:microsoft.com/office/officeart/2009/layout/CirclePictureHierarchy"/>
+    <dgm:cxn modelId="{3D55A968-4A65-4D31-BD7C-3B4FA77E878A}" type="presParOf" srcId="{21D220F1-EFBD-4ACF-8E87-08D49210A236}" destId="{8F52F076-6E0B-41A4-AF55-90724D66D529}" srcOrd="1" destOrd="0" presId="urn:microsoft.com/office/officeart/2009/layout/CirclePictureHierarchy"/>
+    <dgm:cxn modelId="{030E53C4-1700-4403-A55C-67113D60B4B4}" type="presParOf" srcId="{782B1A61-B7D7-49AC-9DC3-2796B1E1407B}" destId="{FDB02C3E-7908-44EB-AE91-5EF8A973C5EF}" srcOrd="1" destOrd="0" presId="urn:microsoft.com/office/officeart/2009/layout/CirclePictureHierarchy"/>
+    <dgm:cxn modelId="{A06B8F32-3EF2-47D5-A39D-161B1EB27BB9}" type="presParOf" srcId="{FDB02C3E-7908-44EB-AE91-5EF8A973C5EF}" destId="{E675617B-9188-46A3-83DE-449D94B0A843}" srcOrd="0" destOrd="0" presId="urn:microsoft.com/office/officeart/2009/layout/CirclePictureHierarchy"/>
+    <dgm:cxn modelId="{276408DF-81FA-447F-B917-1C629A65F692}" type="presParOf" srcId="{FDB02C3E-7908-44EB-AE91-5EF8A973C5EF}" destId="{9DBFE138-E0AB-41ED-88B0-32CF6D15D0C9}" srcOrd="1" destOrd="0" presId="urn:microsoft.com/office/officeart/2009/layout/CirclePictureHierarchy"/>
+    <dgm:cxn modelId="{080FA34C-0936-4201-817B-015459139BF5}" type="presParOf" srcId="{9DBFE138-E0AB-41ED-88B0-32CF6D15D0C9}" destId="{8E4FD3AA-46AB-4A06-AC99-8FD0AA41ABC1}" srcOrd="0" destOrd="0" presId="urn:microsoft.com/office/officeart/2009/layout/CirclePictureHierarchy"/>
+    <dgm:cxn modelId="{46E605A3-3BB7-4A04-9F74-880B0BB54E8D}" type="presParOf" srcId="{8E4FD3AA-46AB-4A06-AC99-8FD0AA41ABC1}" destId="{3368285B-2F3E-4B5D-A9F8-819FEE92BCDF}" srcOrd="0" destOrd="0" presId="urn:microsoft.com/office/officeart/2009/layout/CirclePictureHierarchy"/>
+    <dgm:cxn modelId="{F9D1A689-FC08-4320-AD99-BD56AEF5E891}" type="presParOf" srcId="{8E4FD3AA-46AB-4A06-AC99-8FD0AA41ABC1}" destId="{471F6052-457A-42CA-80FB-497C822D2358}" srcOrd="1" destOrd="0" presId="urn:microsoft.com/office/officeart/2009/layout/CirclePictureHierarchy"/>
+    <dgm:cxn modelId="{E94E2B3F-77EF-4C90-ACCF-147ED81A33B4}" type="presParOf" srcId="{9DBFE138-E0AB-41ED-88B0-32CF6D15D0C9}" destId="{355FB3C2-491D-4C85-B989-633B170FB5D1}" srcOrd="1" destOrd="0" presId="urn:microsoft.com/office/officeart/2009/layout/CirclePictureHierarchy"/>
+    <dgm:cxn modelId="{48153742-744C-4439-8B30-336FD03F0DC0}" type="presParOf" srcId="{355FB3C2-491D-4C85-B989-633B170FB5D1}" destId="{6FDF28CE-194F-406F-957E-06BA792CDA96}" srcOrd="0" destOrd="0" presId="urn:microsoft.com/office/officeart/2009/layout/CirclePictureHierarchy"/>
+    <dgm:cxn modelId="{C735A2B7-7509-44EC-B13D-FECFB3B24578}" type="presParOf" srcId="{355FB3C2-491D-4C85-B989-633B170FB5D1}" destId="{46635CA2-1F00-4DC1-BA39-E58426FCD3B1}" srcOrd="1" destOrd="0" presId="urn:microsoft.com/office/officeart/2009/layout/CirclePictureHierarchy"/>
+    <dgm:cxn modelId="{47D8F209-9E6A-4F99-87F3-B0DB11F558FD}" type="presParOf" srcId="{46635CA2-1F00-4DC1-BA39-E58426FCD3B1}" destId="{DE6935D8-FA81-4EE3-9544-C5514F3A6D66}" srcOrd="0" destOrd="0" presId="urn:microsoft.com/office/officeart/2009/layout/CirclePictureHierarchy"/>
+    <dgm:cxn modelId="{7EE27418-0A32-4BD4-A388-B685DAD3AA4E}" type="presParOf" srcId="{DE6935D8-FA81-4EE3-9544-C5514F3A6D66}" destId="{F0B04AB3-51CB-45FD-8050-86148BACD1AA}" srcOrd="0" destOrd="0" presId="urn:microsoft.com/office/officeart/2009/layout/CirclePictureHierarchy"/>
+    <dgm:cxn modelId="{162B7032-4D6E-49D6-B9A0-248ADD45F40A}" type="presParOf" srcId="{DE6935D8-FA81-4EE3-9544-C5514F3A6D66}" destId="{DC850937-05DD-4773-86A3-ED182F1EED2A}" srcOrd="1" destOrd="0" presId="urn:microsoft.com/office/officeart/2009/layout/CirclePictureHierarchy"/>
+    <dgm:cxn modelId="{24BA0C8C-708E-49A9-8661-9A6690091407}" type="presParOf" srcId="{46635CA2-1F00-4DC1-BA39-E58426FCD3B1}" destId="{6055B95D-0500-4427-9AB0-08F15003B6E4}" srcOrd="1" destOrd="0" presId="urn:microsoft.com/office/officeart/2009/layout/CirclePictureHierarchy"/>
+    <dgm:cxn modelId="{B88FCC07-CD8E-4186-A270-FABBE7B0286B}" type="presParOf" srcId="{355FB3C2-491D-4C85-B989-633B170FB5D1}" destId="{8DBA8C56-1973-4A48-B279-76D0FF0237A9}" srcOrd="2" destOrd="0" presId="urn:microsoft.com/office/officeart/2009/layout/CirclePictureHierarchy"/>
+    <dgm:cxn modelId="{DF16884B-4E67-4E76-A564-3F5EB9B3EBDC}" type="presParOf" srcId="{355FB3C2-491D-4C85-B989-633B170FB5D1}" destId="{CE56A935-98AE-4354-A027-3C9249244B5A}" srcOrd="3" destOrd="0" presId="urn:microsoft.com/office/officeart/2009/layout/CirclePictureHierarchy"/>
+    <dgm:cxn modelId="{9AF01F5E-4C36-4D0F-9E75-1F89544199F5}" type="presParOf" srcId="{CE56A935-98AE-4354-A027-3C9249244B5A}" destId="{1C647E88-42A9-49AE-9D38-4F77E2849C3A}" srcOrd="0" destOrd="0" presId="urn:microsoft.com/office/officeart/2009/layout/CirclePictureHierarchy"/>
+    <dgm:cxn modelId="{0804BB21-8AB7-4149-BC69-5F55EDA70408}" type="presParOf" srcId="{1C647E88-42A9-49AE-9D38-4F77E2849C3A}" destId="{1D49E93C-BF67-40D0-982D-38C8B72821EE}" srcOrd="0" destOrd="0" presId="urn:microsoft.com/office/officeart/2009/layout/CirclePictureHierarchy"/>
+    <dgm:cxn modelId="{EE90F81B-C31F-4F5C-88FA-12DADF603D15}" type="presParOf" srcId="{1C647E88-42A9-49AE-9D38-4F77E2849C3A}" destId="{EC97655F-DAB6-4129-A7C0-018F6F84875C}" srcOrd="1" destOrd="0" presId="urn:microsoft.com/office/officeart/2009/layout/CirclePictureHierarchy"/>
+    <dgm:cxn modelId="{9578CFEA-EB4F-4741-B0D4-4965B943FA5C}" type="presParOf" srcId="{CE56A935-98AE-4354-A027-3C9249244B5A}" destId="{CD2FA286-500F-4276-BA46-1F5BC02C95FE}" srcOrd="1" destOrd="0" presId="urn:microsoft.com/office/officeart/2009/layout/CirclePictureHierarchy"/>
+    <dgm:cxn modelId="{8C002FA1-4381-44E1-91C6-8D107A689E98}" type="presParOf" srcId="{FDB02C3E-7908-44EB-AE91-5EF8A973C5EF}" destId="{4CAF798C-F011-4FD2-B086-29FBF9593A96}" srcOrd="2" destOrd="0" presId="urn:microsoft.com/office/officeart/2009/layout/CirclePictureHierarchy"/>
+    <dgm:cxn modelId="{81678A09-9B94-4E2A-9FD8-360702D92151}" type="presParOf" srcId="{FDB02C3E-7908-44EB-AE91-5EF8A973C5EF}" destId="{6303582E-5BC6-4F05-8F8D-293EAE208B20}" srcOrd="3" destOrd="0" presId="urn:microsoft.com/office/officeart/2009/layout/CirclePictureHierarchy"/>
+    <dgm:cxn modelId="{561396E5-C537-4F4F-85DE-EC074C49F66B}" type="presParOf" srcId="{6303582E-5BC6-4F05-8F8D-293EAE208B20}" destId="{1534FFDF-B7F3-460E-94B5-689D910E4109}" srcOrd="0" destOrd="0" presId="urn:microsoft.com/office/officeart/2009/layout/CirclePictureHierarchy"/>
+    <dgm:cxn modelId="{E0447F50-D4D9-4DF3-8263-996CB630A216}" type="presParOf" srcId="{1534FFDF-B7F3-460E-94B5-689D910E4109}" destId="{27A8BCFD-6416-49CC-BE0A-E3ADCDB30BD6}" srcOrd="0" destOrd="0" presId="urn:microsoft.com/office/officeart/2009/layout/CirclePictureHierarchy"/>
+    <dgm:cxn modelId="{AF27AB73-5107-420B-8B2A-5E30AFCDE0A4}" type="presParOf" srcId="{1534FFDF-B7F3-460E-94B5-689D910E4109}" destId="{B388C2FB-54F6-4C00-95AA-D898D1242344}" srcOrd="1" destOrd="0" presId="urn:microsoft.com/office/officeart/2009/layout/CirclePictureHierarchy"/>
+    <dgm:cxn modelId="{A37E72F3-38D8-42BB-9C61-FA4634A4C47D}" type="presParOf" srcId="{6303582E-5BC6-4F05-8F8D-293EAE208B20}" destId="{11266713-8FFC-487A-ABC8-92E41664F612}" srcOrd="1" destOrd="0" presId="urn:microsoft.com/office/officeart/2009/layout/CirclePictureHierarchy"/>
+    <dgm:cxn modelId="{82F156E6-E897-497B-9572-B19E663E37EF}" type="presParOf" srcId="{11266713-8FFC-487A-ABC8-92E41664F612}" destId="{3244BFBA-1F82-4C0B-9D21-6AC716DDD94E}" srcOrd="0" destOrd="0" presId="urn:microsoft.com/office/officeart/2009/layout/CirclePictureHierarchy"/>
+    <dgm:cxn modelId="{0ED651C5-B38E-41AB-B72C-C3DACB24E491}" type="presParOf" srcId="{11266713-8FFC-487A-ABC8-92E41664F612}" destId="{088FFB0A-5710-4FA1-8601-E508D185C4F3}" srcOrd="1" destOrd="0" presId="urn:microsoft.com/office/officeart/2009/layout/CirclePictureHierarchy"/>
+    <dgm:cxn modelId="{EBC565AD-BF31-4A7C-8C9D-85864881C66D}" type="presParOf" srcId="{088FFB0A-5710-4FA1-8601-E508D185C4F3}" destId="{581E9627-D277-4061-B39E-C3D8DED8D409}" srcOrd="0" destOrd="0" presId="urn:microsoft.com/office/officeart/2009/layout/CirclePictureHierarchy"/>
+    <dgm:cxn modelId="{385A3909-E619-4F6E-8CB3-444E7176C4EB}" type="presParOf" srcId="{581E9627-D277-4061-B39E-C3D8DED8D409}" destId="{88EC96F8-89AC-4F40-8D3F-6ECA6F7251A7}" srcOrd="0" destOrd="0" presId="urn:microsoft.com/office/officeart/2009/layout/CirclePictureHierarchy"/>
+    <dgm:cxn modelId="{4D6639F8-3578-4202-8A89-072F40447C0D}" type="presParOf" srcId="{581E9627-D277-4061-B39E-C3D8DED8D409}" destId="{F8791728-81B7-44BE-88E8-76678CE52FD2}" srcOrd="1" destOrd="0" presId="urn:microsoft.com/office/officeart/2009/layout/CirclePictureHierarchy"/>
+    <dgm:cxn modelId="{C69F2CA2-1566-485A-A21F-05208A9E5104}" type="presParOf" srcId="{088FFB0A-5710-4FA1-8601-E508D185C4F3}" destId="{AECE7286-CCB2-4C72-B8D9-BBCB30BE78AA}" srcOrd="1" destOrd="0" presId="urn:microsoft.com/office/officeart/2009/layout/CirclePictureHierarchy"/>
+  </dgm:cxnLst>
+  <dgm:bg/>
+  <dgm:whole/>
+  <dgm:extLst>
+    <a:ext uri="http://schemas.microsoft.com/office/drawing/2008/diagram">
+      <dsp:dataModelExt xmlns:dsp="http://schemas.microsoft.com/office/drawing/2008/diagram" relId="rId6" minVer="http://schemas.openxmlformats.org/drawingml/2006/diagram"/>
+    </a:ext>
+  </dgm:extLst>
+</dgm:dataModel>
+</file>
+
+<file path=ppt/diagrams/drawing1.xml><?xml version="1.0" encoding="utf-8"?>
+<dsp:drawing xmlns:dgm="http://schemas.openxmlformats.org/drawingml/2006/diagram" xmlns:dsp="http://schemas.microsoft.com/office/drawing/2008/diagram" xmlns:a="http://schemas.openxmlformats.org/drawingml/2006/main">
+  <dsp:spTree>
+    <dsp:nvGrpSpPr>
+      <dsp:cNvPr id="0" name=""/>
+      <dsp:cNvGrpSpPr/>
+    </dsp:nvGrpSpPr>
+    <dsp:grpSpPr/>
+    <dsp:sp modelId="{3244BFBA-1F82-4C0B-9D21-6AC716DDD94E}">
+      <dsp:nvSpPr>
+        <dsp:cNvPr id="0" name=""/>
+        <dsp:cNvSpPr/>
+      </dsp:nvSpPr>
+      <dsp:spPr>
+        <a:xfrm>
+          <a:off x="6116375" y="3295123"/>
+          <a:ext cx="91440" cy="309038"/>
+        </a:xfrm>
+        <a:custGeom>
+          <a:avLst/>
+          <a:gdLst/>
+          <a:ahLst/>
+          <a:cxnLst/>
+          <a:rect l="0" t="0" r="0" b="0"/>
+          <a:pathLst>
+            <a:path>
+              <a:moveTo>
+                <a:pt x="45720" y="0"/>
+              </a:moveTo>
+              <a:lnTo>
+                <a:pt x="45720" y="309038"/>
+              </a:lnTo>
+            </a:path>
+          </a:pathLst>
+        </a:custGeom>
+        <a:noFill/>
+        <a:ln w="25400" cap="flat" cmpd="sng" algn="ctr">
+          <a:solidFill>
+            <a:schemeClr val="dk2">
+              <a:shade val="80000"/>
+              <a:hueOff val="0"/>
+              <a:satOff val="0"/>
+              <a:lumOff val="0"/>
+              <a:alphaOff val="0"/>
+            </a:schemeClr>
+          </a:solidFill>
+          <a:prstDash val="solid"/>
+        </a:ln>
+        <a:effectLst/>
+      </dsp:spPr>
+      <dsp:style>
+        <a:lnRef idx="2">
+          <a:scrgbClr r="0" g="0" b="0"/>
+        </a:lnRef>
+        <a:fillRef idx="0">
+          <a:scrgbClr r="0" g="0" b="0"/>
+        </a:fillRef>
+        <a:effectRef idx="0">
+          <a:scrgbClr r="0" g="0" b="0"/>
+        </a:effectRef>
+        <a:fontRef idx="minor"/>
+      </dsp:style>
+    </dsp:sp>
+    <dsp:sp modelId="{4CAF798C-F011-4FD2-B086-29FBF9593A96}">
+      <dsp:nvSpPr>
+        <dsp:cNvPr id="0" name=""/>
+        <dsp:cNvSpPr/>
+      </dsp:nvSpPr>
+      <dsp:spPr>
+        <a:xfrm>
+          <a:off x="3985916" y="1832468"/>
+          <a:ext cx="2176178" cy="481580"/>
+        </a:xfrm>
+        <a:custGeom>
+          <a:avLst/>
+          <a:gdLst/>
+          <a:ahLst/>
+          <a:cxnLst/>
+          <a:rect l="0" t="0" r="0" b="0"/>
+          <a:pathLst>
+            <a:path>
+              <a:moveTo>
+                <a:pt x="0" y="0"/>
+              </a:moveTo>
+              <a:lnTo>
+                <a:pt x="0" y="328287"/>
+              </a:lnTo>
+              <a:lnTo>
+                <a:pt x="2176178" y="328287"/>
+              </a:lnTo>
+              <a:lnTo>
+                <a:pt x="2176178" y="481580"/>
+              </a:lnTo>
+            </a:path>
+          </a:pathLst>
+        </a:custGeom>
+        <a:noFill/>
+        <a:ln w="25400" cap="flat" cmpd="sng" algn="ctr">
+          <a:solidFill>
+            <a:schemeClr val="dk2">
+              <a:shade val="60000"/>
+              <a:hueOff val="0"/>
+              <a:satOff val="0"/>
+              <a:lumOff val="0"/>
+              <a:alphaOff val="0"/>
+            </a:schemeClr>
+          </a:solidFill>
+          <a:prstDash val="solid"/>
+        </a:ln>
+        <a:effectLst/>
+      </dsp:spPr>
+      <dsp:style>
+        <a:lnRef idx="2">
+          <a:scrgbClr r="0" g="0" b="0"/>
+        </a:lnRef>
+        <a:fillRef idx="0">
+          <a:scrgbClr r="0" g="0" b="0"/>
+        </a:fillRef>
+        <a:effectRef idx="0">
+          <a:scrgbClr r="0" g="0" b="0"/>
+        </a:effectRef>
+        <a:fontRef idx="minor"/>
+      </dsp:style>
+    </dsp:sp>
+    <dsp:sp modelId="{8DBA8C56-1973-4A48-B279-76D0FF0237A9}">
+      <dsp:nvSpPr>
+        <dsp:cNvPr id="0" name=""/>
+        <dsp:cNvSpPr/>
+      </dsp:nvSpPr>
+      <dsp:spPr>
+        <a:xfrm>
+          <a:off x="1625413" y="3556256"/>
+          <a:ext cx="1626843" cy="355433"/>
+        </a:xfrm>
+        <a:custGeom>
+          <a:avLst/>
+          <a:gdLst/>
+          <a:ahLst/>
+          <a:cxnLst/>
+          <a:rect l="0" t="0" r="0" b="0"/>
+          <a:pathLst>
+            <a:path>
+              <a:moveTo>
+                <a:pt x="0" y="0"/>
+              </a:moveTo>
+              <a:lnTo>
+                <a:pt x="0" y="202140"/>
+              </a:lnTo>
+              <a:lnTo>
+                <a:pt x="1626843" y="202140"/>
+              </a:lnTo>
+              <a:lnTo>
+                <a:pt x="1626843" y="355433"/>
+              </a:lnTo>
+            </a:path>
+          </a:pathLst>
+        </a:custGeom>
+        <a:noFill/>
+        <a:ln w="25400" cap="flat" cmpd="sng" algn="ctr">
+          <a:solidFill>
+            <a:schemeClr val="dk2">
+              <a:shade val="80000"/>
+              <a:hueOff val="0"/>
+              <a:satOff val="0"/>
+              <a:lumOff val="0"/>
+              <a:alphaOff val="0"/>
+            </a:schemeClr>
+          </a:solidFill>
+          <a:prstDash val="solid"/>
+        </a:ln>
+        <a:effectLst/>
+      </dsp:spPr>
+      <dsp:style>
+        <a:lnRef idx="2">
+          <a:scrgbClr r="0" g="0" b="0"/>
+        </a:lnRef>
+        <a:fillRef idx="0">
+          <a:scrgbClr r="0" g="0" b="0"/>
+        </a:fillRef>
+        <a:effectRef idx="0">
+          <a:scrgbClr r="0" g="0" b="0"/>
+        </a:effectRef>
+        <a:fontRef idx="minor"/>
+      </dsp:style>
+    </dsp:sp>
+    <dsp:sp modelId="{6FDF28CE-194F-406F-957E-06BA792CDA96}">
+      <dsp:nvSpPr>
+        <dsp:cNvPr id="0" name=""/>
+        <dsp:cNvSpPr/>
+      </dsp:nvSpPr>
+      <dsp:spPr>
+        <a:xfrm>
+          <a:off x="611913" y="3556256"/>
+          <a:ext cx="1013499" cy="450970"/>
+        </a:xfrm>
+        <a:custGeom>
+          <a:avLst/>
+          <a:gdLst/>
+          <a:ahLst/>
+          <a:cxnLst/>
+          <a:rect l="0" t="0" r="0" b="0"/>
+          <a:pathLst>
+            <a:path>
+              <a:moveTo>
+                <a:pt x="1013499" y="0"/>
+              </a:moveTo>
+              <a:lnTo>
+                <a:pt x="1013499" y="297677"/>
+              </a:lnTo>
+              <a:lnTo>
+                <a:pt x="0" y="297677"/>
+              </a:lnTo>
+              <a:lnTo>
+                <a:pt x="0" y="450970"/>
+              </a:lnTo>
+            </a:path>
+          </a:pathLst>
+        </a:custGeom>
+        <a:noFill/>
+        <a:ln w="25400" cap="flat" cmpd="sng" algn="ctr">
+          <a:solidFill>
+            <a:schemeClr val="dk2">
+              <a:shade val="80000"/>
+              <a:hueOff val="0"/>
+              <a:satOff val="0"/>
+              <a:lumOff val="0"/>
+              <a:alphaOff val="0"/>
+            </a:schemeClr>
+          </a:solidFill>
+          <a:prstDash val="solid"/>
+        </a:ln>
+        <a:effectLst/>
+      </dsp:spPr>
+      <dsp:style>
+        <a:lnRef idx="2">
+          <a:scrgbClr r="0" g="0" b="0"/>
+        </a:lnRef>
+        <a:fillRef idx="0">
+          <a:scrgbClr r="0" g="0" b="0"/>
+        </a:fillRef>
+        <a:effectRef idx="0">
+          <a:scrgbClr r="0" g="0" b="0"/>
+        </a:effectRef>
+        <a:fontRef idx="minor"/>
+      </dsp:style>
+    </dsp:sp>
+    <dsp:sp modelId="{E675617B-9188-46A3-83DE-449D94B0A843}">
+      <dsp:nvSpPr>
+        <dsp:cNvPr id="0" name=""/>
+        <dsp:cNvSpPr/>
+      </dsp:nvSpPr>
+      <dsp:spPr>
+        <a:xfrm>
+          <a:off x="1625413" y="1832468"/>
+          <a:ext cx="2360503" cy="334742"/>
+        </a:xfrm>
+        <a:custGeom>
+          <a:avLst/>
+          <a:gdLst/>
+          <a:ahLst/>
+          <a:cxnLst/>
+          <a:rect l="0" t="0" r="0" b="0"/>
+          <a:pathLst>
+            <a:path>
+              <a:moveTo>
+                <a:pt x="2360503" y="0"/>
+              </a:moveTo>
+              <a:lnTo>
+                <a:pt x="2360503" y="181449"/>
+              </a:lnTo>
+              <a:lnTo>
+                <a:pt x="0" y="181449"/>
+              </a:lnTo>
+              <a:lnTo>
+                <a:pt x="0" y="334742"/>
+              </a:lnTo>
+            </a:path>
+          </a:pathLst>
+        </a:custGeom>
+        <a:noFill/>
+        <a:ln w="25400" cap="flat" cmpd="sng" algn="ctr">
+          <a:solidFill>
+            <a:schemeClr val="dk2">
+              <a:shade val="60000"/>
+              <a:hueOff val="0"/>
+              <a:satOff val="0"/>
+              <a:lumOff val="0"/>
+              <a:alphaOff val="0"/>
+            </a:schemeClr>
+          </a:solidFill>
+          <a:prstDash val="solid"/>
+        </a:ln>
+        <a:effectLst/>
+      </dsp:spPr>
+      <dsp:style>
+        <a:lnRef idx="2">
+          <a:scrgbClr r="0" g="0" b="0"/>
+        </a:lnRef>
+        <a:fillRef idx="0">
+          <a:scrgbClr r="0" g="0" b="0"/>
+        </a:fillRef>
+        <a:effectRef idx="0">
+          <a:scrgbClr r="0" g="0" b="0"/>
+        </a:effectRef>
+        <a:fontRef idx="minor"/>
+      </dsp:style>
+    </dsp:sp>
+    <dsp:sp modelId="{38D7918C-F094-4B1E-B98E-13A7FAEEF6D1}">
+      <dsp:nvSpPr>
+        <dsp:cNvPr id="0" name=""/>
+        <dsp:cNvSpPr/>
+      </dsp:nvSpPr>
+      <dsp:spPr>
+        <a:xfrm>
+          <a:off x="3028185" y="107748"/>
+          <a:ext cx="1915460" cy="1724720"/>
+        </a:xfrm>
+        <a:prstGeom prst="ellipse">
+          <a:avLst/>
+        </a:prstGeom>
+        <a:blipFill dpi="0" rotWithShape="1">
+          <a:blip xmlns:r="http://schemas.openxmlformats.org/officeDocument/2006/relationships" r:embed="rId1"/>
+          <a:srcRect/>
+          <a:stretch>
+            <a:fillRect l="799" t="-13658" r="-799" b="-64342"/>
+          </a:stretch>
+        </a:blipFill>
+        <a:ln w="38100" cap="flat" cmpd="sng" algn="ctr">
+          <a:solidFill>
+            <a:schemeClr val="lt2">
+              <a:hueOff val="0"/>
+              <a:satOff val="0"/>
+              <a:lumOff val="0"/>
+              <a:alphaOff val="0"/>
+            </a:schemeClr>
+          </a:solidFill>
+          <a:prstDash val="solid"/>
+        </a:ln>
+        <a:effectLst>
+          <a:outerShdw blurRad="40000" dist="20000" dir="5400000" rotWithShape="0">
+            <a:srgbClr val="000000">
+              <a:alpha val="38000"/>
+            </a:srgbClr>
+          </a:outerShdw>
+        </a:effectLst>
+      </dsp:spPr>
+      <dsp:style>
+        <a:lnRef idx="3">
+          <a:scrgbClr r="0" g="0" b="0"/>
+        </a:lnRef>
+        <a:fillRef idx="1">
+          <a:scrgbClr r="0" g="0" b="0"/>
+        </a:fillRef>
+        <a:effectRef idx="1">
+          <a:scrgbClr r="0" g="0" b="0"/>
+        </a:effectRef>
+        <a:fontRef idx="minor">
+          <a:schemeClr val="lt1"/>
+        </a:fontRef>
+      </dsp:style>
+    </dsp:sp>
+    <dsp:sp modelId="{8F52F076-6E0B-41A4-AF55-90724D66D529}">
+      <dsp:nvSpPr>
+        <dsp:cNvPr id="0" name=""/>
+        <dsp:cNvSpPr/>
+      </dsp:nvSpPr>
+      <dsp:spPr>
+        <a:xfrm>
+          <a:off x="4721300" y="649659"/>
+          <a:ext cx="1471612" cy="981075"/>
+        </a:xfrm>
+        <a:prstGeom prst="rect">
+          <a:avLst/>
+        </a:prstGeom>
+        <a:noFill/>
+        <a:ln>
+          <a:noFill/>
+        </a:ln>
+        <a:effectLst/>
+      </dsp:spPr>
+      <dsp:style>
+        <a:lnRef idx="0">
+          <a:scrgbClr r="0" g="0" b="0"/>
+        </a:lnRef>
+        <a:fillRef idx="0">
+          <a:scrgbClr r="0" g="0" b="0"/>
+        </a:fillRef>
+        <a:effectRef idx="0">
+          <a:scrgbClr r="0" g="0" b="0"/>
+        </a:effectRef>
+        <a:fontRef idx="minor"/>
+      </dsp:style>
+      <dsp:txBody>
+        <a:bodyPr spcFirstLastPara="0" vert="horz" wrap="square" lIns="95250" tIns="95250" rIns="95250" bIns="95250" numCol="1" spcCol="1270" anchor="ctr" anchorCtr="0">
+          <a:noAutofit/>
+        </a:bodyPr>
+        <a:lstStyle/>
+        <a:p>
+          <a:pPr marL="0" lvl="0" indent="0" algn="l" defTabSz="1111250">
+            <a:lnSpc>
+              <a:spcPct val="90000"/>
+            </a:lnSpc>
+            <a:spcBef>
+              <a:spcPct val="0"/>
+            </a:spcBef>
+            <a:spcAft>
+              <a:spcPct val="35000"/>
+            </a:spcAft>
+            <a:buNone/>
+          </a:pPr>
+          <a:r>
+            <a:rPr lang="pt-PT" sz="2500" kern="1200" dirty="0"/>
+            <a:t>ARS</a:t>
+          </a:r>
+        </a:p>
+      </dsp:txBody>
+      <dsp:txXfrm>
+        <a:off x="4721300" y="649659"/>
+        <a:ext cx="1471612" cy="981075"/>
+      </dsp:txXfrm>
+    </dsp:sp>
+    <dsp:sp modelId="{3368285B-2F3E-4B5D-A9F8-819FEE92BCDF}">
+      <dsp:nvSpPr>
+        <dsp:cNvPr id="0" name=""/>
+        <dsp:cNvSpPr/>
+      </dsp:nvSpPr>
+      <dsp:spPr>
+        <a:xfrm>
+          <a:off x="840920" y="2167211"/>
+          <a:ext cx="1568984" cy="1389045"/>
+        </a:xfrm>
+        <a:prstGeom prst="ellipse">
+          <a:avLst/>
+        </a:prstGeom>
+        <a:blipFill dpi="0" rotWithShape="1">
+          <a:blip xmlns:r="http://schemas.openxmlformats.org/officeDocument/2006/relationships" r:embed="rId2"/>
+          <a:srcRect/>
+          <a:stretch>
+            <a:fillRect l="-1343" t="-20194" r="1343" b="-57806"/>
+          </a:stretch>
+        </a:blipFill>
+        <a:ln w="38100" cap="flat" cmpd="sng" algn="ctr">
+          <a:solidFill>
+            <a:schemeClr val="lt2">
+              <a:hueOff val="0"/>
+              <a:satOff val="0"/>
+              <a:lumOff val="0"/>
+              <a:alphaOff val="0"/>
+            </a:schemeClr>
+          </a:solidFill>
+          <a:prstDash val="solid"/>
+        </a:ln>
+        <a:effectLst>
+          <a:outerShdw blurRad="40000" dist="20000" dir="5400000" rotWithShape="0">
+            <a:srgbClr val="000000">
+              <a:alpha val="38000"/>
+            </a:srgbClr>
+          </a:outerShdw>
+        </a:effectLst>
+      </dsp:spPr>
+      <dsp:style>
+        <a:lnRef idx="3">
+          <a:scrgbClr r="0" g="0" b="0"/>
+        </a:lnRef>
+        <a:fillRef idx="1">
+          <a:scrgbClr r="0" g="0" b="0"/>
+        </a:fillRef>
+        <a:effectRef idx="1">
+          <a:scrgbClr r="0" g="0" b="0"/>
+        </a:effectRef>
+        <a:fontRef idx="minor">
+          <a:schemeClr val="lt1"/>
+        </a:fontRef>
+      </dsp:style>
+    </dsp:sp>
+    <dsp:sp modelId="{471F6052-457A-42CA-80FB-497C822D2358}">
+      <dsp:nvSpPr>
+        <dsp:cNvPr id="0" name=""/>
+        <dsp:cNvSpPr/>
+      </dsp:nvSpPr>
+      <dsp:spPr>
+        <a:xfrm>
+          <a:off x="2616730" y="2513128"/>
+          <a:ext cx="1471612" cy="981075"/>
+        </a:xfrm>
+        <a:prstGeom prst="rect">
+          <a:avLst/>
+        </a:prstGeom>
+        <a:noFill/>
+        <a:ln>
+          <a:noFill/>
+        </a:ln>
+        <a:effectLst/>
+      </dsp:spPr>
+      <dsp:style>
+        <a:lnRef idx="0">
+          <a:scrgbClr r="0" g="0" b="0"/>
+        </a:lnRef>
+        <a:fillRef idx="0">
+          <a:scrgbClr r="0" g="0" b="0"/>
+        </a:fillRef>
+        <a:effectRef idx="0">
+          <a:scrgbClr r="0" g="0" b="0"/>
+        </a:effectRef>
+        <a:fontRef idx="minor"/>
+      </dsp:style>
+      <dsp:txBody>
+        <a:bodyPr spcFirstLastPara="0" vert="horz" wrap="square" lIns="95250" tIns="95250" rIns="95250" bIns="95250" numCol="1" spcCol="1270" anchor="ctr" anchorCtr="0">
+          <a:noAutofit/>
+        </a:bodyPr>
+        <a:lstStyle/>
+        <a:p>
+          <a:pPr marL="0" lvl="0" indent="0" algn="l" defTabSz="1111250">
+            <a:lnSpc>
+              <a:spcPct val="90000"/>
+            </a:lnSpc>
+            <a:spcBef>
+              <a:spcPct val="0"/>
+            </a:spcBef>
+            <a:spcAft>
+              <a:spcPct val="35000"/>
+            </a:spcAft>
+            <a:buNone/>
+          </a:pPr>
+          <a:r>
+            <a:rPr lang="pt-PT" sz="2500" kern="1200" dirty="0"/>
+            <a:t>ANA</a:t>
+          </a:r>
+        </a:p>
+      </dsp:txBody>
+      <dsp:txXfrm>
+        <a:off x="2616730" y="2513128"/>
+        <a:ext cx="1471612" cy="981075"/>
+      </dsp:txXfrm>
+    </dsp:sp>
+    <dsp:sp modelId="{F0B04AB3-51CB-45FD-8050-86148BACD1AA}">
+      <dsp:nvSpPr>
+        <dsp:cNvPr id="0" name=""/>
+        <dsp:cNvSpPr/>
+      </dsp:nvSpPr>
+      <dsp:spPr>
+        <a:xfrm>
+          <a:off x="3754" y="4007227"/>
+          <a:ext cx="1216317" cy="1118072"/>
+        </a:xfrm>
+        <a:prstGeom prst="ellipse">
+          <a:avLst/>
+        </a:prstGeom>
+        <a:blipFill dpi="0" rotWithShape="1">
+          <a:blip xmlns:r="http://schemas.openxmlformats.org/officeDocument/2006/relationships" r:embed="rId3"/>
+          <a:srcRect/>
+          <a:stretch>
+            <a:fillRect l="5373" t="-14821" r="-5373" b="-63179"/>
+          </a:stretch>
+        </a:blipFill>
+        <a:ln w="38100" cap="flat" cmpd="sng" algn="ctr">
+          <a:solidFill>
+            <a:schemeClr val="lt2">
+              <a:hueOff val="0"/>
+              <a:satOff val="0"/>
+              <a:lumOff val="0"/>
+              <a:alphaOff val="0"/>
+            </a:schemeClr>
+          </a:solidFill>
+          <a:prstDash val="solid"/>
+        </a:ln>
+        <a:effectLst>
+          <a:outerShdw blurRad="40000" dist="20000" dir="5400000" rotWithShape="0">
+            <a:srgbClr val="000000">
+              <a:alpha val="38000"/>
+            </a:srgbClr>
+          </a:outerShdw>
+        </a:effectLst>
+      </dsp:spPr>
+      <dsp:style>
+        <a:lnRef idx="3">
+          <a:scrgbClr r="0" g="0" b="0"/>
+        </a:lnRef>
+        <a:fillRef idx="1">
+          <a:scrgbClr r="0" g="0" b="0"/>
+        </a:fillRef>
+        <a:effectRef idx="1">
+          <a:scrgbClr r="0" g="0" b="0"/>
+        </a:effectRef>
+        <a:fontRef idx="minor">
+          <a:schemeClr val="lt1"/>
+        </a:fontRef>
+      </dsp:style>
+    </dsp:sp>
+    <dsp:sp modelId="{DC850937-05DD-4773-86A3-ED182F1EED2A}">
+      <dsp:nvSpPr>
+        <dsp:cNvPr id="0" name=""/>
+        <dsp:cNvSpPr/>
+      </dsp:nvSpPr>
+      <dsp:spPr>
+        <a:xfrm>
+          <a:off x="1102450" y="4073273"/>
+          <a:ext cx="1471612" cy="981075"/>
+        </a:xfrm>
+        <a:prstGeom prst="rect">
+          <a:avLst/>
+        </a:prstGeom>
+        <a:noFill/>
+        <a:ln>
+          <a:noFill/>
+        </a:ln>
+        <a:effectLst/>
+      </dsp:spPr>
+      <dsp:style>
+        <a:lnRef idx="0">
+          <a:scrgbClr r="0" g="0" b="0"/>
+        </a:lnRef>
+        <a:fillRef idx="0">
+          <a:scrgbClr r="0" g="0" b="0"/>
+        </a:fillRef>
+        <a:effectRef idx="0">
+          <a:scrgbClr r="0" g="0" b="0"/>
+        </a:effectRef>
+        <a:fontRef idx="minor"/>
+      </dsp:style>
+      <dsp:txBody>
+        <a:bodyPr spcFirstLastPara="0" vert="horz" wrap="square" lIns="95250" tIns="95250" rIns="95250" bIns="95250" numCol="1" spcCol="1270" anchor="ctr" anchorCtr="0">
+          <a:noAutofit/>
+        </a:bodyPr>
+        <a:lstStyle/>
+        <a:p>
+          <a:pPr marL="0" lvl="0" indent="0" algn="l" defTabSz="1111250">
+            <a:lnSpc>
+              <a:spcPct val="90000"/>
+            </a:lnSpc>
+            <a:spcBef>
+              <a:spcPct val="0"/>
+            </a:spcBef>
+            <a:spcAft>
+              <a:spcPct val="35000"/>
+            </a:spcAft>
+            <a:buNone/>
+          </a:pPr>
+          <a:r>
+            <a:rPr lang="pt-PT" sz="2500" kern="1200" dirty="0"/>
+            <a:t>JOSEFINA</a:t>
+          </a:r>
+        </a:p>
+      </dsp:txBody>
+      <dsp:txXfrm>
+        <a:off x="1102450" y="4073273"/>
+        <a:ext cx="1471612" cy="981075"/>
+      </dsp:txXfrm>
+    </dsp:sp>
+    <dsp:sp modelId="{1D49E93C-BF67-40D0-982D-38C8B72821EE}">
+      <dsp:nvSpPr>
+        <dsp:cNvPr id="0" name=""/>
+        <dsp:cNvSpPr/>
+      </dsp:nvSpPr>
+      <dsp:spPr>
+        <a:xfrm>
+          <a:off x="2607449" y="3911689"/>
+          <a:ext cx="1289613" cy="1131150"/>
+        </a:xfrm>
+        <a:prstGeom prst="ellipse">
+          <a:avLst/>
+        </a:prstGeom>
+        <a:blipFill dpi="0" rotWithShape="1">
+          <a:blip xmlns:r="http://schemas.openxmlformats.org/officeDocument/2006/relationships" r:embed="rId4"/>
+          <a:srcRect/>
+          <a:stretch>
+            <a:fillRect l="-1710" t="-42697" r="1710" b="-40349"/>
+          </a:stretch>
+        </a:blipFill>
+        <a:ln w="38100" cap="flat" cmpd="sng" algn="ctr">
+          <a:solidFill>
+            <a:schemeClr val="lt2">
+              <a:hueOff val="0"/>
+              <a:satOff val="0"/>
+              <a:lumOff val="0"/>
+              <a:alphaOff val="0"/>
+            </a:schemeClr>
+          </a:solidFill>
+          <a:prstDash val="solid"/>
+        </a:ln>
+        <a:effectLst>
+          <a:outerShdw blurRad="40000" dist="20000" dir="5400000" rotWithShape="0">
+            <a:srgbClr val="000000">
+              <a:alpha val="38000"/>
+            </a:srgbClr>
+          </a:outerShdw>
+        </a:effectLst>
+      </dsp:spPr>
+      <dsp:style>
+        <a:lnRef idx="3">
+          <a:scrgbClr r="0" g="0" b="0"/>
+        </a:lnRef>
+        <a:fillRef idx="1">
+          <a:scrgbClr r="0" g="0" b="0"/>
+        </a:fillRef>
+        <a:effectRef idx="1">
+          <a:scrgbClr r="0" g="0" b="0"/>
+        </a:effectRef>
+        <a:fontRef idx="minor">
+          <a:schemeClr val="lt1"/>
+        </a:fontRef>
+      </dsp:style>
+    </dsp:sp>
+    <dsp:sp modelId="{EC97655F-DAB6-4129-A7C0-018F6F84875C}">
+      <dsp:nvSpPr>
+        <dsp:cNvPr id="0" name=""/>
+        <dsp:cNvSpPr/>
+      </dsp:nvSpPr>
+      <dsp:spPr>
+        <a:xfrm>
+          <a:off x="3954676" y="4079811"/>
+          <a:ext cx="1471612" cy="981075"/>
+        </a:xfrm>
+        <a:prstGeom prst="rect">
+          <a:avLst/>
+        </a:prstGeom>
+        <a:noFill/>
+        <a:ln>
+          <a:noFill/>
+        </a:ln>
+        <a:effectLst/>
+      </dsp:spPr>
+      <dsp:style>
+        <a:lnRef idx="0">
+          <a:scrgbClr r="0" g="0" b="0"/>
+        </a:lnRef>
+        <a:fillRef idx="0">
+          <a:scrgbClr r="0" g="0" b="0"/>
+        </a:fillRef>
+        <a:effectRef idx="0">
+          <a:scrgbClr r="0" g="0" b="0"/>
+        </a:effectRef>
+        <a:fontRef idx="minor"/>
+      </dsp:style>
+      <dsp:txBody>
+        <a:bodyPr spcFirstLastPara="0" vert="horz" wrap="square" lIns="95250" tIns="95250" rIns="95250" bIns="95250" numCol="1" spcCol="1270" anchor="ctr" anchorCtr="0">
+          <a:noAutofit/>
+        </a:bodyPr>
+        <a:lstStyle/>
+        <a:p>
+          <a:pPr marL="0" lvl="0" indent="0" algn="l" defTabSz="1111250">
+            <a:lnSpc>
+              <a:spcPct val="90000"/>
+            </a:lnSpc>
+            <a:spcBef>
+              <a:spcPct val="0"/>
+            </a:spcBef>
+            <a:spcAft>
+              <a:spcPct val="35000"/>
+            </a:spcAft>
+            <a:buNone/>
+          </a:pPr>
+          <a:r>
+            <a:rPr lang="pt-PT" sz="2500" kern="1200" dirty="0"/>
+            <a:t>ISABEL</a:t>
+          </a:r>
+        </a:p>
+      </dsp:txBody>
+      <dsp:txXfrm>
+        <a:off x="3954676" y="4079811"/>
+        <a:ext cx="1471612" cy="981075"/>
+      </dsp:txXfrm>
+    </dsp:sp>
+    <dsp:sp modelId="{27A8BCFD-6416-49CC-BE0A-E3ADCDB30BD6}">
+      <dsp:nvSpPr>
+        <dsp:cNvPr id="0" name=""/>
+        <dsp:cNvSpPr/>
+      </dsp:nvSpPr>
+      <dsp:spPr>
+        <a:xfrm>
+          <a:off x="5671557" y="2314048"/>
+          <a:ext cx="981075" cy="981075"/>
+        </a:xfrm>
+        <a:prstGeom prst="ellipse">
+          <a:avLst/>
+        </a:prstGeom>
+        <a:solidFill>
+          <a:schemeClr val="dk2">
+            <a:hueOff val="0"/>
+            <a:satOff val="0"/>
+            <a:lumOff val="0"/>
+            <a:alphaOff val="0"/>
+          </a:schemeClr>
+        </a:solidFill>
+        <a:ln w="38100" cap="flat" cmpd="sng" algn="ctr">
+          <a:solidFill>
+            <a:schemeClr val="lt2">
+              <a:hueOff val="0"/>
+              <a:satOff val="0"/>
+              <a:lumOff val="0"/>
+              <a:alphaOff val="0"/>
+            </a:schemeClr>
+          </a:solidFill>
+          <a:prstDash val="solid"/>
+        </a:ln>
+        <a:effectLst>
+          <a:outerShdw blurRad="40000" dist="20000" dir="5400000" rotWithShape="0">
+            <a:srgbClr val="000000">
+              <a:alpha val="38000"/>
+            </a:srgbClr>
+          </a:outerShdw>
+        </a:effectLst>
+      </dsp:spPr>
+      <dsp:style>
+        <a:lnRef idx="3">
+          <a:scrgbClr r="0" g="0" b="0"/>
+        </a:lnRef>
+        <a:fillRef idx="1">
+          <a:scrgbClr r="0" g="0" b="0"/>
+        </a:fillRef>
+        <a:effectRef idx="1">
+          <a:scrgbClr r="0" g="0" b="0"/>
+        </a:effectRef>
+        <a:fontRef idx="minor">
+          <a:schemeClr val="lt1"/>
+        </a:fontRef>
+      </dsp:style>
+    </dsp:sp>
+    <dsp:sp modelId="{B388C2FB-54F6-4C00-95AA-D898D1242344}">
+      <dsp:nvSpPr>
+        <dsp:cNvPr id="0" name=""/>
+        <dsp:cNvSpPr/>
+      </dsp:nvSpPr>
+      <dsp:spPr>
+        <a:xfrm>
+          <a:off x="6652632" y="2311595"/>
+          <a:ext cx="1471612" cy="981075"/>
+        </a:xfrm>
+        <a:prstGeom prst="rect">
+          <a:avLst/>
+        </a:prstGeom>
+        <a:noFill/>
+        <a:ln>
+          <a:noFill/>
+        </a:ln>
+        <a:effectLst/>
+      </dsp:spPr>
+      <dsp:style>
+        <a:lnRef idx="0">
+          <a:scrgbClr r="0" g="0" b="0"/>
+        </a:lnRef>
+        <a:fillRef idx="0">
+          <a:scrgbClr r="0" g="0" b="0"/>
+        </a:fillRef>
+        <a:effectRef idx="0">
+          <a:scrgbClr r="0" g="0" b="0"/>
+        </a:effectRef>
+        <a:fontRef idx="minor"/>
+      </dsp:style>
+      <dsp:txBody>
+        <a:bodyPr spcFirstLastPara="0" vert="horz" wrap="square" lIns="95250" tIns="95250" rIns="95250" bIns="95250" numCol="1" spcCol="1270" anchor="ctr" anchorCtr="0">
+          <a:noAutofit/>
+        </a:bodyPr>
+        <a:lstStyle/>
+        <a:p>
+          <a:pPr marL="0" lvl="0" indent="0" algn="l" defTabSz="1111250">
+            <a:lnSpc>
+              <a:spcPct val="90000"/>
+            </a:lnSpc>
+            <a:spcBef>
+              <a:spcPct val="0"/>
+            </a:spcBef>
+            <a:spcAft>
+              <a:spcPct val="35000"/>
+            </a:spcAft>
+            <a:buNone/>
+          </a:pPr>
+          <a:r>
+            <a:rPr lang="pt-PT" sz="2500" kern="1200" dirty="0"/>
+            <a:t>MIRANDA</a:t>
+          </a:r>
+        </a:p>
+      </dsp:txBody>
+      <dsp:txXfrm>
+        <a:off x="6652632" y="2311595"/>
+        <a:ext cx="1471612" cy="981075"/>
+      </dsp:txXfrm>
+    </dsp:sp>
+    <dsp:sp modelId="{88EC96F8-89AC-4F40-8D3F-6ECA6F7251A7}">
+      <dsp:nvSpPr>
+        <dsp:cNvPr id="0" name=""/>
+        <dsp:cNvSpPr/>
+      </dsp:nvSpPr>
+      <dsp:spPr>
+        <a:xfrm>
+          <a:off x="5671557" y="3604162"/>
+          <a:ext cx="981075" cy="981075"/>
+        </a:xfrm>
+        <a:prstGeom prst="ellipse">
+          <a:avLst/>
+        </a:prstGeom>
+        <a:solidFill>
+          <a:schemeClr val="dk2">
+            <a:hueOff val="0"/>
+            <a:satOff val="0"/>
+            <a:lumOff val="0"/>
+            <a:alphaOff val="0"/>
+          </a:schemeClr>
+        </a:solidFill>
+        <a:ln w="38100" cap="flat" cmpd="sng" algn="ctr">
+          <a:solidFill>
+            <a:schemeClr val="lt2">
+              <a:hueOff val="0"/>
+              <a:satOff val="0"/>
+              <a:lumOff val="0"/>
+              <a:alphaOff val="0"/>
+            </a:schemeClr>
+          </a:solidFill>
+          <a:prstDash val="solid"/>
+        </a:ln>
+        <a:effectLst>
+          <a:outerShdw blurRad="40000" dist="20000" dir="5400000" rotWithShape="0">
+            <a:srgbClr val="000000">
+              <a:alpha val="38000"/>
+            </a:srgbClr>
+          </a:outerShdw>
+        </a:effectLst>
+      </dsp:spPr>
+      <dsp:style>
+        <a:lnRef idx="3">
+          <a:scrgbClr r="0" g="0" b="0"/>
+        </a:lnRef>
+        <a:fillRef idx="1">
+          <a:scrgbClr r="0" g="0" b="0"/>
+        </a:fillRef>
+        <a:effectRef idx="1">
+          <a:scrgbClr r="0" g="0" b="0"/>
+        </a:effectRef>
+        <a:fontRef idx="minor">
+          <a:schemeClr val="lt1"/>
+        </a:fontRef>
+      </dsp:style>
+    </dsp:sp>
+    <dsp:sp modelId="{F8791728-81B7-44BE-88E8-76678CE52FD2}">
+      <dsp:nvSpPr>
+        <dsp:cNvPr id="0" name=""/>
+        <dsp:cNvSpPr/>
+      </dsp:nvSpPr>
+      <dsp:spPr>
+        <a:xfrm>
+          <a:off x="6652632" y="3601709"/>
+          <a:ext cx="1471612" cy="981075"/>
+        </a:xfrm>
+        <a:prstGeom prst="rect">
+          <a:avLst/>
+        </a:prstGeom>
+        <a:noFill/>
+        <a:ln>
+          <a:noFill/>
+        </a:ln>
+        <a:effectLst/>
+      </dsp:spPr>
+      <dsp:style>
+        <a:lnRef idx="0">
+          <a:scrgbClr r="0" g="0" b="0"/>
+        </a:lnRef>
+        <a:fillRef idx="0">
+          <a:scrgbClr r="0" g="0" b="0"/>
+        </a:fillRef>
+        <a:effectRef idx="0">
+          <a:scrgbClr r="0" g="0" b="0"/>
+        </a:effectRef>
+        <a:fontRef idx="minor"/>
+      </dsp:style>
+      <dsp:txBody>
+        <a:bodyPr spcFirstLastPara="0" vert="horz" wrap="square" lIns="95250" tIns="95250" rIns="95250" bIns="95250" numCol="1" spcCol="1270" anchor="ctr" anchorCtr="0">
+          <a:noAutofit/>
+        </a:bodyPr>
+        <a:lstStyle/>
+        <a:p>
+          <a:pPr marL="0" lvl="0" indent="0" algn="l" defTabSz="1111250">
+            <a:lnSpc>
+              <a:spcPct val="90000"/>
+            </a:lnSpc>
+            <a:spcBef>
+              <a:spcPct val="0"/>
+            </a:spcBef>
+            <a:spcAft>
+              <a:spcPct val="35000"/>
+            </a:spcAft>
+            <a:buNone/>
+          </a:pPr>
+          <a:r>
+            <a:rPr lang="pt-PT" sz="2500" kern="1200" dirty="0"/>
+            <a:t>NELSON</a:t>
+          </a:r>
+        </a:p>
+      </dsp:txBody>
+      <dsp:txXfrm>
+        <a:off x="6652632" y="3601709"/>
+        <a:ext cx="1471612" cy="981075"/>
+      </dsp:txXfrm>
+    </dsp:sp>
+  </dsp:spTree>
+</dsp:drawing>
+</file>
+
+<file path=ppt/diagrams/layout1.xml><?xml version="1.0" encoding="utf-8"?>
+<dgm:layoutDef xmlns:dgm="http://schemas.openxmlformats.org/drawingml/2006/diagram" xmlns:a="http://schemas.openxmlformats.org/drawingml/2006/main" uniqueId="urn:microsoft.com/office/officeart/2009/layout/CirclePictureHierarchy">
+  <dgm:title val=""/>
+  <dgm:desc val=""/>
+  <dgm:catLst>
+    <dgm:cat type="hierarchy" pri="1750"/>
+    <dgm:cat type="picture" pri="23000"/>
+    <dgm:cat type="pictureconvert" pri="23000"/>
+  </dgm:catLst>
+  <dgm:sampData>
+    <dgm:dataModel>
+      <dgm:ptLst>
+        <dgm:pt modelId="0" type="doc"/>
+        <dgm:pt modelId="1">
+          <dgm:prSet phldr="1"/>
+        </dgm:pt>
+        <dgm:pt modelId="2">
+          <dgm:prSet phldr="1"/>
+        </dgm:pt>
+        <dgm:pt modelId="21">
+          <dgm:prSet phldr="1"/>
+        </dgm:pt>
+        <dgm:pt modelId="22">
+          <dgm:prSet phldr="1"/>
+        </dgm:pt>
+        <dgm:pt modelId="3">
+          <dgm:prSet phldr="1"/>
+        </dgm:pt>
+        <dgm:pt modelId="31">
+          <dgm:prSet phldr="1"/>
+        </dgm:pt>
+      </dgm:ptLst>
+      <dgm:cxnLst>
+        <dgm:cxn modelId="4" srcId="0" destId="1" srcOrd="0" destOrd="0"/>
+        <dgm:cxn modelId="5" srcId="1" destId="2" srcOrd="0" destOrd="0"/>
+        <dgm:cxn modelId="6" srcId="1" destId="3" srcOrd="1" destOrd="0"/>
+        <dgm:cxn modelId="23" srcId="2" destId="21" srcOrd="0" destOrd="0"/>
+        <dgm:cxn modelId="24" srcId="2" destId="22" srcOrd="1" destOrd="0"/>
+        <dgm:cxn modelId="33" srcId="3" destId="31" srcOrd="0" destOrd="0"/>
+      </dgm:cxnLst>
+      <dgm:bg/>
+      <dgm:whole/>
+    </dgm:dataModel>
+  </dgm:sampData>
+  <dgm:styleData>
+    <dgm:dataModel>
+      <dgm:ptLst>
+        <dgm:pt modelId="0" type="doc"/>
+        <dgm:pt modelId="1"/>
+        <dgm:pt modelId="11"/>
+        <dgm:pt modelId="12"/>
+      </dgm:ptLst>
+      <dgm:cxnLst>
+        <dgm:cxn modelId="2" srcId="0" destId="1" srcOrd="0" destOrd="0"/>
+        <dgm:cxn modelId="13" srcId="1" destId="11" srcOrd="0" destOrd="0"/>
+        <dgm:cxn modelId="14" srcId="1" destId="12" srcOrd="1" destOrd="0"/>
+      </dgm:cxnLst>
+      <dgm:bg/>
+      <dgm:whole/>
+    </dgm:dataModel>
+  </dgm:styleData>
+  <dgm:clrData>
+    <dgm:dataModel>
+      <dgm:ptLst>
+        <dgm:pt modelId="0" type="doc"/>
+        <dgm:pt modelId="1"/>
+        <dgm:pt modelId="2"/>
+        <dgm:pt modelId="21"/>
+        <dgm:pt modelId="211"/>
+        <dgm:pt modelId="3"/>
+        <dgm:pt modelId="31"/>
+        <dgm:pt modelId="311"/>
+      </dgm:ptLst>
+      <dgm:cxnLst>
+        <dgm:cxn modelId="4" srcId="0" destId="1" srcOrd="0" destOrd="0"/>
+        <dgm:cxn modelId="5" srcId="1" destId="2" srcOrd="0" destOrd="0"/>
+        <dgm:cxn modelId="6" srcId="1" destId="3" srcOrd="1" destOrd="0"/>
+        <dgm:cxn modelId="23" srcId="2" destId="21" srcOrd="0" destOrd="0"/>
+        <dgm:cxn modelId="24" srcId="21" destId="211" srcOrd="0" destOrd="0"/>
+        <dgm:cxn modelId="33" srcId="3" destId="31" srcOrd="0" destOrd="0"/>
+        <dgm:cxn modelId="34" srcId="31" destId="311" srcOrd="0" destOrd="0"/>
+      </dgm:cxnLst>
+      <dgm:bg/>
+      <dgm:whole/>
+    </dgm:dataModel>
+  </dgm:clrData>
+  <dgm:layoutNode name="hierChild1">
+    <dgm:varLst>
+      <dgm:chPref val="1"/>
+      <dgm:dir/>
+      <dgm:animOne val="branch"/>
+      <dgm:animLvl val="lvl"/>
+      <dgm:resizeHandles/>
+    </dgm:varLst>
+    <dgm:choose name="Name0">
+      <dgm:if name="Name1" func="var" arg="dir" op="equ" val="norm">
+        <dgm:alg type="hierChild">
+          <dgm:param type="linDir" val="fromL"/>
+        </dgm:alg>
+      </dgm:if>
+      <dgm:else name="Name2">
+        <dgm:alg type="hierChild">
+          <dgm:param type="linDir" val="fromR"/>
+        </dgm:alg>
+      </dgm:else>
+    </dgm:choose>
+    <dgm:shape xmlns:r="http://schemas.openxmlformats.org/officeDocument/2006/relationships" r:blip="">
+      <dgm:adjLst/>
+    </dgm:shape>
+    <dgm:presOf/>
+    <dgm:constrLst>
+      <dgm:constr type="primFontSz" for="des" ptType="node" op="equ" val="65"/>
+      <dgm:constr type="w" for="des" forName="composite" refType="w"/>
+      <dgm:constr type="h" for="des" forName="composite" refType="w" refFor="des" refForName="composite" fact="0.5"/>
+      <dgm:constr type="w" for="des" forName="composite2" refType="w" refFor="des" refForName="composite"/>
+      <dgm:constr type="h" for="des" forName="composite2" refType="h" refFor="des" refForName="composite"/>
+      <dgm:constr type="w" for="des" forName="composite3" refType="w" refFor="des" refForName="composite"/>
+      <dgm:constr type="h" for="des" forName="composite3" refType="h" refFor="des" refForName="composite"/>
+      <dgm:constr type="w" for="des" forName="composite4" refType="w" refFor="des" refForName="composite"/>
+      <dgm:constr type="h" for="des" forName="composite4" refType="h" refFor="des" refForName="composite"/>
+      <dgm:constr type="w" for="des" forName="composite5" refType="w" refFor="des" refForName="composite"/>
+      <dgm:constr type="h" for="des" forName="composite5" refType="h" refFor="des" refForName="composite"/>
+      <dgm:constr type="sibSp" refType="w" refFor="des" refForName="composite" fact="0.1"/>
+      <dgm:constr type="sibSp" for="des" forName="hierChild2" refType="sibSp"/>
+      <dgm:constr type="sibSp" for="des" forName="hierChild3" refType="sibSp"/>
+      <dgm:constr type="sibSp" for="des" forName="hierChild4" refType="sibSp"/>
+      <dgm:constr type="sibSp" for="des" forName="hierChild5" refType="sibSp"/>
+      <dgm:constr type="sibSp" for="des" forName="hierChild6" refType="sibSp"/>
+      <dgm:constr type="sp" for="des" forName="hierRoot1" refType="h" refFor="des" refForName="composite" fact="0.25"/>
+      <dgm:constr type="sp" for="des" forName="hierRoot2" refType="sp" refFor="des" refForName="hierRoot1"/>
+      <dgm:constr type="sp" for="des" forName="hierRoot3" refType="sp" refFor="des" refForName="hierRoot1"/>
+      <dgm:constr type="sp" for="des" forName="hierRoot4" refType="sp" refFor="des" refForName="hierRoot1"/>
+      <dgm:constr type="sp" for="des" forName="hierRoot5" refType="sp" refFor="des" refForName="hierRoot1"/>
+    </dgm:constrLst>
+    <dgm:ruleLst/>
+    <dgm:forEach name="Name3" axis="ch">
+      <dgm:forEach name="Name4" axis="self" ptType="node">
+        <dgm:layoutNode name="hierRoot1">
+          <dgm:alg type="hierRoot"/>
+          <dgm:shape xmlns:r="http://schemas.openxmlformats.org/officeDocument/2006/relationships" r:blip="">
+            <dgm:adjLst/>
+          </dgm:shape>
+          <dgm:presOf/>
+          <dgm:constrLst>
+            <dgm:constr type="bendDist" for="des" ptType="parTrans" refType="sp" fact="0.5"/>
+          </dgm:constrLst>
+          <dgm:ruleLst/>
+          <dgm:layoutNode name="composite">
+            <dgm:alg type="composite"/>
+            <dgm:shape xmlns:r="http://schemas.openxmlformats.org/officeDocument/2006/relationships" r:blip="">
+              <dgm:adjLst/>
+            </dgm:shape>
+            <dgm:presOf/>
+            <dgm:constrLst>
+              <dgm:constr type="h" for="ch" forName="image" refType="h" fact="0.8"/>
+              <dgm:constr type="w" for="ch" forName="image" refType="h" refFor="ch" refForName="image"/>
+              <dgm:constr type="t" for="ch" forName="image" refType="h" fact="0.1"/>
+              <dgm:constr type="l" for="ch" forName="image"/>
+              <dgm:constr type="w" for="ch" forName="text" refType="w" fact="0.6"/>
+              <dgm:constr type="h" for="ch" forName="text" refType="h" fact="0.8"/>
+              <dgm:constr type="t" for="ch" forName="text" refType="w" fact="0.04"/>
+              <dgm:constr type="l" for="ch" forName="text" refType="w" fact="0.4"/>
+            </dgm:constrLst>
+            <dgm:ruleLst/>
+            <dgm:layoutNode name="image" styleLbl="node0">
+              <dgm:alg type="sp"/>
+              <dgm:shape xmlns:r="http://schemas.openxmlformats.org/officeDocument/2006/relationships" type="ellipse" r:blip="" blipPhldr="1">
+                <dgm:adjLst/>
+              </dgm:shape>
+              <dgm:presOf/>
+              <dgm:constrLst/>
+              <dgm:ruleLst/>
+            </dgm:layoutNode>
+            <dgm:layoutNode name="text" styleLbl="revTx">
+              <dgm:varLst>
+                <dgm:chPref val="3"/>
+              </dgm:varLst>
+              <dgm:alg type="tx">
+                <dgm:param type="parTxLTRAlign" val="l"/>
+                <dgm:param type="parTxRTLAlign" val="r"/>
+              </dgm:alg>
+              <dgm:shape xmlns:r="http://schemas.openxmlformats.org/officeDocument/2006/relationships" type="rect" r:blip="">
+                <dgm:adjLst/>
+              </dgm:shape>
+              <dgm:presOf axis="self"/>
+              <dgm:constrLst>
+                <dgm:constr type="tMarg" refType="primFontSz" fact="0.3"/>
+                <dgm:constr type="bMarg" refType="primFontSz" fact="0.3"/>
+                <dgm:constr type="lMarg" refType="primFontSz" fact="0.3"/>
+                <dgm:constr type="rMarg" refType="primFontSz" fact="0.3"/>
+              </dgm:constrLst>
+              <dgm:ruleLst>
+                <dgm:rule type="primFontSz" val="5" fact="NaN" max="NaN"/>
+              </dgm:ruleLst>
+            </dgm:layoutNode>
+          </dgm:layoutNode>
+          <dgm:layoutNode name="hierChild2">
+            <dgm:choose name="Name5">
+              <dgm:if name="Name6" func="var" arg="dir" op="equ" val="norm">
+                <dgm:alg type="hierChild">
+                  <dgm:param type="linDir" val="fromL"/>
+                </dgm:alg>
+              </dgm:if>
+              <dgm:else name="Name7">
+                <dgm:alg type="hierChild">
+                  <dgm:param type="linDir" val="fromR"/>
+                </dgm:alg>
+              </dgm:else>
+            </dgm:choose>
+            <dgm:shape xmlns:r="http://schemas.openxmlformats.org/officeDocument/2006/relationships" r:blip="">
+              <dgm:adjLst/>
+            </dgm:shape>
+            <dgm:presOf/>
+            <dgm:constrLst/>
+            <dgm:ruleLst/>
+            <dgm:forEach name="Name8" axis="ch">
+              <dgm:forEach name="Name9" axis="self" ptType="parTrans" cnt="1">
+                <dgm:layoutNode name="Name10">
+                  <dgm:alg type="conn">
+                    <dgm:param type="dim" val="1D"/>
+                    <dgm:param type="endSty" val="noArr"/>
+                    <dgm:param type="connRout" val="bend"/>
+                    <dgm:param type="bendPt" val="end"/>
+                    <dgm:param type="begPts" val="bCtr"/>
+                    <dgm:param type="endPts" val="tCtr"/>
+                    <dgm:param type="srcNode" val="image"/>
+                    <dgm:param type="dstNode" val="image2"/>
+                  </dgm:alg>
+                  <dgm:shape xmlns:r="http://schemas.openxmlformats.org/officeDocument/2006/relationships" type="conn" r:blip="" zOrderOff="-999">
+                    <dgm:adjLst/>
+                  </dgm:shape>
+                  <dgm:presOf axis="self"/>
+                  <dgm:constrLst>
+                    <dgm:constr type="begPad"/>
+                    <dgm:constr type="endPad"/>
+                  </dgm:constrLst>
+                  <dgm:ruleLst/>
+                </dgm:layoutNode>
+              </dgm:forEach>
+              <dgm:forEach name="Name11" axis="self" ptType="node">
+                <dgm:layoutNode name="hierRoot2">
+                  <dgm:alg type="hierRoot"/>
+                  <dgm:shape xmlns:r="http://schemas.openxmlformats.org/officeDocument/2006/relationships" r:blip="">
+                    <dgm:adjLst/>
+                  </dgm:shape>
+                  <dgm:presOf/>
+                  <dgm:constrLst>
+                    <dgm:constr type="bendDist" for="des" ptType="parTrans" refType="sp" fact="0.5"/>
+                  </dgm:constrLst>
+                  <dgm:ruleLst/>
+                  <dgm:layoutNode name="composite2">
+                    <dgm:alg type="composite"/>
+                    <dgm:shape xmlns:r="http://schemas.openxmlformats.org/officeDocument/2006/relationships" r:blip="">
+                      <dgm:adjLst/>
+                    </dgm:shape>
+                    <dgm:presOf/>
+                    <dgm:constrLst>
+                      <dgm:constr type="h" for="ch" forName="image2" refType="h" fact="0.8"/>
+                      <dgm:constr type="w" for="ch" forName="image2" refType="h" refFor="ch" refForName="image2"/>
+                      <dgm:constr type="t" for="ch" forName="image2" refType="h" fact="0.1"/>
+                      <dgm:constr type="l" for="ch" forName="image2"/>
+                      <dgm:constr type="w" for="ch" forName="text2" refType="w" fact="0.6"/>
+                      <dgm:constr type="h" for="ch" forName="text2" refType="h" fact="0.8"/>
+                      <dgm:constr type="t" for="ch" forName="text2" refType="w" fact="0.04"/>
+                      <dgm:constr type="l" for="ch" forName="text2" refType="w" fact="0.4"/>
+                    </dgm:constrLst>
+                    <dgm:ruleLst/>
+                    <dgm:layoutNode name="image2">
+                      <dgm:alg type="sp"/>
+                      <dgm:shape xmlns:r="http://schemas.openxmlformats.org/officeDocument/2006/relationships" type="ellipse" r:blip="" blipPhldr="1">
+                        <dgm:adjLst/>
+                      </dgm:shape>
+                      <dgm:presOf/>
+                      <dgm:constrLst/>
+                      <dgm:ruleLst/>
+                    </dgm:layoutNode>
+                    <dgm:layoutNode name="text2" styleLbl="revTx">
+                      <dgm:varLst>
+                        <dgm:chPref val="3"/>
+                      </dgm:varLst>
+                      <dgm:alg type="tx">
+                        <dgm:param type="parTxLTRAlign" val="l"/>
+                        <dgm:param type="parTxRTLAlign" val="r"/>
+                      </dgm:alg>
+                      <dgm:shape xmlns:r="http://schemas.openxmlformats.org/officeDocument/2006/relationships" type="rect" r:blip="">
+                        <dgm:adjLst/>
+                      </dgm:shape>
+                      <dgm:presOf axis="self"/>
+                      <dgm:constrLst>
+                        <dgm:constr type="tMarg" refType="primFontSz" fact="0.3"/>
+                        <dgm:constr type="bMarg" refType="primFontSz" fact="0.3"/>
+                        <dgm:constr type="lMarg" refType="primFontSz" fact="0.3"/>
+                        <dgm:constr type="rMarg" refType="primFontSz" fact="0.3"/>
+                      </dgm:constrLst>
+                      <dgm:ruleLst>
+                        <dgm:rule type="primFontSz" val="5" fact="NaN" max="NaN"/>
+                      </dgm:ruleLst>
+                    </dgm:layoutNode>
+                  </dgm:layoutNode>
+                  <dgm:layoutNode name="hierChild3">
+                    <dgm:choose name="Name12">
+                      <dgm:if name="Name13" func="var" arg="dir" op="equ" val="norm">
+                        <dgm:alg type="hierChild">
+                          <dgm:param type="linDir" val="fromL"/>
+                        </dgm:alg>
+                      </dgm:if>
+                      <dgm:else name="Name14">
+                        <dgm:alg type="hierChild">
+                          <dgm:param type="linDir" val="fromR"/>
+                        </dgm:alg>
+                      </dgm:else>
+                    </dgm:choose>
+                    <dgm:shape xmlns:r="http://schemas.openxmlformats.org/officeDocument/2006/relationships" r:blip="">
+                      <dgm:adjLst/>
+                    </dgm:shape>
+                    <dgm:presOf/>
+                    <dgm:constrLst/>
+                    <dgm:ruleLst/>
+                    <dgm:forEach name="Name15" axis="ch">
+                      <dgm:forEach name="Name16" axis="self" ptType="parTrans" cnt="1">
+                        <dgm:layoutNode name="Name17">
+                          <dgm:alg type="conn">
+                            <dgm:param type="dim" val="1D"/>
+                            <dgm:param type="endSty" val="noArr"/>
+                            <dgm:param type="connRout" val="bend"/>
+                            <dgm:param type="bendPt" val="end"/>
+                            <dgm:param type="begPts" val="bCtr"/>
+                            <dgm:param type="endPts" val="tCtr"/>
+                            <dgm:param type="srcNode" val="image2"/>
+                            <dgm:param type="dstNode" val="image3"/>
+                          </dgm:alg>
+                          <dgm:shape xmlns:r="http://schemas.openxmlformats.org/officeDocument/2006/relationships" type="conn" r:blip="" zOrderOff="-999">
+                            <dgm:adjLst/>
+                          </dgm:shape>
+                          <dgm:presOf axis="self"/>
+                          <dgm:constrLst>
+                            <dgm:constr type="begPad"/>
+                            <dgm:constr type="endPad"/>
+                          </dgm:constrLst>
+                          <dgm:ruleLst/>
+                        </dgm:layoutNode>
+                      </dgm:forEach>
+                      <dgm:forEach name="Name18" axis="self" ptType="node">
+                        <dgm:layoutNode name="hierRoot3">
+                          <dgm:alg type="hierRoot"/>
+                          <dgm:shape xmlns:r="http://schemas.openxmlformats.org/officeDocument/2006/relationships" r:blip="">
+                            <dgm:adjLst/>
+                          </dgm:shape>
+                          <dgm:presOf/>
+                          <dgm:constrLst>
+                            <dgm:constr type="bendDist" for="des" ptType="parTrans" refType="sp" fact="0.5"/>
+                          </dgm:constrLst>
+                          <dgm:ruleLst/>
+                          <dgm:layoutNode name="composite3">
+                            <dgm:alg type="composite"/>
+                            <dgm:shape xmlns:r="http://schemas.openxmlformats.org/officeDocument/2006/relationships" r:blip="">
+                              <dgm:adjLst/>
+                            </dgm:shape>
+                            <dgm:presOf/>
+                            <dgm:constrLst>
+                              <dgm:constr type="h" for="ch" forName="image3" refType="h" fact="0.8"/>
+                              <dgm:constr type="w" for="ch" forName="image3" refType="h" refFor="ch" refForName="image3"/>
+                              <dgm:constr type="t" for="ch" forName="image3" refType="h" fact="0.1"/>
+                              <dgm:constr type="l" for="ch" forName="image3"/>
+                              <dgm:constr type="w" for="ch" forName="text3" refType="w" fact="0.6"/>
+                              <dgm:constr type="h" for="ch" forName="text3" refType="h" fact="0.8"/>
+                              <dgm:constr type="t" for="ch" forName="text3" refType="w" fact="0.04"/>
+                              <dgm:constr type="l" for="ch" forName="text3" refType="w" fact="0.4"/>
+                            </dgm:constrLst>
+                            <dgm:ruleLst/>
+                            <dgm:layoutNode name="image3">
+                              <dgm:alg type="sp"/>
+                              <dgm:shape xmlns:r="http://schemas.openxmlformats.org/officeDocument/2006/relationships" type="ellipse" r:blip="" blipPhldr="1">
+                                <dgm:adjLst/>
+                              </dgm:shape>
+                              <dgm:presOf/>
+                              <dgm:constrLst/>
+                              <dgm:ruleLst/>
+                            </dgm:layoutNode>
+                            <dgm:layoutNode name="text3" styleLbl="revTx">
+                              <dgm:varLst>
+                                <dgm:chPref val="3"/>
+                              </dgm:varLst>
+                              <dgm:alg type="tx">
+                                <dgm:param type="parTxLTRAlign" val="l"/>
+                                <dgm:param type="parTxRTLAlign" val="r"/>
+                              </dgm:alg>
+                              <dgm:shape xmlns:r="http://schemas.openxmlformats.org/officeDocument/2006/relationships" type="rect" r:blip="">
+                                <dgm:adjLst/>
+                              </dgm:shape>
+                              <dgm:presOf axis="self"/>
+                              <dgm:constrLst>
+                                <dgm:constr type="tMarg" refType="primFontSz" fact="0.3"/>
+                                <dgm:constr type="bMarg" refType="primFontSz" fact="0.3"/>
+                                <dgm:constr type="lMarg" refType="primFontSz" fact="0.3"/>
+                                <dgm:constr type="rMarg" refType="primFontSz" fact="0.3"/>
+                              </dgm:constrLst>
+                              <dgm:ruleLst>
+                                <dgm:rule type="primFontSz" val="5" fact="NaN" max="NaN"/>
+                              </dgm:ruleLst>
+                            </dgm:layoutNode>
+                          </dgm:layoutNode>
+                          <dgm:layoutNode name="hierChild4">
+                            <dgm:choose name="Name19">
+                              <dgm:if name="Name20" func="var" arg="dir" op="equ" val="norm">
+                                <dgm:alg type="hierChild">
+                                  <dgm:param type="linDir" val="fromL"/>
+                                </dgm:alg>
+                              </dgm:if>
+                              <dgm:else name="Name21">
+                                <dgm:alg type="hierChild">
+                                  <dgm:param type="linDir" val="fromR"/>
+                                </dgm:alg>
+                              </dgm:else>
+                            </dgm:choose>
+                            <dgm:shape xmlns:r="http://schemas.openxmlformats.org/officeDocument/2006/relationships" r:blip="">
+                              <dgm:adjLst/>
+                            </dgm:shape>
+                            <dgm:presOf/>
+                            <dgm:constrLst/>
+                            <dgm:ruleLst/>
+                            <dgm:forEach name="repeat" axis="ch">
+                              <dgm:forEach name="Name22" axis="self" ptType="parTrans" cnt="1">
+                                <dgm:layoutNode name="Name23">
+                                  <dgm:choose name="Name24">
+                                    <dgm:if name="Name25" axis="self" func="depth" op="lte" val="4">
+                                      <dgm:alg type="conn">
+                                        <dgm:param type="dim" val="1D"/>
+                                        <dgm:param type="endSty" val="noArr"/>
+                                        <dgm:param type="connRout" val="bend"/>
+                                        <dgm:param type="bendPt" val="end"/>
+                                        <dgm:param type="begPts" val="bCtr"/>
+                                        <dgm:param type="endPts" val="tCtr"/>
+                                        <dgm:param type="srcNode" val="image3"/>
+                                        <dgm:param type="dstNode" val="image4"/>
+                                      </dgm:alg>
+                                    </dgm:if>
+                                    <dgm:else name="Name26">
+                                      <dgm:alg type="conn">
+                                        <dgm:param type="dim" val="1D"/>
+                                        <dgm:param type="endSty" val="noArr"/>
+                                        <dgm:param type="connRout" val="bend"/>
+                                        <dgm:param type="bendPt" val="end"/>
+                                        <dgm:param type="begPts" val="bCtr"/>
+                                        <dgm:param type="endPts" val="tCtr"/>
+                                        <dgm:param type="srcNode" val="image4"/>
+                                        <dgm:param type="dstNode" val="image4"/>
+                                      </dgm:alg>
+                                    </dgm:else>
+                                  </dgm:choose>
+                                  <dgm:shape xmlns:r="http://schemas.openxmlformats.org/officeDocument/2006/relationships" type="conn" r:blip="" zOrderOff="-999">
+                                    <dgm:adjLst/>
+                                  </dgm:shape>
+                                  <dgm:presOf axis="self"/>
+                                  <dgm:constrLst>
+                                    <dgm:constr type="begPad"/>
+                                    <dgm:constr type="endPad"/>
+                                  </dgm:constrLst>
+                                  <dgm:ruleLst/>
+                                </dgm:layoutNode>
+                              </dgm:forEach>
+                              <dgm:forEach name="Name27" axis="self" ptType="node">
+                                <dgm:layoutNode name="hierRoot4">
+                                  <dgm:alg type="hierRoot"/>
+                                  <dgm:shape xmlns:r="http://schemas.openxmlformats.org/officeDocument/2006/relationships" r:blip="">
+                                    <dgm:adjLst/>
+                                  </dgm:shape>
+                                  <dgm:presOf/>
+                                  <dgm:constrLst>
+                                    <dgm:constr type="bendDist" for="des" ptType="parTrans" refType="sp" fact="0.5"/>
+                                  </dgm:constrLst>
+                                  <dgm:ruleLst/>
+                                  <dgm:layoutNode name="composite4">
+                                    <dgm:alg type="composite"/>
+                                    <dgm:shape xmlns:r="http://schemas.openxmlformats.org/officeDocument/2006/relationships" r:blip="">
+                                      <dgm:adjLst/>
+                                    </dgm:shape>
+                                    <dgm:presOf/>
+                                    <dgm:constrLst>
+                                      <dgm:constr type="h" for="ch" forName="image4" refType="h" fact="0.8"/>
+                                      <dgm:constr type="w" for="ch" forName="image4" refType="h" refFor="ch" refForName="image4"/>
+                                      <dgm:constr type="t" for="ch" forName="image4" refType="h" fact="0.1"/>
+                                      <dgm:constr type="l" for="ch" forName="image4"/>
+                                      <dgm:constr type="w" for="ch" forName="text4" refType="w" fact="0.6"/>
+                                      <dgm:constr type="h" for="ch" forName="text4" refType="h" fact="0.8"/>
+                                      <dgm:constr type="t" for="ch" forName="text4" refType="w" fact="0.04"/>
+                                      <dgm:constr type="l" for="ch" forName="text4" refType="w" fact="0.4"/>
+                                    </dgm:constrLst>
+                                    <dgm:ruleLst/>
+                                    <dgm:layoutNode name="image4">
+                                      <dgm:alg type="sp"/>
+                                      <dgm:shape xmlns:r="http://schemas.openxmlformats.org/officeDocument/2006/relationships" type="ellipse" r:blip="" blipPhldr="1">
+                                        <dgm:adjLst/>
+                                      </dgm:shape>
+                                      <dgm:presOf/>
+                                      <dgm:constrLst/>
+                                      <dgm:ruleLst/>
+                                    </dgm:layoutNode>
+                                    <dgm:layoutNode name="text4" styleLbl="revTx">
+                                      <dgm:varLst>
+                                        <dgm:chPref val="3"/>
+                                      </dgm:varLst>
+                                      <dgm:alg type="tx">
+                                        <dgm:param type="parTxLTRAlign" val="l"/>
+                                        <dgm:param type="parTxRTLAlign" val="r"/>
+                                      </dgm:alg>
+                                      <dgm:shape xmlns:r="http://schemas.openxmlformats.org/officeDocument/2006/relationships" type="rect" r:blip="">
+                                        <dgm:adjLst/>
+                                      </dgm:shape>
+                                      <dgm:presOf axis="self"/>
+                                      <dgm:constrLst>
+                                        <dgm:constr type="tMarg" refType="primFontSz" fact="0.3"/>
+                                        <dgm:constr type="bMarg" refType="primFontSz" fact="0.3"/>
+                                        <dgm:constr type="lMarg" refType="primFontSz" fact="0.3"/>
+                                        <dgm:constr type="rMarg" refType="primFontSz" fact="0.3"/>
+                                      </dgm:constrLst>
+                                      <dgm:ruleLst>
+                                        <dgm:rule type="primFontSz" val="5" fact="NaN" max="NaN"/>
+                                      </dgm:ruleLst>
+                                    </dgm:layoutNode>
+                                  </dgm:layoutNode>
+                                  <dgm:layoutNode name="hierChild5">
+                                    <dgm:choose name="Name28">
+                                      <dgm:if name="Name29" func="var" arg="dir" op="equ" val="norm">
+                                        <dgm:alg type="hierChild">
+                                          <dgm:param type="linDir" val="fromL"/>
+                                        </dgm:alg>
+                                      </dgm:if>
+                                      <dgm:else name="Name30">
+                                        <dgm:alg type="hierChild">
+                                          <dgm:param type="linDir" val="fromR"/>
+                                        </dgm:alg>
+                                      </dgm:else>
+                                    </dgm:choose>
+                                    <dgm:shape xmlns:r="http://schemas.openxmlformats.org/officeDocument/2006/relationships" r:blip="">
+                                      <dgm:adjLst/>
+                                    </dgm:shape>
+                                    <dgm:presOf/>
+                                    <dgm:constrLst/>
+                                    <dgm:ruleLst/>
+                                    <dgm:forEach name="Name31" ref="repeat"/>
+                                  </dgm:layoutNode>
+                                </dgm:layoutNode>
+                              </dgm:forEach>
+                            </dgm:forEach>
+                          </dgm:layoutNode>
+                        </dgm:layoutNode>
+                      </dgm:forEach>
+                    </dgm:forEach>
+                  </dgm:layoutNode>
+                </dgm:layoutNode>
+              </dgm:forEach>
+            </dgm:forEach>
+          </dgm:layoutNode>
+        </dgm:layoutNode>
+      </dgm:forEach>
+    </dgm:forEach>
+  </dgm:layoutNode>
+</dgm:layoutDef>
+</file>
+
+<file path=ppt/diagrams/quickStyle1.xml><?xml version="1.0" encoding="utf-8"?>
+<dgm:styleDef xmlns:dgm="http://schemas.openxmlformats.org/drawingml/2006/diagram" xmlns:a="http://schemas.openxmlformats.org/drawingml/2006/main" uniqueId="urn:microsoft.com/office/officeart/2005/8/quickstyle/simple2">
+  <dgm:title val=""/>
+  <dgm:desc val=""/>
+  <dgm:catLst>
+    <dgm:cat type="simple" pri="10200"/>
+  </dgm:catLst>
+  <dgm:scene3d>
+    <a:camera prst="orthographicFront"/>
+    <a:lightRig rig="threePt" dir="t"/>
+  </dgm:scene3d>
+  <dgm:styleLbl name="node0">
+    <dgm:scene3d>
+      <a:camera prst="orthographicFront"/>
+      <a:lightRig rig="threePt" dir="t"/>
+    </dgm:scene3d>
+    <dgm:sp3d/>
+    <dgm:txPr/>
+    <dgm:style>
+      <a:lnRef idx="3">
+        <a:scrgbClr r="0" g="0" b="0"/>
+      </a:lnRef>
+      <a:fillRef idx="1">
+        <a:scrgbClr r="0" g="0" b="0"/>
+      </a:fillRef>
+      <a:effectRef idx="1">
+        <a:scrgbClr r="0" g="0" b="0"/>
+      </a:effectRef>
+      <a:fontRef idx="minor">
+        <a:schemeClr val="lt1"/>
+      </a:fontRef>
+    </dgm:style>
+  </dgm:styleLbl>
+  <dgm:styleLbl name="lnNode1">
+    <dgm:scene3d>
+      <a:camera prst="orthographicFront"/>
+      <a:lightRig rig="threePt" dir="t"/>
+    </dgm:scene3d>
+    <dgm:sp3d/>
+    <dgm:txPr/>
+    <dgm:style>
+      <a:lnRef idx="3">
+        <a:scrgbClr r="0" g="0" b="0"/>
+      </a:lnRef>
+      <a:fillRef idx="1">
+        <a:scrgbClr r="0" g="0" b="0"/>
+      </a:fillRef>
+      <a:effectRef idx="1">
+        <a:scrgbClr r="0" g="0" b="0"/>
+      </a:effectRef>
+      <a:fontRef idx="minor">
+        <a:schemeClr val="lt1"/>
+      </a:fontRef>
+    </dgm:style>
+  </dgm:styleLbl>
+  <dgm:styleLbl name="vennNode1">
+    <dgm:scene3d>
+      <a:camera prst="orthographicFront"/>
+      <a:lightRig rig="threePt" dir="t"/>
+    </dgm:scene3d>
+    <dgm:sp3d/>
+    <dgm:txPr/>
+    <dgm:style>
+      <a:lnRef idx="3">
+        <a:scrgbClr r="0" g="0" b="0"/>
+      </a:lnRef>
+      <a:fillRef idx="1">
+        <a:scrgbClr r="0" g="0" b="0"/>
+      </a:fillRef>
+      <a:effectRef idx="0">
+        <a:scrgbClr r="0" g="0" b="0"/>
+      </a:effectRef>
+      <a:fontRef idx="minor">
+        <a:schemeClr val="tx1"/>
+      </a:fontRef>
+    </dgm:style>
+  </dgm:styleLbl>
+  <dgm:styleLbl name="alignNode1">
+    <dgm:scene3d>
+      <a:camera prst="orthographicFront"/>
+      <a:lightRig rig="threePt" dir="t"/>
+    </dgm:scene3d>
+    <dgm:sp3d/>
+    <dgm:txPr/>
+    <dgm:style>
+      <a:lnRef idx="2">
+        <a:scrgbClr r="0" g="0" b="0"/>
+      </a:lnRef>
+      <a:fillRef idx="1">
+        <a:scrgbClr r="0" g="0" b="0"/>
+      </a:fillRef>
+      <a:effectRef idx="1">
+        <a:scrgbClr r="0" g="0" b="0"/>
+      </a:effectRef>
+      <a:fontRef idx="minor">
+        <a:schemeClr val="lt1"/>
+      </a:fontRef>
+    </dgm:style>
+  </dgm:styleLbl>
+  <dgm:styleLbl name="node1">
+    <dgm:scene3d>
+      <a:camera prst="orthographicFront"/>
+      <a:lightRig rig="threePt" dir="t"/>
+    </dgm:scene3d>
+    <dgm:sp3d/>
+    <dgm:txPr/>
+    <dgm:style>
+      <a:lnRef idx="3">
+        <a:scrgbClr r="0" g="0" b="0"/>
+      </a:lnRef>
+      <a:fillRef idx="1">
+        <a:scrgbClr r="0" g="0" b="0"/>
+      </a:fillRef>
+      <a:effectRef idx="1">
+        <a:scrgbClr r="0" g="0" b="0"/>
+      </a:effectRef>
+      <a:fontRef idx="minor">
+        <a:schemeClr val="lt1"/>
+      </a:fontRef>
+    </dgm:style>
+  </dgm:styleLbl>
+  <dgm:styleLbl name="node2">
+    <dgm:scene3d>
+      <a:camera prst="orthographicFront"/>
+      <a:lightRig rig="threePt" dir="t"/>
+    </dgm:scene3d>
+    <dgm:sp3d/>
+    <dgm:txPr/>
+    <dgm:style>
+      <a:lnRef idx="3">
+        <a:scrgbClr r="0" g="0" b="0"/>
+      </a:lnRef>
+      <a:fillRef idx="1">
+        <a:scrgbClr r="0" g="0" b="0"/>
+      </a:fillRef>
+      <a:effectRef idx="1">
+        <a:scrgbClr r="0" g="0" b="0"/>
+      </a:effectRef>
+      <a:fontRef idx="minor">
+        <a:schemeClr val="lt1"/>
+      </a:fontRef>
+    </dgm:style>
+  </dgm:styleLbl>
+  <dgm:styleLbl name="node3">
+    <dgm:scene3d>
+      <a:camera prst="orthographicFront"/>
+      <a:lightRig rig="threePt" dir="t"/>
+    </dgm:scene3d>
+    <dgm:sp3d/>
+    <dgm:txPr/>
+    <dgm:style>
+      <a:lnRef idx="3">
+        <a:scrgbClr r="0" g="0" b="0"/>
+      </a:lnRef>
+      <a:fillRef idx="1">
+        <a:scrgbClr r="0" g="0" b="0"/>
+      </a:fillRef>
+      <a:effectRef idx="1">
+        <a:scrgbClr r="0" g="0" b="0"/>
+      </a:effectRef>
+      <a:fontRef idx="minor">
+        <a:schemeClr val="lt1"/>
+      </a:fontRef>
+    </dgm:style>
+  </dgm:styleLbl>
+  <dgm:styleLbl name="node4">
+    <dgm:scene3d>
+      <a:camera prst="orthographicFront"/>
+      <a:lightRig rig="threePt" dir="t"/>
+    </dgm:scene3d>
+    <dgm:sp3d/>
+    <dgm:txPr/>
+    <dgm:style>
+      <a:lnRef idx="3">
+        <a:scrgbClr r="0" g="0" b="0"/>
+      </a:lnRef>
+      <a:fillRef idx="1">
+        <a:scrgbClr r="0" g="0" b="0"/>
+      </a:fillRef>
+      <a:effectRef idx="1">
+        <a:scrgbClr r="0" g="0" b="0"/>
+      </a:effectRef>
+      <a:fontRef idx="minor">
+        <a:schemeClr val="lt1"/>
+      </a:fontRef>
+    </dgm:style>
+  </dgm:styleLbl>
+  <dgm:styleLbl name="fgImgPlace1">
+    <dgm:scene3d>
+      <a:camera prst="orthographicFront"/>
+      <a:lightRig rig="threePt" dir="t"/>
+    </dgm:scene3d>
+    <dgm:sp3d/>
+    <dgm:txPr/>
+    <dgm:style>
+      <a:lnRef idx="3">
+        <a:scrgbClr r="0" g="0" b="0"/>
+      </a:lnRef>
+      <a:fillRef idx="1">
+        <a:scrgbClr r="0" g="0" b="0"/>
+      </a:fillRef>
+      <a:effectRef idx="1">
+        <a:scrgbClr r="0" g="0" b="0"/>
+      </a:effectRef>
+      <a:fontRef idx="minor"/>
+    </dgm:style>
+  </dgm:styleLbl>
+  <dgm:styleLbl name="alignImgPlace1">
+    <dgm:scene3d>
+      <a:camera prst="orthographicFront"/>
+      <a:lightRig rig="threePt" dir="t"/>
+    </dgm:scene3d>
+    <dgm:sp3d/>
+    <dgm:txPr/>
+    <dgm:style>
+      <a:lnRef idx="3">
+        <a:scrgbClr r="0" g="0" b="0"/>
+      </a:lnRef>
+      <a:fillRef idx="1">
+        <a:scrgbClr r="0" g="0" b="0"/>
+      </a:fillRef>
+      <a:effectRef idx="1">
+        <a:scrgbClr r="0" g="0" b="0"/>
+      </a:effectRef>
+      <a:fontRef idx="minor"/>
+    </dgm:style>
+  </dgm:styleLbl>
+  <dgm:styleLbl name="bgImgPlace1">
+    <dgm:scene3d>
+      <a:camera prst="orthographicFront"/>
+      <a:lightRig rig="threePt" dir="t"/>
+    </dgm:scene3d>
+    <dgm:sp3d/>
+    <dgm:txPr/>
+    <dgm:style>
+      <a:lnRef idx="3">
+        <a:scrgbClr r="0" g="0" b="0"/>
+      </a:lnRef>
+      <a:fillRef idx="1">
+        <a:scrgbClr r="0" g="0" b="0"/>
+      </a:fillRef>
+      <a:effectRef idx="1">
+        <a:scrgbClr r="0" g="0" b="0"/>
+      </a:effectRef>
+      <a:fontRef idx="minor"/>
+    </dgm:style>
+  </dgm:styleLbl>
+  <dgm:styleLbl name="sibTrans2D1">
+    <dgm:scene3d>
+      <a:camera prst="orthographicFront"/>
+      <a:lightRig rig="threePt" dir="t"/>
+    </dgm:scene3d>
+    <dgm:sp3d/>
+    <dgm:txPr/>
+    <dgm:style>
+      <a:lnRef idx="0">
+        <a:scrgbClr r="0" g="0" b="0"/>
+      </a:lnRef>
+      <a:fillRef idx="1">
+        <a:scrgbClr r="0" g="0" b="0"/>
+      </a:fillRef>
+      <a:effectRef idx="1">
+        <a:scrgbClr r="0" g="0" b="0"/>
+      </a:effectRef>
+      <a:fontRef idx="minor">
+        <a:schemeClr val="lt1"/>
+      </a:fontRef>
+    </dgm:style>
+  </dgm:styleLbl>
+  <dgm:styleLbl name="fgSibTrans2D1">
+    <dgm:scene3d>
+      <a:camera prst="orthographicFront"/>
+      <a:lightRig rig="threePt" dir="t"/>
+    </dgm:scene3d>
+    <dgm:sp3d/>
+    <dgm:txPr/>
+    <dgm:style>
+      <a:lnRef idx="0">
+        <a:scrgbClr r="0" g="0" b="0"/>
+      </a:lnRef>
+      <a:fillRef idx="1">
+        <a:scrgbClr r="0" g="0" b="0"/>
+      </a:fillRef>
+      <a:effectRef idx="1">
+        <a:scrgbClr r="0" g="0" b="0"/>
+      </a:effectRef>
+      <a:fontRef idx="minor">
+        <a:schemeClr val="lt1"/>
+      </a:fontRef>
+    </dgm:style>
+  </dgm:styleLbl>
+  <dgm:styleLbl name="bgSibTrans2D1">
+    <dgm:scene3d>
+      <a:camera prst="orthographicFront"/>
+      <a:lightRig rig="threePt" dir="t"/>
+    </dgm:scene3d>
+    <dgm:sp3d/>
+    <dgm:txPr/>
+    <dgm:style>
+      <a:lnRef idx="0">
+        <a:scrgbClr r="0" g="0" b="0"/>
+      </a:lnRef>
+      <a:fillRef idx="1">
+        <a:scrgbClr r="0" g="0" b="0"/>
+      </a:fillRef>
+      <a:effectRef idx="1">
+        <a:scrgbClr r="0" g="0" b="0"/>
+      </a:effectRef>
+      <a:fontRef idx="minor">
+        <a:schemeClr val="lt1"/>
+      </a:fontRef>
+    </dgm:style>
+  </dgm:styleLbl>
+  <dgm:styleLbl name="sibTrans1D1">
+    <dgm:scene3d>
+      <a:camera prst="orthographicFront"/>
+      <a:lightRig rig="threePt" dir="t"/>
+    </dgm:scene3d>
+    <dgm:sp3d/>
+    <dgm:txPr/>
+    <dgm:style>
+      <a:lnRef idx="1">
+        <a:scrgbClr r="0" g="0" b="0"/>
+      </a:lnRef>
+      <a:fillRef idx="0">
+        <a:scrgbClr r="0" g="0" b="0"/>
+      </a:fillRef>
+      <a:effectRef idx="0">
+        <a:scrgbClr r="0" g="0" b="0"/>
+      </a:effectRef>
+      <a:fontRef idx="minor"/>
+    </dgm:style>
+  </dgm:styleLbl>
+  <dgm:styleLbl name="callout">
+    <dgm:scene3d>
+      <a:camera prst="orthographicFront"/>
+      <a:lightRig rig="threePt" dir="t"/>
+    </dgm:scene3d>
+    <dgm:sp3d/>
+    <dgm:txPr/>
+    <dgm:style>
+      <a:lnRef idx="2">
+        <a:scrgbClr r="0" g="0" b="0"/>
+      </a:lnRef>
+      <a:fillRef idx="1">
+        <a:scrgbClr r="0" g="0" b="0"/>
+      </a:fillRef>
+      <a:effectRef idx="1">
+        <a:scrgbClr r="0" g="0" b="0"/>
+      </a:effectRef>
+      <a:fontRef idx="minor"/>
+    </dgm:style>
+  </dgm:styleLbl>
+  <dgm:styleLbl name="asst0">
+    <dgm:scene3d>
+      <a:camera prst="orthographicFront"/>
+      <a:lightRig rig="threePt" dir="t"/>
+    </dgm:scene3d>
+    <dgm:sp3d/>
+    <dgm:txPr/>
+    <dgm:style>
+      <a:lnRef idx="3">
+        <a:scrgbClr r="0" g="0" b="0"/>
+      </a:lnRef>
+      <a:fillRef idx="1">
+        <a:scrgbClr r="0" g="0" b="0"/>
+      </a:fillRef>
+      <a:effectRef idx="1">
+        <a:scrgbClr r="0" g="0" b="0"/>
+      </a:effectRef>
+      <a:fontRef idx="minor">
+        <a:schemeClr val="lt1"/>
+      </a:fontRef>
+    </dgm:style>
+  </dgm:styleLbl>
+  <dgm:styleLbl name="asst1">
+    <dgm:scene3d>
+      <a:camera prst="orthographicFront"/>
+      <a:lightRig rig="threePt" dir="t"/>
+    </dgm:scene3d>
+    <dgm:sp3d/>
+    <dgm:txPr/>
+    <dgm:style>
+      <a:lnRef idx="3">
+        <a:scrgbClr r="0" g="0" b="0"/>
+      </a:lnRef>
+      <a:fillRef idx="1">
+        <a:scrgbClr r="0" g="0" b="0"/>
+      </a:fillRef>
+      <a:effectRef idx="1">
+        <a:scrgbClr r="0" g="0" b="0"/>
+      </a:effectRef>
+      <a:fontRef idx="minor">
+        <a:schemeClr val="lt1"/>
+      </a:fontRef>
+    </dgm:style>
+  </dgm:styleLbl>
+  <dgm:styleLbl name="asst2">
+    <dgm:scene3d>
+      <a:camera prst="orthographicFront"/>
+      <a:lightRig rig="threePt" dir="t"/>
+    </dgm:scene3d>
+    <dgm:sp3d/>
+    <dgm:txPr/>
+    <dgm:style>
+      <a:lnRef idx="3">
+        <a:scrgbClr r="0" g="0" b="0"/>
+      </a:lnRef>
+      <a:fillRef idx="1">
+        <a:scrgbClr r="0" g="0" b="0"/>
+      </a:fillRef>
+      <a:effectRef idx="1">
+        <a:scrgbClr r="0" g="0" b="0"/>
+      </a:effectRef>
+      <a:fontRef idx="minor">
+        <a:schemeClr val="lt1"/>
+      </a:fontRef>
+    </dgm:style>
+  </dgm:styleLbl>
+  <dgm:styleLbl name="asst3">
+    <dgm:scene3d>
+      <a:camera prst="orthographicFront"/>
+      <a:lightRig rig="threePt" dir="t"/>
+    </dgm:scene3d>
+    <dgm:sp3d/>
+    <dgm:txPr/>
+    <dgm:style>
+      <a:lnRef idx="3">
+        <a:scrgbClr r="0" g="0" b="0"/>
+      </a:lnRef>
+      <a:fillRef idx="1">
+        <a:scrgbClr r="0" g="0" b="0"/>
+      </a:fillRef>
+      <a:effectRef idx="1">
+        <a:scrgbClr r="0" g="0" b="0"/>
+      </a:effectRef>
+      <a:fontRef idx="minor">
+        <a:schemeClr val="lt1"/>
+      </a:fontRef>
+    </dgm:style>
+  </dgm:styleLbl>
+  <dgm:styleLbl name="asst4">
+    <dgm:scene3d>
+      <a:camera prst="orthographicFront"/>
+      <a:lightRig rig="threePt" dir="t"/>
+    </dgm:scene3d>
+    <dgm:sp3d/>
+    <dgm:txPr/>
+    <dgm:style>
+      <a:lnRef idx="3">
+        <a:scrgbClr r="0" g="0" b="0"/>
+      </a:lnRef>
+      <a:fillRef idx="1">
+        <a:scrgbClr r="0" g="0" b="0"/>
+      </a:fillRef>
+      <a:effectRef idx="1">
+        <a:scrgbClr r="0" g="0" b="0"/>
+      </a:effectRef>
+      <a:fontRef idx="minor">
+        <a:schemeClr val="lt1"/>
+      </a:fontRef>
+    </dgm:style>
+  </dgm:styleLbl>
+  <dgm:styleLbl name="parChTrans2D1">
+    <dgm:scene3d>
+      <a:camera prst="orthographicFront"/>
+      <a:lightRig rig="threePt" dir="t"/>
+    </dgm:scene3d>
+    <dgm:sp3d/>
+    <dgm:txPr/>
+    <dgm:style>
+      <a:lnRef idx="3">
+        <a:scrgbClr r="0" g="0" b="0"/>
+      </a:lnRef>
+      <a:fillRef idx="1">
+        <a:scrgbClr r="0" g="0" b="0"/>
+      </a:fillRef>
+      <a:effectRef idx="1">
+        <a:scrgbClr r="0" g="0" b="0"/>
+      </a:effectRef>
+      <a:fontRef idx="minor">
+        <a:schemeClr val="lt1"/>
+      </a:fontRef>
+    </dgm:style>
+  </dgm:styleLbl>
+  <dgm:styleLbl name="parChTrans2D2">
+    <dgm:scene3d>
+      <a:camera prst="orthographicFront"/>
+      <a:lightRig rig="threePt" dir="t"/>
+    </dgm:scene3d>
+    <dgm:sp3d/>
+    <dgm:txPr/>
+    <dgm:style>
+      <a:lnRef idx="3">
+        <a:scrgbClr r="0" g="0" b="0"/>
+      </a:lnRef>
+      <a:fillRef idx="1">
+        <a:scrgbClr r="0" g="0" b="0"/>
+      </a:fillRef>
+      <a:effectRef idx="1">
+        <a:scrgbClr r="0" g="0" b="0"/>
+      </a:effectRef>
+      <a:fontRef idx="minor">
+        <a:schemeClr val="lt1"/>
+      </a:fontRef>
+    </dgm:style>
+  </dgm:styleLbl>
+  <dgm:styleLbl name="parChTrans2D3">
+    <dgm:scene3d>
+      <a:camera prst="orthographicFront"/>
+      <a:lightRig rig="threePt" dir="t"/>
+    </dgm:scene3d>
+    <dgm:sp3d/>
+    <dgm:txPr/>
+    <dgm:style>
+      <a:lnRef idx="3">
+        <a:scrgbClr r="0" g="0" b="0"/>
+      </a:lnRef>
+      <a:fillRef idx="1">
+        <a:scrgbClr r="0" g="0" b="0"/>
+      </a:fillRef>
+      <a:effectRef idx="1">
+        <a:scrgbClr r="0" g="0" b="0"/>
+      </a:effectRef>
+      <a:fontRef idx="minor">
+        <a:schemeClr val="lt1"/>
+      </a:fontRef>
+    </dgm:style>
+  </dgm:styleLbl>
+  <dgm:styleLbl name="parChTrans2D4">
+    <dgm:scene3d>
+      <a:camera prst="orthographicFront"/>
+      <a:lightRig rig="threePt" dir="t"/>
+    </dgm:scene3d>
+    <dgm:sp3d/>
+    <dgm:txPr/>
+    <dgm:style>
+      <a:lnRef idx="3">
+        <a:scrgbClr r="0" g="0" b="0"/>
+      </a:lnRef>
+      <a:fillRef idx="1">
+        <a:scrgbClr r="0" g="0" b="0"/>
+      </a:fillRef>
+      <a:effectRef idx="1">
+        <a:scrgbClr r="0" g="0" b="0"/>
+      </a:effectRef>
+      <a:fontRef idx="minor">
+        <a:schemeClr val="lt1"/>
+      </a:fontRef>
+    </dgm:style>
+  </dgm:styleLbl>
+  <dgm:styleLbl name="parChTrans1D1">
+    <dgm:scene3d>
+      <a:camera prst="orthographicFront"/>
+      <a:lightRig rig="threePt" dir="t"/>
+    </dgm:scene3d>
+    <dgm:sp3d/>
+    <dgm:txPr/>
+    <dgm:style>
+      <a:lnRef idx="2">
+        <a:scrgbClr r="0" g="0" b="0"/>
+      </a:lnRef>
+      <a:fillRef idx="0">
+        <a:scrgbClr r="0" g="0" b="0"/>
+      </a:fillRef>
+      <a:effectRef idx="0">
+        <a:scrgbClr r="0" g="0" b="0"/>
+      </a:effectRef>
+      <a:fontRef idx="minor"/>
+    </dgm:style>
+  </dgm:styleLbl>
+  <dgm:styleLbl name="parChTrans1D2">
+    <dgm:scene3d>
+      <a:camera prst="orthographicFront"/>
+      <a:lightRig rig="threePt" dir="t"/>
+    </dgm:scene3d>
+    <dgm:sp3d/>
+    <dgm:txPr/>
+    <dgm:style>
+      <a:lnRef idx="2">
+        <a:scrgbClr r="0" g="0" b="0"/>
+      </a:lnRef>
+      <a:fillRef idx="0">
+        <a:scrgbClr r="0" g="0" b="0"/>
+      </a:fillRef>
+      <a:effectRef idx="0">
+        <a:scrgbClr r="0" g="0" b="0"/>
+      </a:effectRef>
+      <a:fontRef idx="minor"/>
+    </dgm:style>
+  </dgm:styleLbl>
+  <dgm:styleLbl name="parChTrans1D3">
+    <dgm:scene3d>
+      <a:camera prst="orthographicFront"/>
+      <a:lightRig rig="threePt" dir="t"/>
+    </dgm:scene3d>
+    <dgm:sp3d/>
+    <dgm:txPr/>
+    <dgm:style>
+      <a:lnRef idx="2">
+        <a:scrgbClr r="0" g="0" b="0"/>
+      </a:lnRef>
+      <a:fillRef idx="0">
+        <a:scrgbClr r="0" g="0" b="0"/>
+      </a:fillRef>
+      <a:effectRef idx="0">
+        <a:scrgbClr r="0" g="0" b="0"/>
+      </a:effectRef>
+      <a:fontRef idx="minor"/>
+    </dgm:style>
+  </dgm:styleLbl>
+  <dgm:styleLbl name="parChTrans1D4">
+    <dgm:scene3d>
+      <a:camera prst="orthographicFront"/>
+      <a:lightRig rig="threePt" dir="t"/>
+    </dgm:scene3d>
+    <dgm:sp3d/>
+    <dgm:txPr/>
+    <dgm:style>
+      <a:lnRef idx="2">
+        <a:scrgbClr r="0" g="0" b="0"/>
+      </a:lnRef>
+      <a:fillRef idx="0">
+        <a:scrgbClr r="0" g="0" b="0"/>
+      </a:fillRef>
+      <a:effectRef idx="0">
+        <a:scrgbClr r="0" g="0" b="0"/>
+      </a:effectRef>
+      <a:fontRef idx="minor"/>
+    </dgm:style>
+  </dgm:styleLbl>
+  <dgm:styleLbl name="fgAcc1">
+    <dgm:scene3d>
+      <a:camera prst="orthographicFront"/>
+      <a:lightRig rig="threePt" dir="t"/>
+    </dgm:scene3d>
+    <dgm:sp3d/>
+    <dgm:txPr/>
+    <dgm:style>
+      <a:lnRef idx="2">
+        <a:scrgbClr r="0" g="0" b="0"/>
+      </a:lnRef>
+      <a:fillRef idx="1">
+        <a:scrgbClr r="0" g="0" b="0"/>
+      </a:fillRef>
+      <a:effectRef idx="0">
+        <a:scrgbClr r="0" g="0" b="0"/>
+      </a:effectRef>
+      <a:fontRef idx="minor"/>
+    </dgm:style>
+  </dgm:styleLbl>
+  <dgm:styleLbl name="conFgAcc1">
+    <dgm:scene3d>
+      <a:camera prst="orthographicFront"/>
+      <a:lightRig rig="threePt" dir="t"/>
+    </dgm:scene3d>
+    <dgm:sp3d/>
+    <dgm:txPr/>
+    <dgm:style>
+      <a:lnRef idx="2">
+        <a:scrgbClr r="0" g="0" b="0"/>
+      </a:lnRef>
+      <a:fillRef idx="1">
+        <a:scrgbClr r="0" g="0" b="0"/>
+      </a:fillRef>
+      <a:effectRef idx="0">
+        <a:scrgbClr r="0" g="0" b="0"/>
+      </a:effectRef>
+      <a:fontRef idx="minor"/>
+    </dgm:style>
+  </dgm:styleLbl>
+  <dgm:styleLbl name="alignAcc1">
+    <dgm:scene3d>
+      <a:camera prst="orthographicFront"/>
+      <a:lightRig rig="threePt" dir="t"/>
+    </dgm:scene3d>
+    <dgm:sp3d/>
+    <dgm:txPr/>
+    <dgm:style>
+      <a:lnRef idx="2">
+        <a:scrgbClr r="0" g="0" b="0"/>
+      </a:lnRef>
+      <a:fillRef idx="1">
+        <a:scrgbClr r="0" g="0" b="0"/>
+      </a:fillRef>
+      <a:effectRef idx="0">
+        <a:scrgbClr r="0" g="0" b="0"/>
+      </a:effectRef>
+      <a:fontRef idx="minor"/>
+    </dgm:style>
+  </dgm:styleLbl>
+  <dgm:styleLbl name="trAlignAcc1">
+    <dgm:scene3d>
+      <a:camera prst="orthographicFront"/>
+      <a:lightRig rig="threePt" dir="t"/>
+    </dgm:scene3d>
+    <dgm:sp3d/>
+    <dgm:txPr/>
+    <dgm:style>
+      <a:lnRef idx="1">
+        <a:scrgbClr r="0" g="0" b="0"/>
+      </a:lnRef>
+      <a:fillRef idx="1">
+        <a:scrgbClr r="0" g="0" b="0"/>
+      </a:fillRef>
+      <a:effectRef idx="0">
+        <a:scrgbClr r="0" g="0" b="0"/>
+      </a:effectRef>
+      <a:fontRef idx="minor"/>
+    </dgm:style>
+  </dgm:styleLbl>
+  <dgm:styleLbl name="bgAcc1">
+    <dgm:scene3d>
+      <a:camera prst="orthographicFront"/>
+      <a:lightRig rig="threePt" dir="t"/>
+    </dgm:scene3d>
+    <dgm:sp3d/>
+    <dgm:txPr/>
+    <dgm:style>
+      <a:lnRef idx="2">
+        <a:scrgbClr r="0" g="0" b="0"/>
+      </a:lnRef>
+      <a:fillRef idx="1">
+        <a:scrgbClr r="0" g="0" b="0"/>
+      </a:fillRef>
+      <a:effectRef idx="0">
+        <a:scrgbClr r="0" g="0" b="0"/>
+      </a:effectRef>
+      <a:fontRef idx="minor"/>
+    </dgm:style>
+  </dgm:styleLbl>
+  <dgm:styleLbl name="solidFgAcc1">
+    <dgm:scene3d>
+      <a:camera prst="orthographicFront"/>
+      <a:lightRig rig="threePt" dir="t"/>
+    </dgm:scene3d>
+    <dgm:sp3d/>
+    <dgm:txPr/>
+    <dgm:style>
+      <a:lnRef idx="2">
+        <a:scrgbClr r="0" g="0" b="0"/>
+      </a:lnRef>
+      <a:fillRef idx="1">
+        <a:scrgbClr r="0" g="0" b="0"/>
+      </a:fillRef>
+      <a:effectRef idx="0">
+        <a:scrgbClr r="0" g="0" b="0"/>
+      </a:effectRef>
+      <a:fontRef idx="minor"/>
+    </dgm:style>
+  </dgm:styleLbl>
+  <dgm:styleLbl name="solidAlignAcc1">
+    <dgm:scene3d>
+      <a:camera prst="orthographicFront"/>
+      <a:lightRig rig="threePt" dir="t"/>
+    </dgm:scene3d>
+    <dgm:sp3d/>
+    <dgm:txPr/>
+    <dgm:style>
+      <a:lnRef idx="2">
+        <a:scrgbClr r="0" g="0" b="0"/>
+      </a:lnRef>
+      <a:fillRef idx="1">
+        <a:scrgbClr r="0" g="0" b="0"/>
+      </a:fillRef>
+      <a:effectRef idx="0">
+        <a:scrgbClr r="0" g="0" b="0"/>
+      </a:effectRef>
+      <a:fontRef idx="minor"/>
+    </dgm:style>
+  </dgm:styleLbl>
+  <dgm:styleLbl name="solidBgAcc1">
+    <dgm:scene3d>
+      <a:camera prst="orthographicFront"/>
+      <a:lightRig rig="threePt" dir="t"/>
+    </dgm:scene3d>
+    <dgm:sp3d/>
+    <dgm:txPr/>
+    <dgm:style>
+      <a:lnRef idx="2">
+        <a:scrgbClr r="0" g="0" b="0"/>
+      </a:lnRef>
+      <a:fillRef idx="1">
+        <a:scrgbClr r="0" g="0" b="0"/>
+      </a:fillRef>
+      <a:effectRef idx="0">
+        <a:scrgbClr r="0" g="0" b="0"/>
+      </a:effectRef>
+      <a:fontRef idx="minor"/>
+    </dgm:style>
+  </dgm:styleLbl>
+  <dgm:styleLbl name="fgAccFollowNode1">
+    <dgm:scene3d>
+      <a:camera prst="orthographicFront"/>
+      <a:lightRig rig="threePt" dir="t"/>
+    </dgm:scene3d>
+    <dgm:sp3d/>
+    <dgm:txPr/>
+    <dgm:style>
+      <a:lnRef idx="2">
+        <a:scrgbClr r="0" g="0" b="0"/>
+      </a:lnRef>
+      <a:fillRef idx="1">
+        <a:scrgbClr r="0" g="0" b="0"/>
+      </a:fillRef>
+      <a:effectRef idx="0">
+        <a:scrgbClr r="0" g="0" b="0"/>
+      </a:effectRef>
+      <a:fontRef idx="minor"/>
+    </dgm:style>
+  </dgm:styleLbl>
+  <dgm:styleLbl name="alignAccFollowNode1">
+    <dgm:scene3d>
+      <a:camera prst="orthographicFront"/>
+      <a:lightRig rig="threePt" dir="t"/>
+    </dgm:scene3d>
+    <dgm:sp3d/>
+    <dgm:txPr/>
+    <dgm:style>
+      <a:lnRef idx="2">
+        <a:scrgbClr r="0" g="0" b="0"/>
+      </a:lnRef>
+      <a:fillRef idx="1">
+        <a:scrgbClr r="0" g="0" b="0"/>
+      </a:fillRef>
+      <a:effectRef idx="0">
+        <a:scrgbClr r="0" g="0" b="0"/>
+      </a:effectRef>
+      <a:fontRef idx="minor"/>
+    </dgm:style>
+  </dgm:styleLbl>
+  <dgm:styleLbl name="bgAccFollowNode1">
+    <dgm:scene3d>
+      <a:camera prst="orthographicFront"/>
+      <a:lightRig rig="threePt" dir="t"/>
+    </dgm:scene3d>
+    <dgm:sp3d/>
+    <dgm:txPr/>
+    <dgm:style>
+      <a:lnRef idx="2">
+        <a:scrgbClr r="0" g="0" b="0"/>
+      </a:lnRef>
+      <a:fillRef idx="1">
+        <a:scrgbClr r="0" g="0" b="0"/>
+      </a:fillRef>
+      <a:effectRef idx="0">
+        <a:scrgbClr r="0" g="0" b="0"/>
+      </a:effectRef>
+      <a:fontRef idx="minor"/>
+    </dgm:style>
+  </dgm:styleLbl>
+  <dgm:styleLbl name="fgAcc0">
+    <dgm:scene3d>
+      <a:camera prst="orthographicFront"/>
+      <a:lightRig rig="threePt" dir="t"/>
+    </dgm:scene3d>
+    <dgm:sp3d/>
+    <dgm:txPr/>
+    <dgm:style>
+      <a:lnRef idx="2">
+        <a:scrgbClr r="0" g="0" b="0"/>
+      </a:lnRef>
+      <a:fillRef idx="1">
+        <a:scrgbClr r="0" g="0" b="0"/>
+      </a:fillRef>
+      <a:effectRef idx="0">
+        <a:scrgbClr r="0" g="0" b="0"/>
+      </a:effectRef>
+      <a:fontRef idx="minor"/>
+    </dgm:style>
+  </dgm:styleLbl>
+  <dgm:styleLbl name="fgAcc2">
+    <dgm:scene3d>
+      <a:camera prst="orthographicFront"/>
+      <a:lightRig rig="threePt" dir="t"/>
+    </dgm:scene3d>
+    <dgm:sp3d/>
+    <dgm:txPr/>
+    <dgm:style>
+      <a:lnRef idx="2">
+        <a:scrgbClr r="0" g="0" b="0"/>
+      </a:lnRef>
+      <a:fillRef idx="1">
+        <a:scrgbClr r="0" g="0" b="0"/>
+      </a:fillRef>
+      <a:effectRef idx="0">
+        <a:scrgbClr r="0" g="0" b="0"/>
+      </a:effectRef>
+      <a:fontRef idx="minor"/>
+    </dgm:style>
+  </dgm:styleLbl>
+  <dgm:styleLbl name="fgAcc3">
+    <dgm:scene3d>
+      <a:camera prst="orthographicFront"/>
+      <a:lightRig rig="threePt" dir="t"/>
+    </dgm:scene3d>
+    <dgm:sp3d/>
+    <dgm:txPr/>
+    <dgm:style>
+      <a:lnRef idx="2">
+        <a:scrgbClr r="0" g="0" b="0"/>
+      </a:lnRef>
+      <a:fillRef idx="1">
+        <a:scrgbClr r="0" g="0" b="0"/>
+      </a:fillRef>
+      <a:effectRef idx="0">
+        <a:scrgbClr r="0" g="0" b="0"/>
+      </a:effectRef>
+      <a:fontRef idx="minor"/>
+    </dgm:style>
+  </dgm:styleLbl>
+  <dgm:styleLbl name="fgAcc4">
+    <dgm:scene3d>
+      <a:camera prst="orthographicFront"/>
+      <a:lightRig rig="threePt" dir="t"/>
+    </dgm:scene3d>
+    <dgm:sp3d/>
+    <dgm:txPr/>
+    <dgm:style>
+      <a:lnRef idx="2">
+        <a:scrgbClr r="0" g="0" b="0"/>
+      </a:lnRef>
+      <a:fillRef idx="1">
+        <a:scrgbClr r="0" g="0" b="0"/>
+      </a:fillRef>
+      <a:effectRef idx="0">
+        <a:scrgbClr r="0" g="0" b="0"/>
+      </a:effectRef>
+      <a:fontRef idx="minor"/>
+    </dgm:style>
+  </dgm:styleLbl>
+  <dgm:styleLbl name="bgShp">
+    <dgm:scene3d>
+      <a:camera prst="orthographicFront"/>
+      <a:lightRig rig="threePt" dir="t"/>
+    </dgm:scene3d>
+    <dgm:sp3d/>
+    <dgm:txPr/>
+    <dgm:style>
+      <a:lnRef idx="0">
+        <a:scrgbClr r="0" g="0" b="0"/>
+      </a:lnRef>
+      <a:fillRef idx="1">
+        <a:scrgbClr r="0" g="0" b="0"/>
+      </a:fillRef>
+      <a:effectRef idx="0">
+        <a:scrgbClr r="0" g="0" b="0"/>
+      </a:effectRef>
+      <a:fontRef idx="minor"/>
+    </dgm:style>
+  </dgm:styleLbl>
+  <dgm:styleLbl name="dkBgShp">
+    <dgm:scene3d>
+      <a:camera prst="orthographicFront"/>
+      <a:lightRig rig="threePt" dir="t"/>
+    </dgm:scene3d>
+    <dgm:sp3d/>
+    <dgm:txPr/>
+    <dgm:style>
+      <a:lnRef idx="0">
+        <a:scrgbClr r="0" g="0" b="0"/>
+      </a:lnRef>
+      <a:fillRef idx="1">
+        <a:scrgbClr r="0" g="0" b="0"/>
+      </a:fillRef>
+      <a:effectRef idx="0">
+        <a:scrgbClr r="0" g="0" b="0"/>
+      </a:effectRef>
+      <a:fontRef idx="minor"/>
+    </dgm:style>
+  </dgm:styleLbl>
+  <dgm:styleLbl name="trBgShp">
+    <dgm:scene3d>
+      <a:camera prst="orthographicFront"/>
+      <a:lightRig rig="threePt" dir="t"/>
+    </dgm:scene3d>
+    <dgm:sp3d/>
+    <dgm:txPr/>
+    <dgm:style>
+      <a:lnRef idx="0">
+        <a:scrgbClr r="0" g="0" b="0"/>
+      </a:lnRef>
+      <a:fillRef idx="1">
+        <a:scrgbClr r="0" g="0" b="0"/>
+      </a:fillRef>
+      <a:effectRef idx="0">
+        <a:scrgbClr r="0" g="0" b="0"/>
+      </a:effectRef>
+      <a:fontRef idx="minor"/>
+    </dgm:style>
+  </dgm:styleLbl>
+  <dgm:styleLbl name="fgShp">
+    <dgm:scene3d>
+      <a:camera prst="orthographicFront"/>
+      <a:lightRig rig="threePt" dir="t"/>
+    </dgm:scene3d>
+    <dgm:sp3d/>
+    <dgm:txPr/>
+    <dgm:style>
+      <a:lnRef idx="3">
+        <a:scrgbClr r="0" g="0" b="0"/>
+      </a:lnRef>
+      <a:fillRef idx="1">
+        <a:scrgbClr r="0" g="0" b="0"/>
+      </a:fillRef>
+      <a:effectRef idx="1">
+        <a:scrgbClr r="0" g="0" b="0"/>
+      </a:effectRef>
+      <a:fontRef idx="minor"/>
+    </dgm:style>
+  </dgm:styleLbl>
+  <dgm:styleLbl name="revTx">
+    <dgm:scene3d>
+      <a:camera prst="orthographicFront"/>
+      <a:lightRig rig="threePt" dir="t"/>
+    </dgm:scene3d>
+    <dgm:sp3d/>
+    <dgm:txPr/>
+    <dgm:style>
+      <a:lnRef idx="0">
+        <a:scrgbClr r="0" g="0" b="0"/>
+      </a:lnRef>
+      <a:fillRef idx="0">
+        <a:scrgbClr r="0" g="0" b="0"/>
+      </a:fillRef>
+      <a:effectRef idx="0">
+        <a:scrgbClr r="0" g="0" b="0"/>
+      </a:effectRef>
+      <a:fontRef idx="minor"/>
+    </dgm:style>
+  </dgm:styleLbl>
+</dgm:styleDef>
+</file>
+
 <file path=ppt/slideLayouts/slideLayout1.xml><?xml version="1.0" encoding="utf-8"?>
 <p:sldLayout xmlns:a="http://schemas.openxmlformats.org/drawingml/2006/main" xmlns:r="http://schemas.openxmlformats.org/officeDocument/2006/relationships" xmlns:p="http://schemas.openxmlformats.org/presentationml/2006/main" showMasterSp="0" type="title" preserve="1">
   <p:cSld name="Title Slide">
@@ -175,7 +4023,7 @@
           <a:noFill/>
           <a:extLst>
             <a:ext uri="{909E8E84-426E-40dd-AFC4-6F175D3DCCD1}">
-              <a14:hiddenFill xmlns:a14="http://schemas.microsoft.com/office/drawing/2010/main" xmlns="">
+              <a14:hiddenFill xmlns="" xmlns:a14="http://schemas.microsoft.com/office/drawing/2010/main">
                 <a:solidFill>
                   <a:srgbClr val="FFFFFF"/>
                 </a:solidFill>
@@ -235,7 +4083,7 @@
             </a:ln>
             <a:extLst>
               <a:ext uri="{91240B29-F687-4f45-9708-019B960494DF}">
-                <a14:hiddenLine xmlns:a14="http://schemas.microsoft.com/office/drawing/2010/main" xmlns="" w="9525">
+                <a14:hiddenLine xmlns="" xmlns:a14="http://schemas.microsoft.com/office/drawing/2010/main" w="9525">
                   <a:solidFill>
                     <a:srgbClr val="000000"/>
                   </a:solidFill>
@@ -325,7 +4173,7 @@
             </a:ln>
             <a:extLst>
               <a:ext uri="{91240B29-F687-4f45-9708-019B960494DF}">
-                <a14:hiddenLine xmlns:a14="http://schemas.microsoft.com/office/drawing/2010/main" xmlns="" w="9525">
+                <a14:hiddenLine xmlns="" xmlns:a14="http://schemas.microsoft.com/office/drawing/2010/main" w="9525">
                   <a:solidFill>
                     <a:srgbClr val="000000"/>
                   </a:solidFill>
@@ -415,7 +4263,7 @@
             </a:ln>
             <a:extLst>
               <a:ext uri="{91240B29-F687-4f45-9708-019B960494DF}">
-                <a14:hiddenLine xmlns:a14="http://schemas.microsoft.com/office/drawing/2010/main" xmlns="" w="9525">
+                <a14:hiddenLine xmlns="" xmlns:a14="http://schemas.microsoft.com/office/drawing/2010/main" w="9525">
                   <a:solidFill>
                     <a:srgbClr val="000000"/>
                   </a:solidFill>
@@ -449,7 +4297,7 @@
             </a:ln>
             <a:extLst>
               <a:ext uri="{91240B29-F687-4f45-9708-019B960494DF}">
-                <a14:hiddenLine xmlns:a14="http://schemas.microsoft.com/office/drawing/2010/main" xmlns="" w="9525">
+                <a14:hiddenLine xmlns="" xmlns:a14="http://schemas.microsoft.com/office/drawing/2010/main" w="9525">
                   <a:solidFill>
                     <a:srgbClr val="000000"/>
                   </a:solidFill>
@@ -539,7 +4387,7 @@
             </a:ln>
             <a:extLst>
               <a:ext uri="{91240B29-F687-4f45-9708-019B960494DF}">
-                <a14:hiddenLine xmlns:a14="http://schemas.microsoft.com/office/drawing/2010/main" xmlns="" w="9525">
+                <a14:hiddenLine xmlns="" xmlns:a14="http://schemas.microsoft.com/office/drawing/2010/main" w="9525">
                   <a:solidFill>
                     <a:srgbClr val="000000"/>
                   </a:solidFill>
@@ -601,7 +4449,7 @@
             </a:ln>
             <a:extLst>
               <a:ext uri="{91240B29-F687-4f45-9708-019B960494DF}">
-                <a14:hiddenLine xmlns:a14="http://schemas.microsoft.com/office/drawing/2010/main" xmlns="" w="9525">
+                <a14:hiddenLine xmlns="" xmlns:a14="http://schemas.microsoft.com/office/drawing/2010/main" w="9525">
                   <a:solidFill>
                     <a:srgbClr val="000000"/>
                   </a:solidFill>
@@ -663,7 +4511,7 @@
             </a:ln>
             <a:extLst>
               <a:ext uri="{91240B29-F687-4f45-9708-019B960494DF}">
-                <a14:hiddenLine xmlns:a14="http://schemas.microsoft.com/office/drawing/2010/main" xmlns="" w="9525">
+                <a14:hiddenLine xmlns="" xmlns:a14="http://schemas.microsoft.com/office/drawing/2010/main" w="9525">
                   <a:solidFill>
                     <a:srgbClr val="000000"/>
                   </a:solidFill>
@@ -753,7 +4601,7 @@
             </a:ln>
             <a:extLst>
               <a:ext uri="{91240B29-F687-4f45-9708-019B960494DF}">
-                <a14:hiddenLine xmlns:a14="http://schemas.microsoft.com/office/drawing/2010/main" xmlns="" w="9525">
+                <a14:hiddenLine xmlns="" xmlns:a14="http://schemas.microsoft.com/office/drawing/2010/main" w="9525">
                   <a:solidFill>
                     <a:srgbClr val="000000"/>
                   </a:solidFill>
@@ -815,7 +4663,7 @@
             </a:ln>
             <a:extLst>
               <a:ext uri="{91240B29-F687-4f45-9708-019B960494DF}">
-                <a14:hiddenLine xmlns:a14="http://schemas.microsoft.com/office/drawing/2010/main" xmlns="" w="9525">
+                <a14:hiddenLine xmlns="" xmlns:a14="http://schemas.microsoft.com/office/drawing/2010/main" w="9525">
                   <a:solidFill>
                     <a:srgbClr val="000000"/>
                   </a:solidFill>
@@ -877,7 +4725,7 @@
             </a:ln>
             <a:extLst>
               <a:ext uri="{91240B29-F687-4f45-9708-019B960494DF}">
-                <a14:hiddenLine xmlns:a14="http://schemas.microsoft.com/office/drawing/2010/main" xmlns="" w="9525">
+                <a14:hiddenLine xmlns="" xmlns:a14="http://schemas.microsoft.com/office/drawing/2010/main" w="9525">
                   <a:solidFill>
                     <a:srgbClr val="000000"/>
                   </a:solidFill>
@@ -967,7 +4815,7 @@
             </a:ln>
             <a:extLst>
               <a:ext uri="{91240B29-F687-4f45-9708-019B960494DF}">
-                <a14:hiddenLine xmlns:a14="http://schemas.microsoft.com/office/drawing/2010/main" xmlns="" w="9525">
+                <a14:hiddenLine xmlns="" xmlns:a14="http://schemas.microsoft.com/office/drawing/2010/main" w="9525">
                   <a:solidFill>
                     <a:srgbClr val="000000"/>
                   </a:solidFill>
@@ -1057,7 +4905,7 @@
             </a:ln>
             <a:extLst>
               <a:ext uri="{91240B29-F687-4f45-9708-019B960494DF}">
-                <a14:hiddenLine xmlns:a14="http://schemas.microsoft.com/office/drawing/2010/main" xmlns="" w="9525">
+                <a14:hiddenLine xmlns="" xmlns:a14="http://schemas.microsoft.com/office/drawing/2010/main" w="9525">
                   <a:solidFill>
                     <a:srgbClr val="000000"/>
                   </a:solidFill>
@@ -1119,7 +4967,7 @@
             </a:ln>
             <a:extLst>
               <a:ext uri="{91240B29-F687-4f45-9708-019B960494DF}">
-                <a14:hiddenLine xmlns:a14="http://schemas.microsoft.com/office/drawing/2010/main" xmlns="" w="9525">
+                <a14:hiddenLine xmlns="" xmlns:a14="http://schemas.microsoft.com/office/drawing/2010/main" w="9525">
                   <a:solidFill>
                     <a:srgbClr val="000000"/>
                   </a:solidFill>
@@ -1229,7 +5077,7 @@
             </a:ln>
             <a:extLst>
               <a:ext uri="{91240B29-F687-4f45-9708-019B960494DF}">
-                <a14:hiddenLine xmlns:a14="http://schemas.microsoft.com/office/drawing/2010/main" xmlns="" w="9525">
+                <a14:hiddenLine xmlns="" xmlns:a14="http://schemas.microsoft.com/office/drawing/2010/main" w="9525">
                   <a:solidFill>
                     <a:srgbClr val="000000"/>
                   </a:solidFill>
@@ -1291,7 +5139,7 @@
             </a:ln>
             <a:extLst>
               <a:ext uri="{91240B29-F687-4f45-9708-019B960494DF}">
-                <a14:hiddenLine xmlns:a14="http://schemas.microsoft.com/office/drawing/2010/main" xmlns="" w="9525">
+                <a14:hiddenLine xmlns="" xmlns:a14="http://schemas.microsoft.com/office/drawing/2010/main" w="9525">
                   <a:solidFill>
                     <a:srgbClr val="000000"/>
                   </a:solidFill>
@@ -1381,7 +5229,7 @@
             </a:ln>
             <a:extLst>
               <a:ext uri="{91240B29-F687-4f45-9708-019B960494DF}">
-                <a14:hiddenLine xmlns:a14="http://schemas.microsoft.com/office/drawing/2010/main" xmlns="" w="9525">
+                <a14:hiddenLine xmlns="" xmlns:a14="http://schemas.microsoft.com/office/drawing/2010/main" w="9525">
                   <a:solidFill>
                     <a:srgbClr val="000000"/>
                   </a:solidFill>
@@ -1471,7 +5319,7 @@
             </a:ln>
             <a:extLst>
               <a:ext uri="{91240B29-F687-4f45-9708-019B960494DF}">
-                <a14:hiddenLine xmlns:a14="http://schemas.microsoft.com/office/drawing/2010/main" xmlns="" w="9525">
+                <a14:hiddenLine xmlns="" xmlns:a14="http://schemas.microsoft.com/office/drawing/2010/main" w="9525">
                   <a:solidFill>
                     <a:srgbClr val="000000"/>
                   </a:solidFill>
@@ -1533,7 +5381,7 @@
             </a:ln>
             <a:extLst>
               <a:ext uri="{91240B29-F687-4f45-9708-019B960494DF}">
-                <a14:hiddenLine xmlns:a14="http://schemas.microsoft.com/office/drawing/2010/main" xmlns="" w="9525">
+                <a14:hiddenLine xmlns="" xmlns:a14="http://schemas.microsoft.com/office/drawing/2010/main" w="9525">
                   <a:solidFill>
                     <a:srgbClr val="000000"/>
                   </a:solidFill>
@@ -1623,7 +5471,7 @@
             </a:ln>
             <a:extLst>
               <a:ext uri="{91240B29-F687-4f45-9708-019B960494DF}">
-                <a14:hiddenLine xmlns:a14="http://schemas.microsoft.com/office/drawing/2010/main" xmlns="" w="9525">
+                <a14:hiddenLine xmlns="" xmlns:a14="http://schemas.microsoft.com/office/drawing/2010/main" w="9525">
                   <a:solidFill>
                     <a:srgbClr val="000000"/>
                   </a:solidFill>
@@ -1713,7 +5561,7 @@
             </a:ln>
             <a:extLst>
               <a:ext uri="{91240B29-F687-4f45-9708-019B960494DF}">
-                <a14:hiddenLine xmlns:a14="http://schemas.microsoft.com/office/drawing/2010/main" xmlns="" w="9525">
+                <a14:hiddenLine xmlns="" xmlns:a14="http://schemas.microsoft.com/office/drawing/2010/main" w="9525">
                   <a:solidFill>
                     <a:srgbClr val="000000"/>
                   </a:solidFill>
@@ -1769,7 +5617,7 @@
             </a:ln>
             <a:extLst>
               <a:ext uri="{91240B29-F687-4f45-9708-019B960494DF}">
-                <a14:hiddenLine xmlns:a14="http://schemas.microsoft.com/office/drawing/2010/main" xmlns="" w="9525">
+                <a14:hiddenLine xmlns="" xmlns:a14="http://schemas.microsoft.com/office/drawing/2010/main" w="9525">
                   <a:solidFill>
                     <a:srgbClr val="000000"/>
                   </a:solidFill>
@@ -1859,7 +5707,7 @@
             </a:ln>
             <a:extLst>
               <a:ext uri="{91240B29-F687-4f45-9708-019B960494DF}">
-                <a14:hiddenLine xmlns:a14="http://schemas.microsoft.com/office/drawing/2010/main" xmlns="" w="9525">
+                <a14:hiddenLine xmlns="" xmlns:a14="http://schemas.microsoft.com/office/drawing/2010/main" w="9525">
                   <a:solidFill>
                     <a:srgbClr val="000000"/>
                   </a:solidFill>
@@ -1915,7 +5763,7 @@
             </a:ln>
             <a:extLst>
               <a:ext uri="{91240B29-F687-4f45-9708-019B960494DF}">
-                <a14:hiddenLine xmlns:a14="http://schemas.microsoft.com/office/drawing/2010/main" xmlns="" w="9525">
+                <a14:hiddenLine xmlns="" xmlns:a14="http://schemas.microsoft.com/office/drawing/2010/main" w="9525">
                   <a:solidFill>
                     <a:srgbClr val="000000"/>
                   </a:solidFill>
@@ -2005,7 +5853,7 @@
             </a:ln>
             <a:extLst>
               <a:ext uri="{91240B29-F687-4f45-9708-019B960494DF}">
-                <a14:hiddenLine xmlns:a14="http://schemas.microsoft.com/office/drawing/2010/main" xmlns="" w="9525">
+                <a14:hiddenLine xmlns="" xmlns:a14="http://schemas.microsoft.com/office/drawing/2010/main" w="9525">
                   <a:solidFill>
                     <a:srgbClr val="000000"/>
                   </a:solidFill>
@@ -2073,7 +5921,7 @@
             </a:ln>
             <a:extLst>
               <a:ext uri="{91240B29-F687-4f45-9708-019B960494DF}">
-                <a14:hiddenLine xmlns:a14="http://schemas.microsoft.com/office/drawing/2010/main" xmlns="" w="9525">
+                <a14:hiddenLine xmlns="" xmlns:a14="http://schemas.microsoft.com/office/drawing/2010/main" w="9525">
                   <a:solidFill>
                     <a:srgbClr val="000000"/>
                   </a:solidFill>
@@ -2163,7 +6011,7 @@
             </a:ln>
             <a:extLst>
               <a:ext uri="{91240B29-F687-4f45-9708-019B960494DF}">
-                <a14:hiddenLine xmlns:a14="http://schemas.microsoft.com/office/drawing/2010/main" xmlns="" w="9525">
+                <a14:hiddenLine xmlns="" xmlns:a14="http://schemas.microsoft.com/office/drawing/2010/main" w="9525">
                   <a:solidFill>
                     <a:srgbClr val="000000"/>
                   </a:solidFill>
@@ -2231,7 +6079,7 @@
             </a:ln>
             <a:extLst>
               <a:ext uri="{91240B29-F687-4f45-9708-019B960494DF}">
-                <a14:hiddenLine xmlns:a14="http://schemas.microsoft.com/office/drawing/2010/main" xmlns="" w="9525">
+                <a14:hiddenLine xmlns="" xmlns:a14="http://schemas.microsoft.com/office/drawing/2010/main" w="9525">
                   <a:solidFill>
                     <a:srgbClr val="000000"/>
                   </a:solidFill>
@@ -2321,7 +6169,7 @@
             </a:ln>
             <a:extLst>
               <a:ext uri="{91240B29-F687-4f45-9708-019B960494DF}">
-                <a14:hiddenLine xmlns:a14="http://schemas.microsoft.com/office/drawing/2010/main" xmlns="" w="9525">
+                <a14:hiddenLine xmlns="" xmlns:a14="http://schemas.microsoft.com/office/drawing/2010/main" w="9525">
                   <a:solidFill>
                     <a:srgbClr val="000000"/>
                   </a:solidFill>
@@ -2355,7 +6203,7 @@
             </a:ln>
             <a:extLst>
               <a:ext uri="{91240B29-F687-4f45-9708-019B960494DF}">
-                <a14:hiddenLine xmlns:a14="http://schemas.microsoft.com/office/drawing/2010/main" xmlns="" w="9525">
+                <a14:hiddenLine xmlns="" xmlns:a14="http://schemas.microsoft.com/office/drawing/2010/main" w="9525">
                   <a:solidFill>
                     <a:srgbClr val="000000"/>
                   </a:solidFill>
@@ -2445,7 +6293,7 @@
             </a:ln>
             <a:extLst>
               <a:ext uri="{91240B29-F687-4f45-9708-019B960494DF}">
-                <a14:hiddenLine xmlns:a14="http://schemas.microsoft.com/office/drawing/2010/main" xmlns="" w="9525">
+                <a14:hiddenLine xmlns="" xmlns:a14="http://schemas.microsoft.com/office/drawing/2010/main" w="9525">
                   <a:solidFill>
                     <a:srgbClr val="000000"/>
                   </a:solidFill>
@@ -2507,7 +6355,7 @@
             </a:ln>
             <a:extLst>
               <a:ext uri="{91240B29-F687-4f45-9708-019B960494DF}">
-                <a14:hiddenLine xmlns:a14="http://schemas.microsoft.com/office/drawing/2010/main" xmlns="" w="9525">
+                <a14:hiddenLine xmlns="" xmlns:a14="http://schemas.microsoft.com/office/drawing/2010/main" w="9525">
                   <a:solidFill>
                     <a:srgbClr val="000000"/>
                   </a:solidFill>
@@ -2569,7 +6417,7 @@
             </a:ln>
             <a:extLst>
               <a:ext uri="{91240B29-F687-4f45-9708-019B960494DF}">
-                <a14:hiddenLine xmlns:a14="http://schemas.microsoft.com/office/drawing/2010/main" xmlns="" w="9525">
+                <a14:hiddenLine xmlns="" xmlns:a14="http://schemas.microsoft.com/office/drawing/2010/main" w="9525">
                   <a:solidFill>
                     <a:srgbClr val="000000"/>
                   </a:solidFill>
@@ -2659,7 +6507,7 @@
             </a:ln>
             <a:extLst>
               <a:ext uri="{91240B29-F687-4f45-9708-019B960494DF}">
-                <a14:hiddenLine xmlns:a14="http://schemas.microsoft.com/office/drawing/2010/main" xmlns="" w="9525">
+                <a14:hiddenLine xmlns="" xmlns:a14="http://schemas.microsoft.com/office/drawing/2010/main" w="9525">
                   <a:solidFill>
                     <a:srgbClr val="000000"/>
                   </a:solidFill>
@@ -2727,7 +6575,7 @@
             </a:ln>
             <a:extLst>
               <a:ext uri="{91240B29-F687-4f45-9708-019B960494DF}">
-                <a14:hiddenLine xmlns:a14="http://schemas.microsoft.com/office/drawing/2010/main" xmlns="" w="9525">
+                <a14:hiddenLine xmlns="" xmlns:a14="http://schemas.microsoft.com/office/drawing/2010/main" w="9525">
                   <a:solidFill>
                     <a:srgbClr val="000000"/>
                   </a:solidFill>
@@ -2789,7 +6637,7 @@
             </a:ln>
             <a:extLst>
               <a:ext uri="{91240B29-F687-4f45-9708-019B960494DF}">
-                <a14:hiddenLine xmlns:a14="http://schemas.microsoft.com/office/drawing/2010/main" xmlns="" w="9525">
+                <a14:hiddenLine xmlns="" xmlns:a14="http://schemas.microsoft.com/office/drawing/2010/main" w="9525">
                   <a:solidFill>
                     <a:srgbClr val="000000"/>
                   </a:solidFill>
@@ -2879,7 +6727,7 @@
             </a:ln>
             <a:extLst>
               <a:ext uri="{91240B29-F687-4f45-9708-019B960494DF}">
-                <a14:hiddenLine xmlns:a14="http://schemas.microsoft.com/office/drawing/2010/main" xmlns="" w="9525">
+                <a14:hiddenLine xmlns="" xmlns:a14="http://schemas.microsoft.com/office/drawing/2010/main" w="9525">
                   <a:solidFill>
                     <a:srgbClr val="000000"/>
                   </a:solidFill>
@@ -2941,7 +6789,7 @@
             </a:ln>
             <a:extLst>
               <a:ext uri="{91240B29-F687-4f45-9708-019B960494DF}">
-                <a14:hiddenLine xmlns:a14="http://schemas.microsoft.com/office/drawing/2010/main" xmlns="" w="9525">
+                <a14:hiddenLine xmlns="" xmlns:a14="http://schemas.microsoft.com/office/drawing/2010/main" w="9525">
                   <a:solidFill>
                     <a:srgbClr val="000000"/>
                   </a:solidFill>
@@ -3031,7 +6879,7 @@
             </a:ln>
             <a:extLst>
               <a:ext uri="{91240B29-F687-4f45-9708-019B960494DF}">
-                <a14:hiddenLine xmlns:a14="http://schemas.microsoft.com/office/drawing/2010/main" xmlns="" w="9525">
+                <a14:hiddenLine xmlns="" xmlns:a14="http://schemas.microsoft.com/office/drawing/2010/main" w="9525">
                   <a:solidFill>
                     <a:srgbClr val="000000"/>
                   </a:solidFill>
@@ -3093,7 +6941,7 @@
             </a:ln>
             <a:extLst>
               <a:ext uri="{91240B29-F687-4f45-9708-019B960494DF}">
-                <a14:hiddenLine xmlns:a14="http://schemas.microsoft.com/office/drawing/2010/main" xmlns="" w="9525">
+                <a14:hiddenLine xmlns="" xmlns:a14="http://schemas.microsoft.com/office/drawing/2010/main" w="9525">
                   <a:solidFill>
                     <a:srgbClr val="000000"/>
                   </a:solidFill>
@@ -3183,7 +7031,7 @@
             </a:ln>
             <a:extLst>
               <a:ext uri="{91240B29-F687-4f45-9708-019B960494DF}">
-                <a14:hiddenLine xmlns:a14="http://schemas.microsoft.com/office/drawing/2010/main" xmlns="" w="9525">
+                <a14:hiddenLine xmlns="" xmlns:a14="http://schemas.microsoft.com/office/drawing/2010/main" w="9525">
                   <a:solidFill>
                     <a:srgbClr val="000000"/>
                   </a:solidFill>
@@ -3217,7 +7065,7 @@
             </a:ln>
             <a:extLst>
               <a:ext uri="{91240B29-F687-4f45-9708-019B960494DF}">
-                <a14:hiddenLine xmlns:a14="http://schemas.microsoft.com/office/drawing/2010/main" xmlns="" w="9525">
+                <a14:hiddenLine xmlns="" xmlns:a14="http://schemas.microsoft.com/office/drawing/2010/main" w="9525">
                   <a:solidFill>
                     <a:srgbClr val="000000"/>
                   </a:solidFill>
@@ -3282,7 +7130,7 @@
             </a:ln>
             <a:extLst>
               <a:ext uri="{91240B29-F687-4f45-9708-019B960494DF}">
-                <a14:hiddenLine xmlns:a14="http://schemas.microsoft.com/office/drawing/2010/main" xmlns="" w="9525">
+                <a14:hiddenLine xmlns="" xmlns:a14="http://schemas.microsoft.com/office/drawing/2010/main" w="9525">
                   <a:solidFill>
                     <a:srgbClr val="000000"/>
                   </a:solidFill>
@@ -3372,7 +7220,7 @@
             </a:ln>
             <a:extLst>
               <a:ext uri="{91240B29-F687-4f45-9708-019B960494DF}">
-                <a14:hiddenLine xmlns:a14="http://schemas.microsoft.com/office/drawing/2010/main" xmlns="" w="9525">
+                <a14:hiddenLine xmlns="" xmlns:a14="http://schemas.microsoft.com/office/drawing/2010/main" w="9525">
                   <a:solidFill>
                     <a:srgbClr val="000000"/>
                   </a:solidFill>
@@ -3434,7 +7282,7 @@
             </a:ln>
             <a:extLst>
               <a:ext uri="{91240B29-F687-4f45-9708-019B960494DF}">
-                <a14:hiddenLine xmlns:a14="http://schemas.microsoft.com/office/drawing/2010/main" xmlns="" w="9525">
+                <a14:hiddenLine xmlns="" xmlns:a14="http://schemas.microsoft.com/office/drawing/2010/main" w="9525">
                   <a:solidFill>
                     <a:srgbClr val="000000"/>
                   </a:solidFill>
@@ -3524,7 +7372,7 @@
             </a:ln>
             <a:extLst>
               <a:ext uri="{91240B29-F687-4f45-9708-019B960494DF}">
-                <a14:hiddenLine xmlns:a14="http://schemas.microsoft.com/office/drawing/2010/main" xmlns="" w="9525">
+                <a14:hiddenLine xmlns="" xmlns:a14="http://schemas.microsoft.com/office/drawing/2010/main" w="9525">
                   <a:solidFill>
                     <a:srgbClr val="000000"/>
                   </a:solidFill>
@@ -3614,7 +7462,7 @@
             </a:ln>
             <a:extLst>
               <a:ext uri="{91240B29-F687-4f45-9708-019B960494DF}">
-                <a14:hiddenLine xmlns:a14="http://schemas.microsoft.com/office/drawing/2010/main" xmlns="" w="9525">
+                <a14:hiddenLine xmlns="" xmlns:a14="http://schemas.microsoft.com/office/drawing/2010/main" w="9525">
                   <a:solidFill>
                     <a:srgbClr val="000000"/>
                   </a:solidFill>
@@ -3679,7 +7527,7 @@
             </a:ln>
             <a:extLst>
               <a:ext uri="{91240B29-F687-4f45-9708-019B960494DF}">
-                <a14:hiddenLine xmlns:a14="http://schemas.microsoft.com/office/drawing/2010/main" xmlns="" w="9525">
+                <a14:hiddenLine xmlns="" xmlns:a14="http://schemas.microsoft.com/office/drawing/2010/main" w="9525">
                   <a:solidFill>
                     <a:srgbClr val="000000"/>
                   </a:solidFill>
@@ -3741,7 +7589,7 @@
             </a:ln>
             <a:extLst>
               <a:ext uri="{91240B29-F687-4f45-9708-019B960494DF}">
-                <a14:hiddenLine xmlns:a14="http://schemas.microsoft.com/office/drawing/2010/main" xmlns="" w="9525">
+                <a14:hiddenLine xmlns="" xmlns:a14="http://schemas.microsoft.com/office/drawing/2010/main" w="9525">
                   <a:solidFill>
                     <a:srgbClr val="000000"/>
                   </a:solidFill>
@@ -3831,7 +7679,7 @@
             </a:ln>
             <a:extLst>
               <a:ext uri="{91240B29-F687-4f45-9708-019B960494DF}">
-                <a14:hiddenLine xmlns:a14="http://schemas.microsoft.com/office/drawing/2010/main" xmlns="" w="9525">
+                <a14:hiddenLine xmlns="" xmlns:a14="http://schemas.microsoft.com/office/drawing/2010/main" w="9525">
                   <a:solidFill>
                     <a:srgbClr val="000000"/>
                   </a:solidFill>
@@ -3921,7 +7769,7 @@
             </a:ln>
             <a:extLst>
               <a:ext uri="{91240B29-F687-4f45-9708-019B960494DF}">
-                <a14:hiddenLine xmlns:a14="http://schemas.microsoft.com/office/drawing/2010/main" xmlns="" w="9525">
+                <a14:hiddenLine xmlns="" xmlns:a14="http://schemas.microsoft.com/office/drawing/2010/main" w="9525">
                   <a:solidFill>
                     <a:srgbClr val="000000"/>
                   </a:solidFill>
@@ -3983,7 +7831,7 @@
             </a:ln>
             <a:extLst>
               <a:ext uri="{91240B29-F687-4f45-9708-019B960494DF}">
-                <a14:hiddenLine xmlns:a14="http://schemas.microsoft.com/office/drawing/2010/main" xmlns="" w="9525">
+                <a14:hiddenLine xmlns="" xmlns:a14="http://schemas.microsoft.com/office/drawing/2010/main" w="9525">
                   <a:solidFill>
                     <a:srgbClr val="000000"/>
                   </a:solidFill>
@@ -4103,7 +7951,7 @@
             </a:ln>
             <a:extLst>
               <a:ext uri="{91240B29-F687-4f45-9708-019B960494DF}">
-                <a14:hiddenLine xmlns:a14="http://schemas.microsoft.com/office/drawing/2010/main" xmlns="" w="9525">
+                <a14:hiddenLine xmlns="" xmlns:a14="http://schemas.microsoft.com/office/drawing/2010/main" w="9525">
                   <a:solidFill>
                     <a:srgbClr val="000000"/>
                   </a:solidFill>
@@ -4171,7 +8019,7 @@
             </a:ln>
             <a:extLst>
               <a:ext uri="{91240B29-F687-4f45-9708-019B960494DF}">
-                <a14:hiddenLine xmlns:a14="http://schemas.microsoft.com/office/drawing/2010/main" xmlns="" w="9525">
+                <a14:hiddenLine xmlns="" xmlns:a14="http://schemas.microsoft.com/office/drawing/2010/main" w="9525">
                   <a:solidFill>
                     <a:srgbClr val="000000"/>
                   </a:solidFill>
@@ -4261,7 +8109,7 @@
             </a:ln>
             <a:extLst>
               <a:ext uri="{91240B29-F687-4f45-9708-019B960494DF}">
-                <a14:hiddenLine xmlns:a14="http://schemas.microsoft.com/office/drawing/2010/main" xmlns="" w="9525">
+                <a14:hiddenLine xmlns="" xmlns:a14="http://schemas.microsoft.com/office/drawing/2010/main" w="9525">
                   <a:solidFill>
                     <a:srgbClr val="000000"/>
                   </a:solidFill>
@@ -4401,7 +8249,7 @@
           <a:p>
             <a:fld id="{48A87A34-81AB-432B-8DAE-1953F412C126}" type="datetimeFigureOut">
               <a:rPr lang="en-US" smtClean="0"/>
-              <a:t>11/28/2025</a:t>
+              <a:t>12/3/2025</a:t>
             </a:fld>
             <a:endParaRPr lang="en-US" dirty="0"/>
           </a:p>
@@ -4668,7 +8516,7 @@
           <a:p>
             <a:fld id="{48A87A34-81AB-432B-8DAE-1953F412C126}" type="datetimeFigureOut">
               <a:rPr lang="en-US" smtClean="0"/>
-              <a:t>11/28/2025</a:t>
+              <a:t>12/3/2025</a:t>
             </a:fld>
             <a:endParaRPr lang="en-US" dirty="0"/>
           </a:p>
@@ -4864,7 +8712,7 @@
           <a:p>
             <a:fld id="{48A87A34-81AB-432B-8DAE-1953F412C126}" type="datetimeFigureOut">
               <a:rPr lang="en-US" smtClean="0"/>
-              <a:t>11/28/2025</a:t>
+              <a:t>12/3/2025</a:t>
             </a:fld>
             <a:endParaRPr lang="en-US" dirty="0"/>
           </a:p>
@@ -5127,7 +8975,7 @@
           <a:p>
             <a:fld id="{48A87A34-81AB-432B-8DAE-1953F412C126}" type="datetimeFigureOut">
               <a:rPr lang="en-US" smtClean="0"/>
-              <a:t>11/28/2025</a:t>
+              <a:t>12/3/2025</a:t>
             </a:fld>
             <a:endParaRPr lang="en-US" dirty="0"/>
           </a:p>
@@ -5561,7 +9409,7 @@
           <a:p>
             <a:fld id="{48A87A34-81AB-432B-8DAE-1953F412C126}" type="datetimeFigureOut">
               <a:rPr lang="en-US" smtClean="0"/>
-              <a:t>11/28/2025</a:t>
+              <a:t>12/3/2025</a:t>
             </a:fld>
             <a:endParaRPr lang="en-US" dirty="0"/>
           </a:p>
@@ -6107,7 +9955,7 @@
           <a:p>
             <a:fld id="{48A87A34-81AB-432B-8DAE-1953F412C126}" type="datetimeFigureOut">
               <a:rPr lang="en-US" smtClean="0"/>
-              <a:t>11/28/2025</a:t>
+              <a:t>12/3/2025</a:t>
             </a:fld>
             <a:endParaRPr lang="en-US" dirty="0"/>
           </a:p>
@@ -6827,7 +10675,7 @@
           <a:p>
             <a:fld id="{48A87A34-81AB-432B-8DAE-1953F412C126}" type="datetimeFigureOut">
               <a:rPr lang="en-US" smtClean="0"/>
-              <a:t>11/28/2025</a:t>
+              <a:t>12/3/2025</a:t>
             </a:fld>
             <a:endParaRPr lang="en-US" dirty="0"/>
           </a:p>
@@ -6997,7 +10845,7 @@
           <a:p>
             <a:fld id="{48A87A34-81AB-432B-8DAE-1953F412C126}" type="datetimeFigureOut">
               <a:rPr lang="en-US" smtClean="0"/>
-              <a:t>11/28/2025</a:t>
+              <a:t>12/3/2025</a:t>
             </a:fld>
             <a:endParaRPr lang="en-US" dirty="0"/>
           </a:p>
@@ -7177,7 +11025,7 @@
           <a:p>
             <a:fld id="{48A87A34-81AB-432B-8DAE-1953F412C126}" type="datetimeFigureOut">
               <a:rPr lang="en-US" smtClean="0"/>
-              <a:t>11/28/2025</a:t>
+              <a:t>12/3/2025</a:t>
             </a:fld>
             <a:endParaRPr lang="en-US" dirty="0"/>
           </a:p>
@@ -7347,7 +11195,7 @@
           <a:p>
             <a:fld id="{48A87A34-81AB-432B-8DAE-1953F412C126}" type="datetimeFigureOut">
               <a:rPr lang="en-US" smtClean="0"/>
-              <a:t>11/28/2025</a:t>
+              <a:t>12/3/2025</a:t>
             </a:fld>
             <a:endParaRPr lang="en-US" dirty="0"/>
           </a:p>
@@ -7597,7 +11445,7 @@
           <a:p>
             <a:fld id="{48A87A34-81AB-432B-8DAE-1953F412C126}" type="datetimeFigureOut">
               <a:rPr lang="en-US" smtClean="0"/>
-              <a:t>11/28/2025</a:t>
+              <a:t>12/3/2025</a:t>
             </a:fld>
             <a:endParaRPr lang="en-US" dirty="0"/>
           </a:p>
@@ -7829,7 +11677,7 @@
           <a:p>
             <a:fld id="{48A87A34-81AB-432B-8DAE-1953F412C126}" type="datetimeFigureOut">
               <a:rPr lang="en-US" smtClean="0"/>
-              <a:t>11/28/2025</a:t>
+              <a:t>12/3/2025</a:t>
             </a:fld>
             <a:endParaRPr lang="en-US" dirty="0"/>
           </a:p>
@@ -8210,7 +12058,7 @@
           <a:p>
             <a:fld id="{48A87A34-81AB-432B-8DAE-1953F412C126}" type="datetimeFigureOut">
               <a:rPr lang="en-US" smtClean="0"/>
-              <a:t>11/28/2025</a:t>
+              <a:t>12/3/2025</a:t>
             </a:fld>
             <a:endParaRPr lang="en-US" dirty="0"/>
           </a:p>
@@ -8328,7 +12176,7 @@
           <a:p>
             <a:fld id="{48A87A34-81AB-432B-8DAE-1953F412C126}" type="datetimeFigureOut">
               <a:rPr lang="en-US" smtClean="0"/>
-              <a:t>11/28/2025</a:t>
+              <a:t>12/3/2025</a:t>
             </a:fld>
             <a:endParaRPr lang="en-US" dirty="0"/>
           </a:p>
@@ -8423,7 +12271,7 @@
           <a:p>
             <a:fld id="{48A87A34-81AB-432B-8DAE-1953F412C126}" type="datetimeFigureOut">
               <a:rPr lang="en-US" smtClean="0"/>
-              <a:t>11/28/2025</a:t>
+              <a:t>12/3/2025</a:t>
             </a:fld>
             <a:endParaRPr lang="en-US" dirty="0"/>
           </a:p>
@@ -8672,7 +12520,7 @@
           <a:p>
             <a:fld id="{48A87A34-81AB-432B-8DAE-1953F412C126}" type="datetimeFigureOut">
               <a:rPr lang="en-US" smtClean="0"/>
-              <a:t>11/28/2025</a:t>
+              <a:t>12/3/2025</a:t>
             </a:fld>
             <a:endParaRPr lang="en-US" dirty="0"/>
           </a:p>
@@ -8952,7 +12800,7 @@
           <a:p>
             <a:fld id="{48A87A34-81AB-432B-8DAE-1953F412C126}" type="datetimeFigureOut">
               <a:rPr lang="en-US" smtClean="0"/>
-              <a:t>11/28/2025</a:t>
+              <a:t>12/3/2025</a:t>
             </a:fld>
             <a:endParaRPr lang="en-US" dirty="0"/>
           </a:p>
@@ -9068,7 +12916,7 @@
           <a:noFill/>
           <a:extLst>
             <a:ext uri="{909E8E84-426E-40dd-AFC4-6F175D3DCCD1}">
-              <a14:hiddenFill xmlns:a14="http://schemas.microsoft.com/office/drawing/2010/main" xmlns="">
+              <a14:hiddenFill xmlns="" xmlns:a14="http://schemas.microsoft.com/office/drawing/2010/main">
                 <a:solidFill>
                   <a:srgbClr val="FFFFFF"/>
                 </a:solidFill>
@@ -9142,7 +12990,7 @@
               </a:ln>
               <a:extLst>
                 <a:ext uri="{91240B29-F687-4f45-9708-019B960494DF}">
-                  <a14:hiddenLine xmlns:a14="http://schemas.microsoft.com/office/drawing/2010/main" xmlns="" w="9525">
+                  <a14:hiddenLine xmlns="" xmlns:a14="http://schemas.microsoft.com/office/drawing/2010/main" w="9525">
                     <a:solidFill>
                       <a:srgbClr val="000000"/>
                     </a:solidFill>
@@ -9232,7 +13080,7 @@
               </a:ln>
               <a:extLst>
                 <a:ext uri="{91240B29-F687-4f45-9708-019B960494DF}">
-                  <a14:hiddenLine xmlns:a14="http://schemas.microsoft.com/office/drawing/2010/main" xmlns="" w="9525">
+                  <a14:hiddenLine xmlns="" xmlns:a14="http://schemas.microsoft.com/office/drawing/2010/main" w="9525">
                     <a:solidFill>
                       <a:srgbClr val="000000"/>
                     </a:solidFill>
@@ -9322,7 +13170,7 @@
               </a:ln>
               <a:extLst>
                 <a:ext uri="{91240B29-F687-4f45-9708-019B960494DF}">
-                  <a14:hiddenLine xmlns:a14="http://schemas.microsoft.com/office/drawing/2010/main" xmlns="" w="9525">
+                  <a14:hiddenLine xmlns="" xmlns:a14="http://schemas.microsoft.com/office/drawing/2010/main" w="9525">
                     <a:solidFill>
                       <a:srgbClr val="000000"/>
                     </a:solidFill>
@@ -9384,7 +13232,7 @@
               </a:ln>
               <a:extLst>
                 <a:ext uri="{91240B29-F687-4f45-9708-019B960494DF}">
-                  <a14:hiddenLine xmlns:a14="http://schemas.microsoft.com/office/drawing/2010/main" xmlns="" w="9525">
+                  <a14:hiddenLine xmlns="" xmlns:a14="http://schemas.microsoft.com/office/drawing/2010/main" w="9525">
                     <a:solidFill>
                       <a:srgbClr val="000000"/>
                     </a:solidFill>
@@ -9474,7 +13322,7 @@
               </a:ln>
               <a:extLst>
                 <a:ext uri="{91240B29-F687-4f45-9708-019B960494DF}">
-                  <a14:hiddenLine xmlns:a14="http://schemas.microsoft.com/office/drawing/2010/main" xmlns="" w="9525">
+                  <a14:hiddenLine xmlns="" xmlns:a14="http://schemas.microsoft.com/office/drawing/2010/main" w="9525">
                     <a:solidFill>
                       <a:srgbClr val="000000"/>
                     </a:solidFill>
@@ -9536,7 +13384,7 @@
               </a:ln>
               <a:extLst>
                 <a:ext uri="{91240B29-F687-4f45-9708-019B960494DF}">
-                  <a14:hiddenLine xmlns:a14="http://schemas.microsoft.com/office/drawing/2010/main" xmlns="" w="9525">
+                  <a14:hiddenLine xmlns="" xmlns:a14="http://schemas.microsoft.com/office/drawing/2010/main" w="9525">
                     <a:solidFill>
                       <a:srgbClr val="000000"/>
                     </a:solidFill>
@@ -9598,7 +13446,7 @@
               </a:ln>
               <a:extLst>
                 <a:ext uri="{91240B29-F687-4f45-9708-019B960494DF}">
-                  <a14:hiddenLine xmlns:a14="http://schemas.microsoft.com/office/drawing/2010/main" xmlns="" w="9525">
+                  <a14:hiddenLine xmlns="" xmlns:a14="http://schemas.microsoft.com/office/drawing/2010/main" w="9525">
                     <a:solidFill>
                       <a:srgbClr val="000000"/>
                     </a:solidFill>
@@ -9688,7 +13536,7 @@
               </a:ln>
               <a:extLst>
                 <a:ext uri="{91240B29-F687-4f45-9708-019B960494DF}">
-                  <a14:hiddenLine xmlns:a14="http://schemas.microsoft.com/office/drawing/2010/main" xmlns="" w="9525">
+                  <a14:hiddenLine xmlns="" xmlns:a14="http://schemas.microsoft.com/office/drawing/2010/main" w="9525">
                     <a:solidFill>
                       <a:srgbClr val="000000"/>
                     </a:solidFill>
@@ -9778,7 +13626,7 @@
               </a:ln>
               <a:extLst>
                 <a:ext uri="{91240B29-F687-4f45-9708-019B960494DF}">
-                  <a14:hiddenLine xmlns:a14="http://schemas.microsoft.com/office/drawing/2010/main" xmlns="" w="9525">
+                  <a14:hiddenLine xmlns="" xmlns:a14="http://schemas.microsoft.com/office/drawing/2010/main" w="9525">
                     <a:solidFill>
                       <a:srgbClr val="000000"/>
                     </a:solidFill>
@@ -9840,7 +13688,7 @@
               </a:ln>
               <a:extLst>
                 <a:ext uri="{91240B29-F687-4f45-9708-019B960494DF}">
-                  <a14:hiddenLine xmlns:a14="http://schemas.microsoft.com/office/drawing/2010/main" xmlns="" w="9525">
+                  <a14:hiddenLine xmlns="" xmlns:a14="http://schemas.microsoft.com/office/drawing/2010/main" w="9525">
                     <a:solidFill>
                       <a:srgbClr val="000000"/>
                     </a:solidFill>
@@ -9950,7 +13798,7 @@
               </a:ln>
               <a:extLst>
                 <a:ext uri="{91240B29-F687-4f45-9708-019B960494DF}">
-                  <a14:hiddenLine xmlns:a14="http://schemas.microsoft.com/office/drawing/2010/main" xmlns="" w="9525">
+                  <a14:hiddenLine xmlns="" xmlns:a14="http://schemas.microsoft.com/office/drawing/2010/main" w="9525">
                     <a:solidFill>
                       <a:srgbClr val="000000"/>
                     </a:solidFill>
@@ -10034,7 +13882,7 @@
               </a:ln>
               <a:extLst>
                 <a:ext uri="{91240B29-F687-4f45-9708-019B960494DF}">
-                  <a14:hiddenLine xmlns:a14="http://schemas.microsoft.com/office/drawing/2010/main" xmlns="" w="9525">
+                  <a14:hiddenLine xmlns="" xmlns:a14="http://schemas.microsoft.com/office/drawing/2010/main" w="9525">
                     <a:solidFill>
                       <a:srgbClr val="000000"/>
                     </a:solidFill>
@@ -10096,7 +13944,7 @@
               </a:ln>
               <a:extLst>
                 <a:ext uri="{91240B29-F687-4f45-9708-019B960494DF}">
-                  <a14:hiddenLine xmlns:a14="http://schemas.microsoft.com/office/drawing/2010/main" xmlns="" w="9525">
+                  <a14:hiddenLine xmlns="" xmlns:a14="http://schemas.microsoft.com/office/drawing/2010/main" w="9525">
                     <a:solidFill>
                       <a:srgbClr val="000000"/>
                     </a:solidFill>
@@ -10158,7 +14006,7 @@
               </a:ln>
               <a:extLst>
                 <a:ext uri="{91240B29-F687-4f45-9708-019B960494DF}">
-                  <a14:hiddenLine xmlns:a14="http://schemas.microsoft.com/office/drawing/2010/main" xmlns="" w="9525">
+                  <a14:hiddenLine xmlns="" xmlns:a14="http://schemas.microsoft.com/office/drawing/2010/main" w="9525">
                     <a:solidFill>
                       <a:srgbClr val="000000"/>
                     </a:solidFill>
@@ -10248,7 +14096,7 @@
               </a:ln>
               <a:extLst>
                 <a:ext uri="{91240B29-F687-4f45-9708-019B960494DF}">
-                  <a14:hiddenLine xmlns:a14="http://schemas.microsoft.com/office/drawing/2010/main" xmlns="" w="9525">
+                  <a14:hiddenLine xmlns="" xmlns:a14="http://schemas.microsoft.com/office/drawing/2010/main" w="9525">
                     <a:solidFill>
                       <a:srgbClr val="000000"/>
                     </a:solidFill>
@@ -10282,7 +14130,7 @@
               </a:ln>
               <a:extLst>
                 <a:ext uri="{91240B29-F687-4f45-9708-019B960494DF}">
-                  <a14:hiddenLine xmlns:a14="http://schemas.microsoft.com/office/drawing/2010/main" xmlns="" w="9525">
+                  <a14:hiddenLine xmlns="" xmlns:a14="http://schemas.microsoft.com/office/drawing/2010/main" w="9525">
                     <a:solidFill>
                       <a:srgbClr val="000000"/>
                     </a:solidFill>
@@ -10347,7 +14195,7 @@
               </a:ln>
               <a:extLst>
                 <a:ext uri="{91240B29-F687-4f45-9708-019B960494DF}">
-                  <a14:hiddenLine xmlns:a14="http://schemas.microsoft.com/office/drawing/2010/main" xmlns="" w="9525">
+                  <a14:hiddenLine xmlns="" xmlns:a14="http://schemas.microsoft.com/office/drawing/2010/main" w="9525">
                     <a:solidFill>
                       <a:srgbClr val="000000"/>
                     </a:solidFill>
@@ -10437,7 +14285,7 @@
               </a:ln>
               <a:extLst>
                 <a:ext uri="{91240B29-F687-4f45-9708-019B960494DF}">
-                  <a14:hiddenLine xmlns:a14="http://schemas.microsoft.com/office/drawing/2010/main" xmlns="" w="9525">
+                  <a14:hiddenLine xmlns="" xmlns:a14="http://schemas.microsoft.com/office/drawing/2010/main" w="9525">
                     <a:solidFill>
                       <a:srgbClr val="000000"/>
                     </a:solidFill>
@@ -10499,7 +14347,7 @@
               </a:ln>
               <a:extLst>
                 <a:ext uri="{91240B29-F687-4f45-9708-019B960494DF}">
-                  <a14:hiddenLine xmlns:a14="http://schemas.microsoft.com/office/drawing/2010/main" xmlns="" w="9525">
+                  <a14:hiddenLine xmlns="" xmlns:a14="http://schemas.microsoft.com/office/drawing/2010/main" w="9525">
                     <a:solidFill>
                       <a:srgbClr val="000000"/>
                     </a:solidFill>
@@ -10589,7 +14437,7 @@
               </a:ln>
               <a:extLst>
                 <a:ext uri="{91240B29-F687-4f45-9708-019B960494DF}">
-                  <a14:hiddenLine xmlns:a14="http://schemas.microsoft.com/office/drawing/2010/main" xmlns="" w="9525">
+                  <a14:hiddenLine xmlns="" xmlns:a14="http://schemas.microsoft.com/office/drawing/2010/main" w="9525">
                     <a:solidFill>
                       <a:srgbClr val="000000"/>
                     </a:solidFill>
@@ -10654,7 +14502,7 @@
               </a:ln>
               <a:extLst>
                 <a:ext uri="{91240B29-F687-4f45-9708-019B960494DF}">
-                  <a14:hiddenLine xmlns:a14="http://schemas.microsoft.com/office/drawing/2010/main" xmlns="" w="9525">
+                  <a14:hiddenLine xmlns="" xmlns:a14="http://schemas.microsoft.com/office/drawing/2010/main" w="9525">
                     <a:solidFill>
                       <a:srgbClr val="000000"/>
                     </a:solidFill>
@@ -10716,7 +14564,7 @@
               </a:ln>
               <a:extLst>
                 <a:ext uri="{91240B29-F687-4f45-9708-019B960494DF}">
-                  <a14:hiddenLine xmlns:a14="http://schemas.microsoft.com/office/drawing/2010/main" xmlns="" w="9525">
+                  <a14:hiddenLine xmlns="" xmlns:a14="http://schemas.microsoft.com/office/drawing/2010/main" w="9525">
                     <a:solidFill>
                       <a:srgbClr val="000000"/>
                     </a:solidFill>
@@ -10806,7 +14654,7 @@
               </a:ln>
               <a:extLst>
                 <a:ext uri="{91240B29-F687-4f45-9708-019B960494DF}">
-                  <a14:hiddenLine xmlns:a14="http://schemas.microsoft.com/office/drawing/2010/main" xmlns="" w="9525">
+                  <a14:hiddenLine xmlns="" xmlns:a14="http://schemas.microsoft.com/office/drawing/2010/main" w="9525">
                     <a:solidFill>
                       <a:srgbClr val="000000"/>
                     </a:solidFill>
@@ -10896,7 +14744,7 @@
               </a:ln>
               <a:extLst>
                 <a:ext uri="{91240B29-F687-4f45-9708-019B960494DF}">
-                  <a14:hiddenLine xmlns:a14="http://schemas.microsoft.com/office/drawing/2010/main" xmlns="" w="9525">
+                  <a14:hiddenLine xmlns="" xmlns:a14="http://schemas.microsoft.com/office/drawing/2010/main" w="9525">
                     <a:solidFill>
                       <a:srgbClr val="000000"/>
                     </a:solidFill>
@@ -10961,7 +14809,7 @@
               </a:ln>
               <a:extLst>
                 <a:ext uri="{91240B29-F687-4f45-9708-019B960494DF}">
-                  <a14:hiddenLine xmlns:a14="http://schemas.microsoft.com/office/drawing/2010/main" xmlns="" w="9525">
+                  <a14:hiddenLine xmlns="" xmlns:a14="http://schemas.microsoft.com/office/drawing/2010/main" w="9525">
                     <a:solidFill>
                       <a:srgbClr val="000000"/>
                     </a:solidFill>
@@ -11081,7 +14929,7 @@
               </a:ln>
               <a:extLst>
                 <a:ext uri="{91240B29-F687-4f45-9708-019B960494DF}">
-                  <a14:hiddenLine xmlns:a14="http://schemas.microsoft.com/office/drawing/2010/main" xmlns="" w="9525">
+                  <a14:hiddenLine xmlns="" xmlns:a14="http://schemas.microsoft.com/office/drawing/2010/main" w="9525">
                     <a:solidFill>
                       <a:srgbClr val="000000"/>
                     </a:solidFill>
@@ -11179,7 +15027,7 @@
               </a:ln>
               <a:extLst>
                 <a:ext uri="{91240B29-F687-4f45-9708-019B960494DF}">
-                  <a14:hiddenLine xmlns:a14="http://schemas.microsoft.com/office/drawing/2010/main" xmlns="" w="9525">
+                  <a14:hiddenLine xmlns="" xmlns:a14="http://schemas.microsoft.com/office/drawing/2010/main" w="9525">
                     <a:solidFill>
                       <a:srgbClr val="000000"/>
                     </a:solidFill>
@@ -11294,7 +15142,7 @@
               </a:ln>
               <a:extLst>
                 <a:ext uri="{91240B29-F687-4f45-9708-019B960494DF}">
-                  <a14:hiddenLine xmlns:a14="http://schemas.microsoft.com/office/drawing/2010/main" xmlns="" w="9525">
+                  <a14:hiddenLine xmlns="" xmlns:a14="http://schemas.microsoft.com/office/drawing/2010/main" w="9525">
                     <a:solidFill>
                       <a:srgbClr val="000000"/>
                     </a:solidFill>
@@ -11384,7 +15232,7 @@
               </a:ln>
               <a:extLst>
                 <a:ext uri="{91240B29-F687-4f45-9708-019B960494DF}">
-                  <a14:hiddenLine xmlns:a14="http://schemas.microsoft.com/office/drawing/2010/main" xmlns="" w="9525">
+                  <a14:hiddenLine xmlns="" xmlns:a14="http://schemas.microsoft.com/office/drawing/2010/main" w="9525">
                     <a:solidFill>
                       <a:srgbClr val="000000"/>
                     </a:solidFill>
@@ -11449,7 +15297,7 @@
               </a:ln>
               <a:extLst>
                 <a:ext uri="{91240B29-F687-4f45-9708-019B960494DF}">
-                  <a14:hiddenLine xmlns:a14="http://schemas.microsoft.com/office/drawing/2010/main" xmlns="" w="9525">
+                  <a14:hiddenLine xmlns="" xmlns:a14="http://schemas.microsoft.com/office/drawing/2010/main" w="9525">
                     <a:solidFill>
                       <a:srgbClr val="000000"/>
                     </a:solidFill>
@@ -11539,7 +15387,7 @@
               </a:ln>
               <a:extLst>
                 <a:ext uri="{91240B29-F687-4f45-9708-019B960494DF}">
-                  <a14:hiddenLine xmlns:a14="http://schemas.microsoft.com/office/drawing/2010/main" xmlns="" w="9525">
+                  <a14:hiddenLine xmlns="" xmlns:a14="http://schemas.microsoft.com/office/drawing/2010/main" w="9525">
                     <a:solidFill>
                       <a:srgbClr val="000000"/>
                     </a:solidFill>
@@ -11607,7 +15455,7 @@
               </a:ln>
               <a:extLst>
                 <a:ext uri="{91240B29-F687-4f45-9708-019B960494DF}">
-                  <a14:hiddenLine xmlns:a14="http://schemas.microsoft.com/office/drawing/2010/main" xmlns="" w="9525">
+                  <a14:hiddenLine xmlns="" xmlns:a14="http://schemas.microsoft.com/office/drawing/2010/main" w="9525">
                     <a:solidFill>
                       <a:srgbClr val="000000"/>
                     </a:solidFill>
@@ -11697,7 +15545,7 @@
               </a:ln>
               <a:extLst>
                 <a:ext uri="{91240B29-F687-4f45-9708-019B960494DF}">
-                  <a14:hiddenLine xmlns:a14="http://schemas.microsoft.com/office/drawing/2010/main" xmlns="" w="9525">
+                  <a14:hiddenLine xmlns="" xmlns:a14="http://schemas.microsoft.com/office/drawing/2010/main" w="9525">
                     <a:solidFill>
                       <a:srgbClr val="000000"/>
                     </a:solidFill>
@@ -11765,7 +15613,7 @@
               </a:ln>
               <a:extLst>
                 <a:ext uri="{91240B29-F687-4f45-9708-019B960494DF}">
-                  <a14:hiddenLine xmlns:a14="http://schemas.microsoft.com/office/drawing/2010/main" xmlns="" w="9525">
+                  <a14:hiddenLine xmlns="" xmlns:a14="http://schemas.microsoft.com/office/drawing/2010/main" w="9525">
                     <a:solidFill>
                       <a:srgbClr val="000000"/>
                     </a:solidFill>
@@ -11855,7 +15703,7 @@
               </a:ln>
               <a:extLst>
                 <a:ext uri="{91240B29-F687-4f45-9708-019B960494DF}">
-                  <a14:hiddenLine xmlns:a14="http://schemas.microsoft.com/office/drawing/2010/main" xmlns="" w="9525">
+                  <a14:hiddenLine xmlns="" xmlns:a14="http://schemas.microsoft.com/office/drawing/2010/main" w="9525">
                     <a:solidFill>
                       <a:srgbClr val="000000"/>
                     </a:solidFill>
@@ -11889,7 +15737,7 @@
               </a:ln>
               <a:extLst>
                 <a:ext uri="{91240B29-F687-4f45-9708-019B960494DF}">
-                  <a14:hiddenLine xmlns:a14="http://schemas.microsoft.com/office/drawing/2010/main" xmlns="" w="9525">
+                  <a14:hiddenLine xmlns="" xmlns:a14="http://schemas.microsoft.com/office/drawing/2010/main" w="9525">
                     <a:solidFill>
                       <a:srgbClr val="000000"/>
                     </a:solidFill>
@@ -12030,7 +15878,7 @@
             <a:fld id="{48A87A34-81AB-432B-8DAE-1953F412C126}" type="datetimeFigureOut">
               <a:rPr lang="en-US" smtClean="0"/>
               <a:pPr/>
-              <a:t>11/28/2025</a:t>
+              <a:t>12/3/2025</a:t>
             </a:fld>
             <a:endParaRPr lang="en-US" dirty="0"/>
           </a:p>
@@ -17793,39 +21641,7 @@
           <a:p>
             <a:r>
               <a:rPr lang="pt-PT" dirty="0"/>
-              <a:t>O site oferece </a:t>
-            </a:r>
-            <a:r>
-              <a:rPr lang="pt-PT" b="1" dirty="0"/>
-              <a:t>design futurista, interatividade e conteúdo educativo</a:t>
-            </a:r>
-            <a:r>
-              <a:rPr lang="pt-PT" dirty="0"/>
-              <a:t>, tornando a navegação envolvente e o aprendizado mais fácil. Recursos como </a:t>
-            </a:r>
-            <a:r>
-              <a:rPr lang="pt-PT" b="1" dirty="0"/>
-              <a:t>carrosséis, cards animados, TechBot e quizzes</a:t>
-            </a:r>
-            <a:r>
-              <a:rPr lang="pt-PT" dirty="0"/>
-              <a:t> tornam a experiência prática e interessante. Apesar de limitações como </a:t>
-            </a:r>
-            <a:r>
-              <a:rPr lang="pt-PT" b="1" dirty="0"/>
-              <a:t>falta de backend, uso de Local Storage, hospedagem gratuita e acessibilidade parcial</a:t>
-            </a:r>
-            <a:r>
-              <a:rPr lang="pt-PT" dirty="0"/>
-              <a:t>, o site é eficaz, visualmente atraente e possui grande </a:t>
-            </a:r>
-            <a:r>
-              <a:rPr lang="pt-PT" b="1" dirty="0"/>
-              <a:t>potencial de crescimento</a:t>
-            </a:r>
-            <a:r>
-              <a:rPr lang="pt-PT" dirty="0"/>
-              <a:t>.</a:t>
+              <a:t>O site é visualmente atraente, interativo e educativo, com recursos como carrosséis, cards animados, TechBot e quizzes, que tornam a navegação envolvente e o aprendizado mais fácil. Apesar de limitações como ausência de backend, uso de Local Storage, hospedagem gratuita e acessibilidade parcial, ele é eficaz e tem grande potencial de crescimento.</a:t>
             </a:r>
           </a:p>
         </p:txBody>
@@ -17852,6 +21668,191 @@
       </p:transition>
     </mc:Fallback>
   </mc:AlternateContent>
+</p:sld>
+</file>
+
+<file path=ppt/slides/slide15.xml><?xml version="1.0" encoding="utf-8"?>
+<p:sld xmlns:a="http://schemas.openxmlformats.org/drawingml/2006/main" xmlns:r="http://schemas.openxmlformats.org/officeDocument/2006/relationships" xmlns:p="http://schemas.openxmlformats.org/presentationml/2006/main">
+  <p:cSld>
+    <p:spTree>
+      <p:nvGrpSpPr>
+        <p:cNvPr id="1" name=""/>
+        <p:cNvGrpSpPr/>
+        <p:nvPr/>
+      </p:nvGrpSpPr>
+      <p:grpSpPr>
+        <a:xfrm>
+          <a:off x="0" y="0"/>
+          <a:ext cx="0" cy="0"/>
+          <a:chOff x="0" y="0"/>
+          <a:chExt cx="0" cy="0"/>
+        </a:xfrm>
+      </p:grpSpPr>
+      <p:pic>
+        <p:nvPicPr>
+          <p:cNvPr id="5" name="Picture 4">
+            <a:extLst>
+              <a:ext uri="{FF2B5EF4-FFF2-40B4-BE49-F238E27FC236}">
+                <a16:creationId xmlns:a16="http://schemas.microsoft.com/office/drawing/2014/main" id="{92BF971C-207C-21F9-6BE1-A55B1546DFA2}"/>
+              </a:ext>
+            </a:extLst>
+          </p:cNvPr>
+          <p:cNvPicPr>
+            <a:picLocks noChangeAspect="1"/>
+          </p:cNvPicPr>
+          <p:nvPr/>
+        </p:nvPicPr>
+        <p:blipFill>
+          <a:blip r:embed="rId2"/>
+          <a:stretch>
+            <a:fillRect/>
+          </a:stretch>
+        </p:blipFill>
+        <p:spPr>
+          <a:xfrm>
+            <a:off x="-45473" y="-134170"/>
+            <a:ext cx="12282945" cy="7126340"/>
+          </a:xfrm>
+          <a:prstGeom prst="rect">
+            <a:avLst/>
+          </a:prstGeom>
+          <a:ln>
+            <a:noFill/>
+          </a:ln>
+          <a:effectLst>
+            <a:outerShdw blurRad="292100" dist="139700" dir="2700000" algn="tl" rotWithShape="0">
+              <a:srgbClr val="333333">
+                <a:alpha val="65000"/>
+              </a:srgbClr>
+            </a:outerShdw>
+          </a:effectLst>
+        </p:spPr>
+      </p:pic>
+      <p:sp>
+        <p:nvSpPr>
+          <p:cNvPr id="2" name="Flowchart: Terminator 1">
+            <a:hlinkClick r:id="rId3" action="ppaction://program" highlightClick="1"/>
+            <a:extLst>
+              <a:ext uri="{FF2B5EF4-FFF2-40B4-BE49-F238E27FC236}">
+                <a16:creationId xmlns:a16="http://schemas.microsoft.com/office/drawing/2014/main" id="{A8CED56A-9C4C-2F14-9A3A-011FE16A45E2}"/>
+              </a:ext>
+            </a:extLst>
+          </p:cNvPr>
+          <p:cNvSpPr/>
+          <p:nvPr/>
+        </p:nvSpPr>
+        <p:spPr>
+          <a:xfrm>
+            <a:off x="4752304" y="6407239"/>
+            <a:ext cx="1738648" cy="450761"/>
+          </a:xfrm>
+          <a:prstGeom prst="flowChartTerminator">
+            <a:avLst/>
+          </a:prstGeom>
+          <a:ln>
+            <a:solidFill>
+              <a:schemeClr val="bg2">
+                <a:lumMod val="50000"/>
+              </a:schemeClr>
+            </a:solidFill>
+          </a:ln>
+          <a:effectLst>
+            <a:glow rad="101600">
+              <a:schemeClr val="accent4">
+                <a:satMod val="175000"/>
+                <a:alpha val="40000"/>
+              </a:schemeClr>
+            </a:glow>
+            <a:outerShdw blurRad="50800" dist="38100" dir="5400000" algn="t" rotWithShape="0">
+              <a:prstClr val="black">
+                <a:alpha val="40000"/>
+              </a:prstClr>
+            </a:outerShdw>
+            <a:reflection blurRad="6350" stA="52000" endA="300" endPos="35000" dir="5400000" sy="-100000" algn="bl" rotWithShape="0"/>
+          </a:effectLst>
+          <a:scene3d>
+            <a:camera prst="perspectiveFront"/>
+            <a:lightRig rig="soft" dir="t">
+              <a:rot lat="0" lon="0" rev="0"/>
+            </a:lightRig>
+          </a:scene3d>
+          <a:sp3d contourW="44450" prstMaterial="matte">
+            <a:bevelT w="63500" h="63500" prst="artDeco"/>
+            <a:contourClr>
+              <a:srgbClr val="FFFFFF"/>
+            </a:contourClr>
+          </a:sp3d>
+        </p:spPr>
+        <p:style>
+          <a:lnRef idx="2">
+            <a:schemeClr val="accent3">
+              <a:shade val="15000"/>
+            </a:schemeClr>
+          </a:lnRef>
+          <a:fillRef idx="1">
+            <a:schemeClr val="accent3"/>
+          </a:fillRef>
+          <a:effectRef idx="0">
+            <a:schemeClr val="accent3"/>
+          </a:effectRef>
+          <a:fontRef idx="minor">
+            <a:schemeClr val="lt1"/>
+          </a:fontRef>
+        </p:style>
+        <p:txBody>
+          <a:bodyPr rtlCol="0" anchor="ctr"/>
+          <a:lstStyle/>
+          <a:p>
+            <a:pPr algn="ctr"/>
+            <a:r>
+              <a:rPr lang="pt-PT" dirty="0"/>
+              <a:t>ENTRAR</a:t>
+            </a:r>
+          </a:p>
+        </p:txBody>
+      </p:sp>
+      <p:sp>
+        <p:nvSpPr>
+          <p:cNvPr id="3" name="TextBox 2">
+            <a:extLst>
+              <a:ext uri="{FF2B5EF4-FFF2-40B4-BE49-F238E27FC236}">
+                <a16:creationId xmlns:a16="http://schemas.microsoft.com/office/drawing/2014/main" id="{102BAA19-B352-D54E-74A0-958FA3F0F357}"/>
+              </a:ext>
+            </a:extLst>
+          </p:cNvPr>
+          <p:cNvSpPr txBox="1"/>
+          <p:nvPr/>
+        </p:nvSpPr>
+        <p:spPr>
+          <a:xfrm>
+            <a:off x="5731099" y="3136005"/>
+            <a:ext cx="914400" cy="914400"/>
+          </a:xfrm>
+          <a:prstGeom prst="rect">
+            <a:avLst/>
+          </a:prstGeom>
+          <a:noFill/>
+        </p:spPr>
+        <p:txBody>
+          <a:bodyPr wrap="square" rtlCol="0">
+            <a:spAutoFit/>
+          </a:bodyPr>
+          <a:lstStyle/>
+          <a:p>
+            <a:endParaRPr lang="pt-PT" dirty="0"/>
+          </a:p>
+        </p:txBody>
+      </p:sp>
+    </p:spTree>
+    <p:extLst>
+      <p:ext uri="{BB962C8B-B14F-4D97-AF65-F5344CB8AC3E}">
+        <p14:creationId xmlns:p14="http://schemas.microsoft.com/office/powerpoint/2010/main" val="1877052251"/>
+      </p:ext>
+    </p:extLst>
+  </p:cSld>
+  <p:clrMapOvr>
+    <a:masterClrMapping/>
+  </p:clrMapOvr>
 </p:sld>
 </file>
 
@@ -17890,7 +21891,7 @@
         </p:nvSpPr>
         <p:spPr>
           <a:xfrm>
-            <a:off x="1139829" y="-21759"/>
+            <a:off x="1458794" y="0"/>
             <a:ext cx="9905998" cy="1277235"/>
           </a:xfrm>
         </p:spPr>
@@ -17905,6 +21906,34 @@
           </a:p>
         </p:txBody>
       </p:sp>
+      <p:graphicFrame>
+        <p:nvGraphicFramePr>
+          <p:cNvPr id="3" name="Diagram 2">
+            <a:extLst>
+              <a:ext uri="{FF2B5EF4-FFF2-40B4-BE49-F238E27FC236}">
+                <a16:creationId xmlns:a16="http://schemas.microsoft.com/office/drawing/2014/main" id="{DC4A72E5-806E-C9D7-DE60-B897B79D8693}"/>
+              </a:ext>
+            </a:extLst>
+          </p:cNvPr>
+          <p:cNvGraphicFramePr/>
+          <p:nvPr>
+            <p:extLst>
+              <p:ext uri="{D42A27DB-BD31-4B8C-83A1-F6EECF244321}">
+                <p14:modId xmlns:p14="http://schemas.microsoft.com/office/powerpoint/2010/main" val="1487354402"/>
+              </p:ext>
+            </p:extLst>
+          </p:nvPr>
+        </p:nvGraphicFramePr>
+        <p:xfrm>
+          <a:off x="1458794" y="1019917"/>
+          <a:ext cx="8128000" cy="5418667"/>
+        </p:xfrm>
+        <a:graphic>
+          <a:graphicData uri="http://schemas.openxmlformats.org/drawingml/2006/diagram">
+            <dgm:relIds xmlns:dgm="http://schemas.openxmlformats.org/drawingml/2006/diagram" xmlns:r="http://schemas.openxmlformats.org/officeDocument/2006/relationships" r:dm="rId2" r:lo="rId3" r:qs="rId4" r:cs="rId5"/>
+          </a:graphicData>
+        </a:graphic>
+      </p:graphicFrame>
     </p:spTree>
     <p:extLst>
       <p:ext uri="{BB962C8B-B14F-4D97-AF65-F5344CB8AC3E}">
@@ -18123,6 +22152,59 @@
                       </p:childTnLst>
                     </p:cTn>
                   </p:par>
+                  <p:par>
+                    <p:cTn id="19" fill="hold">
+                      <p:stCondLst>
+                        <p:cond delay="indefinite"/>
+                      </p:stCondLst>
+                      <p:childTnLst>
+                        <p:par>
+                          <p:cTn id="20" fill="hold">
+                            <p:stCondLst>
+                              <p:cond delay="0"/>
+                            </p:stCondLst>
+                            <p:childTnLst>
+                              <p:par>
+                                <p:cTn id="21" presetID="9" presetClass="entr" presetSubtype="0" fill="hold" grpId="0" nodeType="clickEffect">
+                                  <p:stCondLst>
+                                    <p:cond delay="0"/>
+                                  </p:stCondLst>
+                                  <p:childTnLst>
+                                    <p:set>
+                                      <p:cBhvr>
+                                        <p:cTn id="22" dur="1" fill="hold">
+                                          <p:stCondLst>
+                                            <p:cond delay="0"/>
+                                          </p:stCondLst>
+                                        </p:cTn>
+                                        <p:tgtEl>
+                                          <p:spTgt spid="3"/>
+                                        </p:tgtEl>
+                                        <p:attrNameLst>
+                                          <p:attrName>style.visibility</p:attrName>
+                                        </p:attrNameLst>
+                                      </p:cBhvr>
+                                      <p:to>
+                                        <p:strVal val="visible"/>
+                                      </p:to>
+                                    </p:set>
+                                    <p:animEffect transition="in" filter="dissolve">
+                                      <p:cBhvr>
+                                        <p:cTn id="23" dur="500"/>
+                                        <p:tgtEl>
+                                          <p:spTgt spid="3"/>
+                                        </p:tgtEl>
+                                      </p:cBhvr>
+                                    </p:animEffect>
+                                  </p:childTnLst>
+                                </p:cTn>
+                              </p:par>
+                            </p:childTnLst>
+                          </p:cTn>
+                        </p:par>
+                      </p:childTnLst>
+                    </p:cTn>
+                  </p:par>
                 </p:childTnLst>
               </p:cTn>
               <p:prevCondLst>
@@ -18148,6 +22230,9 @@
       <p:bldP spid="2" grpId="0"/>
       <p:bldP spid="2" grpId="1"/>
       <p:bldP spid="2" grpId="2"/>
+      <p:bldGraphic spid="3" grpId="0">
+        <p:bldAsOne/>
+      </p:bldGraphic>
     </p:bldLst>
   </p:timing>
 </p:sld>
@@ -18233,71 +22318,7 @@
           <a:p>
             <a:r>
               <a:rPr lang="pt-PT" sz="2000" dirty="0"/>
-              <a:t>O projeto apresenta um </a:t>
-            </a:r>
-            <a:r>
-              <a:rPr lang="pt-PT" sz="2000" b="1" dirty="0"/>
-              <a:t>site moderno, intuitivo e acessível</a:t>
-            </a:r>
-            <a:r>
-              <a:rPr lang="pt-PT" sz="2000" dirty="0"/>
-              <a:t>, desenvolvido em </a:t>
-            </a:r>
-            <a:r>
-              <a:rPr lang="pt-PT" sz="2000" b="1" dirty="0"/>
-              <a:t>HTML, CSS e JavaScript</a:t>
-            </a:r>
-            <a:r>
-              <a:rPr lang="pt-PT" sz="2000" dirty="0"/>
-              <a:t> e hospedado no </a:t>
-            </a:r>
-            <a:r>
-              <a:rPr lang="pt-PT" sz="2000" b="1" dirty="0"/>
-              <a:t>GitHub</a:t>
-            </a:r>
-            <a:r>
-              <a:rPr lang="pt-PT" sz="2000" dirty="0"/>
-              <a:t>. A plataforma combina </a:t>
-            </a:r>
-            <a:r>
-              <a:rPr lang="pt-PT" sz="2000" b="1" dirty="0"/>
-              <a:t>design elegante</a:t>
-            </a:r>
-            <a:r>
-              <a:rPr lang="pt-PT" sz="2000" dirty="0"/>
-              <a:t>, boa organização dos conteúdos e </a:t>
-            </a:r>
-            <a:r>
-              <a:rPr lang="pt-PT" sz="2000" b="1" dirty="0"/>
-              <a:t>interatividade</a:t>
-            </a:r>
-            <a:r>
-              <a:rPr lang="pt-PT" sz="2000" dirty="0"/>
-              <a:t>, oferecendo navegação clara e envolvente. Apesar de depender de internet e ter possíveis limitações em navegadores antigos, o site destaca-se pelo </a:t>
-            </a:r>
-            <a:r>
-              <a:rPr lang="pt-PT" sz="2000" b="1" dirty="0"/>
-              <a:t>acesso fácil</a:t>
-            </a:r>
-            <a:r>
-              <a:rPr lang="pt-PT" sz="2000" dirty="0"/>
-              <a:t> e uso de </a:t>
-            </a:r>
-            <a:r>
-              <a:rPr lang="pt-PT" sz="2000" b="1" dirty="0"/>
-              <a:t>tecnologias abertas</a:t>
-            </a:r>
-            <a:r>
-              <a:rPr lang="pt-PT" sz="2000" dirty="0"/>
-              <a:t>. Durante o desenvolvimento, desafios de responsividade, harmonia visual e integração gráfica foram superados, resultando num produto </a:t>
-            </a:r>
-            <a:r>
-              <a:rPr lang="pt-PT" sz="2000" b="1" dirty="0"/>
-              <a:t>profissional, funcional e atrativo</a:t>
-            </a:r>
-            <a:r>
-              <a:rPr lang="pt-PT" sz="2000" dirty="0"/>
-              <a:t>.</a:t>
+              <a:t>Robótica Futurista  é um site moderno, intuitivo e interativo, desenvolvido em HTML, CSS e JavaScript,  hospedado no GitHub. Com design elegante e boa organização, oferece navegação clara e acessível, superando desafios de responsividade e integração visual, apesar de depender de internet e apresentar limitações em navegadores antigos.</a:t>
             </a:r>
           </a:p>
         </p:txBody>
@@ -19255,15 +23276,14 @@
         </p:spPr>
         <p:txBody>
           <a:bodyPr>
-            <a:normAutofit fontScale="85000" lnSpcReduction="10000"/>
+            <a:normAutofit/>
           </a:bodyPr>
           <a:lstStyle/>
           <a:p>
             <a:r>
               <a:rPr lang="pt-PT" sz="3200" dirty="0"/>
-              <a:t>A criação do site nasceu da necessidade de oferecer uma plataforma moderna, acessível e interativa, com conteúdo e design planejados para serem organizados e funcionais. Recursos como o TechBot e o carrossel 3D tornam a navegação mais dinâmica, e o uso de Local Storage ajuda no tratamento de dados temporários. O site foi hospedado no GitHub para facilitar acesso, controlo de versões e futuras melhorias. O projeto foi pensado para evoluir, incluindo integração com bancos de dados e novas funcionalidades, refletindo o esforço da equipa e o uso de tecnologias modernas</a:t>
+              <a:t>O site foi criado para ser moderno, acessível e interativo, com design funcional e recursos como TechBot, carrossel 3D e uso de Local Storage. Hospedado no GitHub, permite fácil acesso e controle de versões, e o projeto está preparado para evoluir com integração a bancos de dados e novas funcionalidades, refletindo o trabalho da equipe e tecnologias atuais.</a:t>
             </a:r>
-            <a:endParaRPr lang="pt-PT" dirty="0"/>
           </a:p>
         </p:txBody>
       </p:sp>
@@ -22720,7 +26740,7 @@
 <file path=ppt/theme/theme1.xml><?xml version="1.0" encoding="utf-8"?>
 <a:theme xmlns:a="http://schemas.openxmlformats.org/drawingml/2006/main" name="Circuit">
   <a:themeElements>
-    <a:clrScheme name="Circuit">
+    <a:clrScheme name="Blue Warm">
       <a:dk1>
         <a:sysClr val="windowText" lastClr="000000"/>
       </a:dk1>
@@ -22728,34 +26748,34 @@
         <a:sysClr val="window" lastClr="FFFFFF"/>
       </a:lt1>
       <a:dk2>
-        <a:srgbClr val="134770"/>
+        <a:srgbClr val="242852"/>
       </a:dk2>
       <a:lt2>
-        <a:srgbClr val="82FFFF"/>
+        <a:srgbClr val="ACCBF9"/>
       </a:lt2>
       <a:accent1>
-        <a:srgbClr val="9ACD4C"/>
+        <a:srgbClr val="4A66AC"/>
       </a:accent1>
       <a:accent2>
-        <a:srgbClr val="FAA93A"/>
+        <a:srgbClr val="629DD1"/>
       </a:accent2>
       <a:accent3>
-        <a:srgbClr val="D35940"/>
+        <a:srgbClr val="297FD5"/>
       </a:accent3>
       <a:accent4>
-        <a:srgbClr val="B258D3"/>
+        <a:srgbClr val="7F8FA9"/>
       </a:accent4>
       <a:accent5>
-        <a:srgbClr val="63A0CC"/>
+        <a:srgbClr val="5AA2AE"/>
       </a:accent5>
       <a:accent6>
-        <a:srgbClr val="8AC4A7"/>
+        <a:srgbClr val="9D90A0"/>
       </a:accent6>
       <a:hlink>
-        <a:srgbClr val="B8FA56"/>
+        <a:srgbClr val="9454C3"/>
       </a:hlink>
       <a:folHlink>
-        <a:srgbClr val="7AF8CC"/>
+        <a:srgbClr val="3EBBF0"/>
       </a:folHlink>
     </a:clrScheme>
     <a:fontScheme name="Circuit">
@@ -22830,7 +26850,7 @@
         <a:font script="Geor" typeface="Sylfaen"/>
       </a:minorFont>
     </a:fontScheme>
-    <a:fmtScheme name="Circuit">
+    <a:fmtScheme name="Office 2007-2010">
       <a:fillStyleLst>
         <a:solidFill>
           <a:schemeClr val="phClr"/>
@@ -22839,55 +26859,66 @@
           <a:gsLst>
             <a:gs pos="0">
               <a:schemeClr val="phClr">
-                <a:tint val="58000"/>
-                <a:satMod val="108000"/>
-                <a:lumMod val="110000"/>
+                <a:tint val="50000"/>
+                <a:satMod val="300000"/>
+              </a:schemeClr>
+            </a:gs>
+            <a:gs pos="35000">
+              <a:schemeClr val="phClr">
+                <a:tint val="37000"/>
+                <a:satMod val="300000"/>
               </a:schemeClr>
             </a:gs>
             <a:gs pos="100000">
               <a:schemeClr val="phClr">
-                <a:tint val="81000"/>
-                <a:satMod val="109000"/>
-                <a:lumMod val="105000"/>
+                <a:tint val="15000"/>
+                <a:satMod val="350000"/>
               </a:schemeClr>
             </a:gs>
           </a:gsLst>
-          <a:lin ang="5040000" scaled="0"/>
+          <a:lin ang="16200000" scaled="1"/>
         </a:gradFill>
         <a:gradFill rotWithShape="1">
           <a:gsLst>
             <a:gs pos="0">
               <a:schemeClr val="phClr">
-                <a:tint val="94000"/>
-                <a:satMod val="105000"/>
-                <a:lumMod val="102000"/>
+                <a:shade val="51000"/>
+                <a:satMod val="130000"/>
+              </a:schemeClr>
+            </a:gs>
+            <a:gs pos="80000">
+              <a:schemeClr val="phClr">
+                <a:shade val="93000"/>
+                <a:satMod val="130000"/>
               </a:schemeClr>
             </a:gs>
             <a:gs pos="100000">
               <a:schemeClr val="phClr">
-                <a:shade val="74000"/>
-                <a:satMod val="128000"/>
-                <a:lumMod val="100000"/>
+                <a:shade val="94000"/>
+                <a:satMod val="135000"/>
               </a:schemeClr>
             </a:gs>
           </a:gsLst>
-          <a:lin ang="5400000" scaled="0"/>
+          <a:lin ang="16200000" scaled="0"/>
         </a:gradFill>
       </a:fillStyleLst>
       <a:lnStyleLst>
         <a:ln w="9525" cap="flat" cmpd="sng" algn="ctr">
           <a:solidFill>
-            <a:schemeClr val="phClr"/>
+            <a:schemeClr val="phClr">
+              <a:shade val="95000"/>
+              <a:satMod val="105000"/>
+            </a:schemeClr>
           </a:solidFill>
           <a:prstDash val="solid"/>
         </a:ln>
-        <a:ln w="15875" cap="flat" cmpd="sng" algn="ctr">
+        <a:ln w="25400" cap="flat" cmpd="sng" algn="ctr">
           <a:solidFill>
             <a:schemeClr val="phClr"/>
           </a:solidFill>
           <a:prstDash val="solid"/>
         </a:ln>
-        <a:ln w="22225" cap="flat" cmpd="sng" algn="ctr">
+        <a:ln w="38100" cap="flat" cmpd="sng" algn="ctr">
           <a:solidFill>
             <a:schemeClr val="phClr"/>
           </a:solidFill>
@@ -22896,19 +26927,42 @@
       </a:lnStyleLst>
       <a:effectStyleLst>
         <a:effectStyle>
-          <a:effectLst/>
-        </a:effectStyle>
-        <a:effectStyle>
-          <a:effectLst/>
+          <a:effectLst>
+            <a:outerShdw blurRad="40000" dist="20000" dir="5400000" rotWithShape="0">
+              <a:srgbClr val="000000">
+                <a:alpha val="38000"/>
+              </a:srgbClr>
+            </a:outerShdw>
+          </a:effectLst>
         </a:effectStyle>
         <a:effectStyle>
           <a:effectLst>
-            <a:outerShdw blurRad="57150" dist="19050" dir="5400000" algn="ctr" rotWithShape="0">
+            <a:outerShdw blurRad="40000" dist="23000" dir="5400000" rotWithShape="0">
               <a:srgbClr val="000000">
-                <a:alpha val="63000"/>
+                <a:alpha val="35000"/>
               </a:srgbClr>
             </a:outerShdw>
           </a:effectLst>
+        </a:effectStyle>
+        <a:effectStyle>
+          <a:effectLst>
+            <a:outerShdw blurRad="40000" dist="23000" dir="5400000" rotWithShape="0">
+              <a:srgbClr val="000000">
+                <a:alpha val="35000"/>
+              </a:srgbClr>
+            </a:outerShdw>
+          </a:effectLst>
+          <a:scene3d>
+            <a:camera prst="orthographicFront">
+              <a:rot lat="0" lon="0" rev="0"/>
+            </a:camera>
+            <a:lightRig rig="threePt" dir="t">
+              <a:rot lat="0" lon="0" rev="1200000"/>
+            </a:lightRig>
+          </a:scene3d>
+          <a:sp3d>
+            <a:bevelT w="63500" h="25400"/>
+          </a:sp3d>
         </a:effectStyle>
       </a:effectStyleLst>
       <a:bgFillStyleLst>
